--- a/PowerShell Advanced Fundamentals.pptx
+++ b/PowerShell Advanced Fundamentals.pptx
@@ -3,9 +3,9 @@
 <p:presentation xmlns:a="http://schemas.openxmlformats.org/drawingml/2006/main" xmlns:p="http://schemas.openxmlformats.org/presentationml/2006/main" xmlns:r="http://schemas.openxmlformats.org/officeDocument/2006/relationships" xmlns:p14="http://schemas.microsoft.com/office/powerpoint/2010/main" xmlns:p15="http://schemas.microsoft.com/office/powerpoint/2012/main" xmlns:mc="http://schemas.openxmlformats.org/markup-compatibility/2006">
   <p:sldMasterIdLst>
     <p:sldMasterId id="2147483648" r:id="rId2"/>
-    <p:sldMasterId id="2147483652" r:id="rId3"/>
-    <p:sldMasterId id="2147483654" r:id="rId4"/>
-    <p:sldMasterId id="2147483656" r:id="rId5"/>
+    <p:sldMasterId id="2147483653" r:id="rId3"/>
+    <p:sldMasterId id="2147483655" r:id="rId4"/>
+    <p:sldMasterId id="2147483657" r:id="rId5"/>
   </p:sldMasterIdLst>
   <p:notesMasterIdLst>
     <p:notesMasterId r:id="rId6"/>
@@ -91,6 +91,7 @@
     <p:sldId id="333" r:id="rId84"/>
     <p:sldId id="334" r:id="rId85"/>
     <p:sldId id="335" r:id="rId86"/>
+    <p:sldId id="336" r:id="rId87"/>
   </p:sldIdLst>
   <p:sldSz cx="12192000" cy="6858000"/>
   <p:notesSz cx="6858000" cy="9144000"/>
@@ -116,7 +117,7 @@
       </p:grpSpPr>
       <p:sp>
         <p:nvSpPr>
-          <p:cNvPr id="40" name="PlaceHolder 1"/>
+          <p:cNvPr id="46" name="PlaceHolder 1"/>
           <p:cNvSpPr>
             <a:spLocks noGrp="1"/>
           </p:cNvSpPr>
@@ -167,7 +168,7 @@
       </p:sp>
       <p:sp>
         <p:nvSpPr>
-          <p:cNvPr id="41" name="PlaceHolder 2"/>
+          <p:cNvPr id="47" name="PlaceHolder 2"/>
           <p:cNvSpPr>
             <a:spLocks noGrp="1"/>
           </p:cNvSpPr>
@@ -220,7 +221,7 @@
       </p:sp>
       <p:sp>
         <p:nvSpPr>
-          <p:cNvPr id="42" name="PlaceHolder 3"/>
+          <p:cNvPr id="48" name="PlaceHolder 3"/>
           <p:cNvSpPr>
             <a:spLocks noGrp="1"/>
           </p:cNvSpPr>
@@ -273,12 +274,12 @@
       </p:sp>
       <p:sp>
         <p:nvSpPr>
-          <p:cNvPr id="43" name="PlaceHolder 4"/>
-          <p:cNvSpPr>
-            <a:spLocks noGrp="1"/>
-          </p:cNvSpPr>
-          <p:nvPr>
-            <p:ph type="dt" idx="16"/>
+          <p:cNvPr id="49" name="PlaceHolder 4"/>
+          <p:cNvSpPr>
+            <a:spLocks noGrp="1"/>
+          </p:cNvSpPr>
+          <p:nvPr>
+            <p:ph type="dt" idx="18"/>
           </p:nvPr>
         </p:nvSpPr>
         <p:spPr>
@@ -339,12 +340,12 @@
       </p:sp>
       <p:sp>
         <p:nvSpPr>
-          <p:cNvPr id="44" name="PlaceHolder 5"/>
-          <p:cNvSpPr>
-            <a:spLocks noGrp="1"/>
-          </p:cNvSpPr>
-          <p:nvPr>
-            <p:ph type="ftr" idx="17"/>
+          <p:cNvPr id="50" name="PlaceHolder 5"/>
+          <p:cNvSpPr>
+            <a:spLocks noGrp="1"/>
+          </p:cNvSpPr>
+          <p:nvPr>
+            <p:ph type="ftr" idx="19"/>
           </p:nvPr>
         </p:nvSpPr>
         <p:spPr>
@@ -405,12 +406,12 @@
       </p:sp>
       <p:sp>
         <p:nvSpPr>
-          <p:cNvPr id="45" name="PlaceHolder 6"/>
-          <p:cNvSpPr>
-            <a:spLocks noGrp="1"/>
-          </p:cNvSpPr>
-          <p:nvPr>
-            <p:ph type="sldNum" idx="18"/>
+          <p:cNvPr id="51" name="PlaceHolder 6"/>
+          <p:cNvSpPr>
+            <a:spLocks noGrp="1"/>
+          </p:cNvSpPr>
+          <p:nvPr>
+            <p:ph type="sldNum" idx="20"/>
           </p:nvPr>
         </p:nvSpPr>
         <p:spPr>
@@ -447,7 +448,7 @@
             <a:pPr indent="0" algn="r">
               <a:buNone/>
             </a:pPr>
-            <a:fld id="{F8B26F9A-21F2-4EAF-894A-59FA4AF07A11}" type="slidenum">
+            <a:fld id="{32B759D3-9BD2-4514-AA9E-A19088F7B0EB}" type="slidenum">
               <a:rPr b="0" lang="sv-SE" sz="1400" strike="noStrike" u="none">
                 <a:solidFill>
                   <a:srgbClr val="000000"/>
@@ -494,7 +495,7 @@
       </p:grpSpPr>
       <p:sp>
         <p:nvSpPr>
-          <p:cNvPr id="208" name="PlaceHolder 1"/>
+          <p:cNvPr id="216" name="PlaceHolder 1"/>
           <p:cNvSpPr>
             <a:spLocks noGrp="1"/>
           </p:cNvSpPr>
@@ -505,7 +506,7 @@
         <p:spPr>
           <a:xfrm>
             <a:off x="685800" y="1143000"/>
-            <a:ext cx="5485320" cy="3085200"/>
+            <a:ext cx="5484960" cy="3084840"/>
           </a:xfrm>
           <a:prstGeom prst="rect">
             <a:avLst/>
@@ -517,7 +518,7 @@
       </p:sp>
       <p:sp>
         <p:nvSpPr>
-          <p:cNvPr id="209" name="PlaceHolder 2"/>
+          <p:cNvPr id="217" name="PlaceHolder 2"/>
           <p:cNvSpPr>
             <a:spLocks noGrp="1"/>
           </p:cNvSpPr>
@@ -528,7 +529,7 @@
         <p:spPr>
           <a:xfrm>
             <a:off x="685800" y="4400640"/>
-            <a:ext cx="5485320" cy="3599280"/>
+            <a:ext cx="5484960" cy="3598920"/>
           </a:xfrm>
           <a:prstGeom prst="rect">
             <a:avLst/>
@@ -559,18 +560,18 @@
       </p:sp>
       <p:sp>
         <p:nvSpPr>
-          <p:cNvPr id="210" name="PlaceHolder 3"/>
-          <p:cNvSpPr>
-            <a:spLocks noGrp="1"/>
-          </p:cNvSpPr>
-          <p:nvPr>
-            <p:ph type="sldNum" idx="19"/>
+          <p:cNvPr id="218" name="PlaceHolder 3"/>
+          <p:cNvSpPr>
+            <a:spLocks noGrp="1"/>
+          </p:cNvSpPr>
+          <p:nvPr>
+            <p:ph type="sldNum" idx="21"/>
           </p:nvPr>
         </p:nvSpPr>
         <p:spPr>
           <a:xfrm>
             <a:off x="3884760" y="8685360"/>
-            <a:ext cx="2970720" cy="457560"/>
+            <a:ext cx="2970360" cy="457200"/>
           </a:xfrm>
           <a:prstGeom prst="rect">
             <a:avLst/>
@@ -613,7 +614,7 @@
                 <a:tab algn="l" pos="0"/>
               </a:tabLst>
             </a:pPr>
-            <a:fld id="{6A4BD418-A1DD-4C3A-8B31-04B48E080FD8}" type="slidenum">
+            <a:fld id="{5C94A6DA-16A1-475B-8351-714F6CAB9A6B}" type="slidenum">
               <a:rPr b="0" lang="en-SE" sz="1200" strike="noStrike" u="none">
                 <a:solidFill>
                   <a:srgbClr val="000000"/>
@@ -622,7 +623,7 @@
                 <a:uFillTx/>
                 <a:latin typeface="Times New Roman"/>
               </a:rPr>
-              <a:t>79</a:t>
+              <a:t>80</a:t>
             </a:fld>
             <a:endParaRPr b="0" lang="sv-SE" sz="1200" strike="noStrike" u="none">
               <a:solidFill>
@@ -659,7 +660,7 @@
       </p:grpSpPr>
       <p:sp>
         <p:nvSpPr>
-          <p:cNvPr id="211" name="PlaceHolder 1"/>
+          <p:cNvPr id="219" name="PlaceHolder 1"/>
           <p:cNvSpPr>
             <a:spLocks noGrp="1"/>
           </p:cNvSpPr>
@@ -670,7 +671,7 @@
         <p:spPr>
           <a:xfrm>
             <a:off x="685800" y="1143000"/>
-            <a:ext cx="5485320" cy="3085200"/>
+            <a:ext cx="5484960" cy="3084840"/>
           </a:xfrm>
           <a:prstGeom prst="rect">
             <a:avLst/>
@@ -682,7 +683,7 @@
       </p:sp>
       <p:sp>
         <p:nvSpPr>
-          <p:cNvPr id="212" name="PlaceHolder 2"/>
+          <p:cNvPr id="220" name="PlaceHolder 2"/>
           <p:cNvSpPr>
             <a:spLocks noGrp="1"/>
           </p:cNvSpPr>
@@ -693,7 +694,7 @@
         <p:spPr>
           <a:xfrm>
             <a:off x="685800" y="4400640"/>
-            <a:ext cx="5485320" cy="3599280"/>
+            <a:ext cx="5484960" cy="3598920"/>
           </a:xfrm>
           <a:prstGeom prst="rect">
             <a:avLst/>
@@ -724,18 +725,18 @@
       </p:sp>
       <p:sp>
         <p:nvSpPr>
-          <p:cNvPr id="213" name="PlaceHolder 3"/>
-          <p:cNvSpPr>
-            <a:spLocks noGrp="1"/>
-          </p:cNvSpPr>
-          <p:nvPr>
-            <p:ph type="sldNum" idx="20"/>
+          <p:cNvPr id="221" name="PlaceHolder 3"/>
+          <p:cNvSpPr>
+            <a:spLocks noGrp="1"/>
+          </p:cNvSpPr>
+          <p:nvPr>
+            <p:ph type="sldNum" idx="22"/>
           </p:nvPr>
         </p:nvSpPr>
         <p:spPr>
           <a:xfrm>
             <a:off x="3884760" y="8685360"/>
-            <a:ext cx="2970720" cy="457560"/>
+            <a:ext cx="2970360" cy="457200"/>
           </a:xfrm>
           <a:prstGeom prst="rect">
             <a:avLst/>
@@ -778,7 +779,7 @@
                 <a:tab algn="l" pos="0"/>
               </a:tabLst>
             </a:pPr>
-            <a:fld id="{C29AAB22-6284-4FF4-AD09-79231E90B7FA}" type="slidenum">
+            <a:fld id="{47CD5A5D-5C0D-457A-8CFA-7DC8D2A1820E}" type="slidenum">
               <a:rPr b="0" lang="en-SE" sz="1200" strike="noStrike" u="none">
                 <a:solidFill>
                   <a:srgbClr val="000000"/>
@@ -787,7 +788,7 @@
                 <a:uFillTx/>
                 <a:latin typeface="Times New Roman"/>
               </a:rPr>
-              <a:t>79</a:t>
+              <a:t>80</a:t>
             </a:fld>
             <a:endParaRPr b="0" lang="sv-SE" sz="1200" strike="noStrike" u="none">
               <a:solidFill>
@@ -824,7 +825,7 @@
       </p:grpSpPr>
       <p:sp>
         <p:nvSpPr>
-          <p:cNvPr id="214" name="PlaceHolder 1"/>
+          <p:cNvPr id="222" name="PlaceHolder 1"/>
           <p:cNvSpPr>
             <a:spLocks noGrp="1"/>
           </p:cNvSpPr>
@@ -835,7 +836,7 @@
         <p:spPr>
           <a:xfrm>
             <a:off x="685800" y="1143000"/>
-            <a:ext cx="5485320" cy="3085200"/>
+            <a:ext cx="5484960" cy="3084840"/>
           </a:xfrm>
           <a:prstGeom prst="rect">
             <a:avLst/>
@@ -847,7 +848,7 @@
       </p:sp>
       <p:sp>
         <p:nvSpPr>
-          <p:cNvPr id="215" name="PlaceHolder 2"/>
+          <p:cNvPr id="223" name="PlaceHolder 2"/>
           <p:cNvSpPr>
             <a:spLocks noGrp="1"/>
           </p:cNvSpPr>
@@ -858,7 +859,7 @@
         <p:spPr>
           <a:xfrm>
             <a:off x="685800" y="4400640"/>
-            <a:ext cx="5485320" cy="3599280"/>
+            <a:ext cx="5484960" cy="3598920"/>
           </a:xfrm>
           <a:prstGeom prst="rect">
             <a:avLst/>
@@ -889,18 +890,18 @@
       </p:sp>
       <p:sp>
         <p:nvSpPr>
-          <p:cNvPr id="216" name="PlaceHolder 3"/>
-          <p:cNvSpPr>
-            <a:spLocks noGrp="1"/>
-          </p:cNvSpPr>
-          <p:nvPr>
-            <p:ph type="sldNum" idx="21"/>
+          <p:cNvPr id="224" name="PlaceHolder 3"/>
+          <p:cNvSpPr>
+            <a:spLocks noGrp="1"/>
+          </p:cNvSpPr>
+          <p:nvPr>
+            <p:ph type="sldNum" idx="23"/>
           </p:nvPr>
         </p:nvSpPr>
         <p:spPr>
           <a:xfrm>
             <a:off x="3884760" y="8685360"/>
-            <a:ext cx="2970720" cy="457560"/>
+            <a:ext cx="2970360" cy="457200"/>
           </a:xfrm>
           <a:prstGeom prst="rect">
             <a:avLst/>
@@ -943,7 +944,7 @@
                 <a:tab algn="l" pos="0"/>
               </a:tabLst>
             </a:pPr>
-            <a:fld id="{2D1C087E-82A1-48EA-B61D-B2627493687E}" type="slidenum">
+            <a:fld id="{807A45A9-9C3F-4069-90EE-2C1B54DC9067}" type="slidenum">
               <a:rPr b="0" lang="en-SE" sz="1200" strike="noStrike" u="none">
                 <a:solidFill>
                   <a:srgbClr val="000000"/>
@@ -952,7 +953,7 @@
                 <a:uFillTx/>
                 <a:latin typeface="Times New Roman"/>
               </a:rPr>
-              <a:t>79</a:t>
+              <a:t>80</a:t>
             </a:fld>
             <a:endParaRPr b="0" lang="sv-SE" sz="1200" strike="noStrike" u="none">
               <a:solidFill>
@@ -989,7 +990,7 @@
       </p:grpSpPr>
       <p:sp>
         <p:nvSpPr>
-          <p:cNvPr id="217" name="PlaceHolder 1"/>
+          <p:cNvPr id="225" name="PlaceHolder 1"/>
           <p:cNvSpPr>
             <a:spLocks noGrp="1"/>
           </p:cNvSpPr>
@@ -1000,7 +1001,7 @@
         <p:spPr>
           <a:xfrm>
             <a:off x="685800" y="1143000"/>
-            <a:ext cx="5485320" cy="3085200"/>
+            <a:ext cx="5484960" cy="3084840"/>
           </a:xfrm>
           <a:prstGeom prst="rect">
             <a:avLst/>
@@ -1012,7 +1013,7 @@
       </p:sp>
       <p:sp>
         <p:nvSpPr>
-          <p:cNvPr id="218" name="PlaceHolder 2"/>
+          <p:cNvPr id="226" name="PlaceHolder 2"/>
           <p:cNvSpPr>
             <a:spLocks noGrp="1"/>
           </p:cNvSpPr>
@@ -1023,7 +1024,7 @@
         <p:spPr>
           <a:xfrm>
             <a:off x="685800" y="4400640"/>
-            <a:ext cx="5485320" cy="3599280"/>
+            <a:ext cx="5484960" cy="3598920"/>
           </a:xfrm>
           <a:prstGeom prst="rect">
             <a:avLst/>
@@ -1054,18 +1055,18 @@
       </p:sp>
       <p:sp>
         <p:nvSpPr>
-          <p:cNvPr id="219" name="PlaceHolder 3"/>
-          <p:cNvSpPr>
-            <a:spLocks noGrp="1"/>
-          </p:cNvSpPr>
-          <p:nvPr>
-            <p:ph type="sldNum" idx="22"/>
+          <p:cNvPr id="227" name="PlaceHolder 3"/>
+          <p:cNvSpPr>
+            <a:spLocks noGrp="1"/>
+          </p:cNvSpPr>
+          <p:nvPr>
+            <p:ph type="sldNum" idx="24"/>
           </p:nvPr>
         </p:nvSpPr>
         <p:spPr>
           <a:xfrm>
             <a:off x="3884760" y="8685360"/>
-            <a:ext cx="2970720" cy="457560"/>
+            <a:ext cx="2970360" cy="457200"/>
           </a:xfrm>
           <a:prstGeom prst="rect">
             <a:avLst/>
@@ -1108,7 +1109,7 @@
                 <a:tab algn="l" pos="0"/>
               </a:tabLst>
             </a:pPr>
-            <a:fld id="{0AFB87EF-464C-4FAC-AE8D-91C952B95410}" type="slidenum">
+            <a:fld id="{F6B652B8-619D-4414-855B-9C4CC54F6A5C}" type="slidenum">
               <a:rPr b="0" lang="en-SE" sz="1200" strike="noStrike" u="none">
                 <a:solidFill>
                   <a:srgbClr val="000000"/>
@@ -1117,7 +1118,7 @@
                 <a:uFillTx/>
                 <a:latin typeface="Times New Roman"/>
               </a:rPr>
-              <a:t>79</a:t>
+              <a:t>80</a:t>
             </a:fld>
             <a:endParaRPr b="0" lang="sv-SE" sz="1200" strike="noStrike" u="none">
               <a:solidFill>
@@ -1154,7 +1155,7 @@
       </p:grpSpPr>
       <p:sp>
         <p:nvSpPr>
-          <p:cNvPr id="220" name="PlaceHolder 1"/>
+          <p:cNvPr id="228" name="PlaceHolder 1"/>
           <p:cNvSpPr>
             <a:spLocks noGrp="1"/>
           </p:cNvSpPr>
@@ -1165,7 +1166,7 @@
         <p:spPr>
           <a:xfrm>
             <a:off x="685800" y="1143000"/>
-            <a:ext cx="5485320" cy="3085200"/>
+            <a:ext cx="5484960" cy="3084840"/>
           </a:xfrm>
           <a:prstGeom prst="rect">
             <a:avLst/>
@@ -1177,7 +1178,7 @@
       </p:sp>
       <p:sp>
         <p:nvSpPr>
-          <p:cNvPr id="221" name="PlaceHolder 2"/>
+          <p:cNvPr id="229" name="PlaceHolder 2"/>
           <p:cNvSpPr>
             <a:spLocks noGrp="1"/>
           </p:cNvSpPr>
@@ -1188,7 +1189,7 @@
         <p:spPr>
           <a:xfrm>
             <a:off x="685800" y="4400640"/>
-            <a:ext cx="5485320" cy="3599280"/>
+            <a:ext cx="5484960" cy="3598920"/>
           </a:xfrm>
           <a:prstGeom prst="rect">
             <a:avLst/>
@@ -1219,18 +1220,18 @@
       </p:sp>
       <p:sp>
         <p:nvSpPr>
-          <p:cNvPr id="222" name="PlaceHolder 3"/>
-          <p:cNvSpPr>
-            <a:spLocks noGrp="1"/>
-          </p:cNvSpPr>
-          <p:nvPr>
-            <p:ph type="sldNum" idx="23"/>
+          <p:cNvPr id="230" name="PlaceHolder 3"/>
+          <p:cNvSpPr>
+            <a:spLocks noGrp="1"/>
+          </p:cNvSpPr>
+          <p:nvPr>
+            <p:ph type="sldNum" idx="25"/>
           </p:nvPr>
         </p:nvSpPr>
         <p:spPr>
           <a:xfrm>
             <a:off x="3884760" y="8685360"/>
-            <a:ext cx="2970720" cy="457560"/>
+            <a:ext cx="2970360" cy="457200"/>
           </a:xfrm>
           <a:prstGeom prst="rect">
             <a:avLst/>
@@ -1273,7 +1274,7 @@
                 <a:tab algn="l" pos="0"/>
               </a:tabLst>
             </a:pPr>
-            <a:fld id="{1938522C-843B-4DEC-8DD6-858BC04FFA43}" type="slidenum">
+            <a:fld id="{58F70127-E4FB-4975-B32A-89707F70B37E}" type="slidenum">
               <a:rPr b="0" lang="en-SE" sz="1200" strike="noStrike" u="none">
                 <a:solidFill>
                   <a:srgbClr val="000000"/>
@@ -1282,7 +1283,7 @@
                 <a:uFillTx/>
                 <a:latin typeface="Times New Roman"/>
               </a:rPr>
-              <a:t>79</a:t>
+              <a:t>80</a:t>
             </a:fld>
             <a:endParaRPr b="0" lang="sv-SE" sz="1200" strike="noStrike" u="none">
               <a:solidFill>
@@ -1319,7 +1320,7 @@
       </p:grpSpPr>
       <p:sp>
         <p:nvSpPr>
-          <p:cNvPr id="223" name="PlaceHolder 1"/>
+          <p:cNvPr id="231" name="PlaceHolder 1"/>
           <p:cNvSpPr>
             <a:spLocks noGrp="1"/>
           </p:cNvSpPr>
@@ -1330,7 +1331,7 @@
         <p:spPr>
           <a:xfrm>
             <a:off x="685800" y="1143000"/>
-            <a:ext cx="5485320" cy="3085200"/>
+            <a:ext cx="5484960" cy="3084840"/>
           </a:xfrm>
           <a:prstGeom prst="rect">
             <a:avLst/>
@@ -1342,7 +1343,7 @@
       </p:sp>
       <p:sp>
         <p:nvSpPr>
-          <p:cNvPr id="224" name="PlaceHolder 2"/>
+          <p:cNvPr id="232" name="PlaceHolder 2"/>
           <p:cNvSpPr>
             <a:spLocks noGrp="1"/>
           </p:cNvSpPr>
@@ -1353,7 +1354,7 @@
         <p:spPr>
           <a:xfrm>
             <a:off x="685800" y="4400640"/>
-            <a:ext cx="5485320" cy="3599280"/>
+            <a:ext cx="5484960" cy="3598920"/>
           </a:xfrm>
           <a:prstGeom prst="rect">
             <a:avLst/>
@@ -1384,18 +1385,18 @@
       </p:sp>
       <p:sp>
         <p:nvSpPr>
-          <p:cNvPr id="225" name="PlaceHolder 3"/>
-          <p:cNvSpPr>
-            <a:spLocks noGrp="1"/>
-          </p:cNvSpPr>
-          <p:nvPr>
-            <p:ph type="sldNum" idx="24"/>
+          <p:cNvPr id="233" name="PlaceHolder 3"/>
+          <p:cNvSpPr>
+            <a:spLocks noGrp="1"/>
+          </p:cNvSpPr>
+          <p:nvPr>
+            <p:ph type="sldNum" idx="26"/>
           </p:nvPr>
         </p:nvSpPr>
         <p:spPr>
           <a:xfrm>
             <a:off x="3884760" y="8685360"/>
-            <a:ext cx="2970720" cy="457560"/>
+            <a:ext cx="2970360" cy="457200"/>
           </a:xfrm>
           <a:prstGeom prst="rect">
             <a:avLst/>
@@ -1438,7 +1439,7 @@
                 <a:tab algn="l" pos="0"/>
               </a:tabLst>
             </a:pPr>
-            <a:fld id="{01F0BAC9-7740-45C2-83F2-1CFEA1941ECB}" type="slidenum">
+            <a:fld id="{8063A55C-F5AC-412E-9A52-87FB79BACF81}" type="slidenum">
               <a:rPr b="0" lang="en-SE" sz="1200" strike="noStrike" u="none">
                 <a:solidFill>
                   <a:srgbClr val="000000"/>
@@ -1447,7 +1448,7 @@
                 <a:uFillTx/>
                 <a:latin typeface="Times New Roman"/>
               </a:rPr>
-              <a:t>79</a:t>
+              <a:t>80</a:t>
             </a:fld>
             <a:endParaRPr b="0" lang="sv-SE" sz="1200" strike="noStrike" u="none">
               <a:solidFill>
@@ -1484,7 +1485,7 @@
       </p:grpSpPr>
       <p:sp>
         <p:nvSpPr>
-          <p:cNvPr id="226" name="PlaceHolder 1"/>
+          <p:cNvPr id="234" name="PlaceHolder 1"/>
           <p:cNvSpPr>
             <a:spLocks noGrp="1"/>
           </p:cNvSpPr>
@@ -1495,7 +1496,7 @@
         <p:spPr>
           <a:xfrm>
             <a:off x="685800" y="1143000"/>
-            <a:ext cx="5485320" cy="3085200"/>
+            <a:ext cx="5484960" cy="3084840"/>
           </a:xfrm>
           <a:prstGeom prst="rect">
             <a:avLst/>
@@ -1507,7 +1508,7 @@
       </p:sp>
       <p:sp>
         <p:nvSpPr>
-          <p:cNvPr id="227" name="PlaceHolder 2"/>
+          <p:cNvPr id="235" name="PlaceHolder 2"/>
           <p:cNvSpPr>
             <a:spLocks noGrp="1"/>
           </p:cNvSpPr>
@@ -1518,7 +1519,7 @@
         <p:spPr>
           <a:xfrm>
             <a:off x="685800" y="4400640"/>
-            <a:ext cx="5485320" cy="3599280"/>
+            <a:ext cx="5484960" cy="3598920"/>
           </a:xfrm>
           <a:prstGeom prst="rect">
             <a:avLst/>
@@ -1549,18 +1550,18 @@
       </p:sp>
       <p:sp>
         <p:nvSpPr>
-          <p:cNvPr id="228" name="PlaceHolder 3"/>
-          <p:cNvSpPr>
-            <a:spLocks noGrp="1"/>
-          </p:cNvSpPr>
-          <p:nvPr>
-            <p:ph type="sldNum" idx="25"/>
+          <p:cNvPr id="236" name="PlaceHolder 3"/>
+          <p:cNvSpPr>
+            <a:spLocks noGrp="1"/>
+          </p:cNvSpPr>
+          <p:nvPr>
+            <p:ph type="sldNum" idx="27"/>
           </p:nvPr>
         </p:nvSpPr>
         <p:spPr>
           <a:xfrm>
             <a:off x="3884760" y="8685360"/>
-            <a:ext cx="2970720" cy="457560"/>
+            <a:ext cx="2970360" cy="457200"/>
           </a:xfrm>
           <a:prstGeom prst="rect">
             <a:avLst/>
@@ -1603,7 +1604,7 @@
                 <a:tab algn="l" pos="0"/>
               </a:tabLst>
             </a:pPr>
-            <a:fld id="{27B71F51-4098-4315-87C0-15B0945566B9}" type="slidenum">
+            <a:fld id="{81FC4EC9-E970-488E-804C-A61B2CEE0B2F}" type="slidenum">
               <a:rPr b="0" lang="en-SE" sz="1200" strike="noStrike" u="none">
                 <a:solidFill>
                   <a:srgbClr val="000000"/>
@@ -1612,7 +1613,7 @@
                 <a:uFillTx/>
                 <a:latin typeface="Times New Roman"/>
               </a:rPr>
-              <a:t>79</a:t>
+              <a:t>80</a:t>
             </a:fld>
             <a:endParaRPr b="0" lang="sv-SE" sz="1200" strike="noStrike" u="none">
               <a:solidFill>
@@ -1649,7 +1650,7 @@
       </p:grpSpPr>
       <p:sp>
         <p:nvSpPr>
-          <p:cNvPr id="229" name="PlaceHolder 1"/>
+          <p:cNvPr id="237" name="PlaceHolder 1"/>
           <p:cNvSpPr>
             <a:spLocks noGrp="1"/>
           </p:cNvSpPr>
@@ -1660,7 +1661,7 @@
         <p:spPr>
           <a:xfrm>
             <a:off x="685800" y="1143000"/>
-            <a:ext cx="5485320" cy="3085200"/>
+            <a:ext cx="5484960" cy="3084840"/>
           </a:xfrm>
           <a:prstGeom prst="rect">
             <a:avLst/>
@@ -1672,7 +1673,7 @@
       </p:sp>
       <p:sp>
         <p:nvSpPr>
-          <p:cNvPr id="230" name="PlaceHolder 2"/>
+          <p:cNvPr id="238" name="PlaceHolder 2"/>
           <p:cNvSpPr>
             <a:spLocks noGrp="1"/>
           </p:cNvSpPr>
@@ -1683,7 +1684,7 @@
         <p:spPr>
           <a:xfrm>
             <a:off x="685800" y="4400640"/>
-            <a:ext cx="5485320" cy="3599280"/>
+            <a:ext cx="5484960" cy="3598920"/>
           </a:xfrm>
           <a:prstGeom prst="rect">
             <a:avLst/>
@@ -1714,18 +1715,18 @@
       </p:sp>
       <p:sp>
         <p:nvSpPr>
-          <p:cNvPr id="231" name="PlaceHolder 3"/>
-          <p:cNvSpPr>
-            <a:spLocks noGrp="1"/>
-          </p:cNvSpPr>
-          <p:nvPr>
-            <p:ph type="sldNum" idx="26"/>
+          <p:cNvPr id="239" name="PlaceHolder 3"/>
+          <p:cNvSpPr>
+            <a:spLocks noGrp="1"/>
+          </p:cNvSpPr>
+          <p:nvPr>
+            <p:ph type="sldNum" idx="28"/>
           </p:nvPr>
         </p:nvSpPr>
         <p:spPr>
           <a:xfrm>
             <a:off x="3884760" y="8685360"/>
-            <a:ext cx="2970720" cy="457560"/>
+            <a:ext cx="2970360" cy="457200"/>
           </a:xfrm>
           <a:prstGeom prst="rect">
             <a:avLst/>
@@ -1768,7 +1769,7 @@
                 <a:tab algn="l" pos="0"/>
               </a:tabLst>
             </a:pPr>
-            <a:fld id="{3DCD6B66-B018-437B-9F78-AE583E1046C7}" type="slidenum">
+            <a:fld id="{3A237222-3F4E-4BBD-8974-844A78E1FDC2}" type="slidenum">
               <a:rPr b="0" lang="en-SE" sz="1200" strike="noStrike" u="none">
                 <a:solidFill>
                   <a:srgbClr val="000000"/>
@@ -1777,7 +1778,7 @@
                 <a:uFillTx/>
                 <a:latin typeface="Times New Roman"/>
               </a:rPr>
-              <a:t>79</a:t>
+              <a:t>80</a:t>
             </a:fld>
             <a:endParaRPr b="0" lang="sv-SE" sz="1200" strike="noStrike" u="none">
               <a:solidFill>
@@ -1840,7 +1841,7 @@
         <p:spPr>
           <a:xfrm>
             <a:off x="779400" y="6289200"/>
-            <a:ext cx="1429200" cy="430920"/>
+            <a:ext cx="1428840" cy="430560"/>
           </a:xfrm>
           <a:prstGeom prst="rect">
             <a:avLst/>
@@ -1866,7 +1867,7 @@
         <p:spPr>
           <a:xfrm>
             <a:off x="10184760" y="5404680"/>
-            <a:ext cx="1543680" cy="1543680"/>
+            <a:ext cx="1543320" cy="1543320"/>
           </a:xfrm>
           <a:prstGeom prst="rect">
             <a:avLst/>
@@ -1890,7 +1891,7 @@
         <p:spPr>
           <a:xfrm>
             <a:off x="1523880" y="2178000"/>
-            <a:ext cx="9142920" cy="274680"/>
+            <a:ext cx="9142560" cy="274680"/>
           </a:xfrm>
           <a:prstGeom prst="rect">
             <a:avLst/>
@@ -1906,7 +1907,13 @@
           </a:bodyPr>
           <a:p>
             <a:pPr indent="0">
+              <a:lnSpc>
+                <a:spcPct val="100000"/>
+              </a:lnSpc>
               <a:buNone/>
+              <a:tabLst>
+                <a:tab algn="l" pos="0"/>
+              </a:tabLst>
             </a:pPr>
             <a:r>
               <a:rPr b="0" lang="sv-SE" sz="1800" strike="noStrike" u="none">
@@ -1943,7 +1950,7 @@
         <p:spPr>
           <a:xfrm>
             <a:off x="4038480" y="6356520"/>
-            <a:ext cx="4113720" cy="363960"/>
+            <a:ext cx="4113360" cy="363600"/>
           </a:xfrm>
           <a:prstGeom prst="rect">
             <a:avLst/>
@@ -1999,7 +2006,7 @@
                 <a:uFillTx/>
                 <a:latin typeface="Aptos"/>
               </a:rPr>
-              <a:t>Björn Sundling  bjorn.sundling@advania.com</a:t>
+              <a:t>&lt;footer&gt;</a:t>
             </a:r>
             <a:endParaRPr b="0" lang="sv-SE" sz="1200" strike="noStrike" u="none">
               <a:solidFill>
@@ -2025,7 +2032,7 @@
         <p:spPr>
           <a:xfrm>
             <a:off x="8610480" y="6356520"/>
-            <a:ext cx="2742120" cy="363960"/>
+            <a:ext cx="2741760" cy="363600"/>
           </a:xfrm>
           <a:prstGeom prst="rect">
             <a:avLst/>
@@ -2070,7 +2077,7 @@
                 <a:tab algn="l" pos="0"/>
               </a:tabLst>
             </a:pPr>
-            <a:fld id="{258BE3CA-BFBE-4EF4-9250-994BCB9BB64F}" type="slidenum">
+            <a:fld id="{C6686944-12F5-4BB6-A0D0-1676745FCBEA}" type="slidenum">
               <a:rPr b="0" lang="en-SE" sz="1200" strike="noStrike" u="none">
                 <a:solidFill>
                   <a:schemeClr val="lt1">
@@ -2081,7 +2088,7 @@
                 <a:uFillTx/>
                 <a:latin typeface="Aptos"/>
               </a:rPr>
-              <a:t>36</a:t>
+              <a:t>&lt;number&gt;</a:t>
             </a:fld>
             <a:endParaRPr b="0" lang="sv-SE" sz="1200" strike="noStrike" u="none">
               <a:solidFill>
@@ -2107,7 +2114,7 @@
         <p:spPr>
           <a:xfrm>
             <a:off x="609480" y="1604520"/>
-            <a:ext cx="10972440" cy="3977280"/>
+            <a:ext cx="10972080" cy="3976920"/>
           </a:xfrm>
           <a:prstGeom prst="rect">
             <a:avLst/>
@@ -2123,6 +2130,9 @@
           </a:bodyPr>
           <a:p>
             <a:pPr marL="432000" indent="-324000">
+              <a:lnSpc>
+                <a:spcPct val="100000"/>
+              </a:lnSpc>
               <a:spcBef>
                 <a:spcPts val="1417"/>
               </a:spcBef>
@@ -2155,6 +2165,9 @@
           </a:p>
           <a:p>
             <a:pPr lvl="1" marL="864000" indent="-324000">
+              <a:lnSpc>
+                <a:spcPct val="100000"/>
+              </a:lnSpc>
               <a:spcBef>
                 <a:spcPts val="1134"/>
               </a:spcBef>
@@ -2187,6 +2200,9 @@
           </a:p>
           <a:p>
             <a:pPr lvl="2" marL="1296000" indent="-288000">
+              <a:lnSpc>
+                <a:spcPct val="100000"/>
+              </a:lnSpc>
               <a:spcBef>
                 <a:spcPts val="850"/>
               </a:spcBef>
@@ -2219,6 +2235,9 @@
           </a:p>
           <a:p>
             <a:pPr lvl="3" marL="1728000" indent="-216000">
+              <a:lnSpc>
+                <a:spcPct val="100000"/>
+              </a:lnSpc>
               <a:spcBef>
                 <a:spcPts val="567"/>
               </a:spcBef>
@@ -2251,6 +2270,9 @@
           </a:p>
           <a:p>
             <a:pPr lvl="4" marL="2160000" indent="-216000">
+              <a:lnSpc>
+                <a:spcPct val="100000"/>
+              </a:lnSpc>
               <a:spcBef>
                 <a:spcPts val="283"/>
               </a:spcBef>
@@ -2283,6 +2305,9 @@
           </a:p>
           <a:p>
             <a:pPr lvl="5" marL="2592000" indent="-216000">
+              <a:lnSpc>
+                <a:spcPct val="100000"/>
+              </a:lnSpc>
               <a:spcBef>
                 <a:spcPts val="283"/>
               </a:spcBef>
@@ -2315,6 +2340,9 @@
           </a:p>
           <a:p>
             <a:pPr lvl="6" marL="3024000" indent="-216000">
+              <a:lnSpc>
+                <a:spcPct val="100000"/>
+              </a:lnSpc>
               <a:spcBef>
                 <a:spcPts val="283"/>
               </a:spcBef>
@@ -2397,7 +2425,7 @@
         <p:spPr>
           <a:xfrm>
             <a:off x="779400" y="6289200"/>
-            <a:ext cx="1429200" cy="430920"/>
+            <a:ext cx="1428840" cy="430560"/>
           </a:xfrm>
           <a:prstGeom prst="rect">
             <a:avLst/>
@@ -2423,7 +2451,7 @@
         <p:spPr>
           <a:xfrm>
             <a:off x="10184760" y="5404680"/>
-            <a:ext cx="1543680" cy="1543680"/>
+            <a:ext cx="1543320" cy="1543320"/>
           </a:xfrm>
           <a:prstGeom prst="rect">
             <a:avLst/>
@@ -2447,7 +2475,7 @@
         <p:spPr>
           <a:xfrm>
             <a:off x="1523880" y="2178000"/>
-            <a:ext cx="9142920" cy="274680"/>
+            <a:ext cx="9142560" cy="274680"/>
           </a:xfrm>
           <a:prstGeom prst="rect">
             <a:avLst/>
@@ -2463,7 +2491,13 @@
           </a:bodyPr>
           <a:p>
             <a:pPr indent="0">
+              <a:lnSpc>
+                <a:spcPct val="100000"/>
+              </a:lnSpc>
               <a:buNone/>
+              <a:tabLst>
+                <a:tab algn="l" pos="0"/>
+              </a:tabLst>
             </a:pPr>
             <a:r>
               <a:rPr b="0" lang="sv-SE" sz="1800" strike="noStrike" u="none">
@@ -2500,7 +2534,7 @@
         <p:spPr>
           <a:xfrm>
             <a:off x="4038480" y="6356520"/>
-            <a:ext cx="4113720" cy="363960"/>
+            <a:ext cx="4113360" cy="363600"/>
           </a:xfrm>
           <a:prstGeom prst="rect">
             <a:avLst/>
@@ -2556,7 +2590,7 @@
                 <a:uFillTx/>
                 <a:latin typeface="Aptos"/>
               </a:rPr>
-              <a:t>Björn Sundling  bjorn.sundling@advania.com</a:t>
+              <a:t>&lt;footer&gt;</a:t>
             </a:r>
             <a:endParaRPr b="0" lang="sv-SE" sz="1200" strike="noStrike" u="none">
               <a:solidFill>
@@ -2582,7 +2616,7 @@
         <p:spPr>
           <a:xfrm>
             <a:off x="8610480" y="6356520"/>
-            <a:ext cx="2742120" cy="363960"/>
+            <a:ext cx="2741760" cy="363600"/>
           </a:xfrm>
           <a:prstGeom prst="rect">
             <a:avLst/>
@@ -2627,7 +2661,7 @@
                 <a:tab algn="l" pos="0"/>
               </a:tabLst>
             </a:pPr>
-            <a:fld id="{44376A75-178B-4F4F-BCA6-EC73E20AC623}" type="slidenum">
+            <a:fld id="{60401CCA-36A4-4F40-8BE6-CF5096370E4F}" type="slidenum">
               <a:rPr b="0" lang="en-SE" sz="1200" strike="noStrike" u="none">
                 <a:solidFill>
                   <a:schemeClr val="lt1">
@@ -2638,7 +2672,7 @@
                 <a:uFillTx/>
                 <a:latin typeface="Aptos"/>
               </a:rPr>
-              <a:t>36</a:t>
+              <a:t>&lt;number&gt;</a:t>
             </a:fld>
             <a:endParaRPr b="0" lang="sv-SE" sz="1200" strike="noStrike" u="none">
               <a:solidFill>
@@ -2664,7 +2698,7 @@
         <p:spPr>
           <a:xfrm>
             <a:off x="609480" y="1604520"/>
-            <a:ext cx="10972440" cy="3977280"/>
+            <a:ext cx="10972080" cy="3976920"/>
           </a:xfrm>
           <a:prstGeom prst="rect">
             <a:avLst/>
@@ -2680,6 +2714,9 @@
           </a:bodyPr>
           <a:p>
             <a:pPr marL="432000" indent="-324000">
+              <a:lnSpc>
+                <a:spcPct val="100000"/>
+              </a:lnSpc>
               <a:spcBef>
                 <a:spcPts val="1417"/>
               </a:spcBef>
@@ -2712,6 +2749,9 @@
           </a:p>
           <a:p>
             <a:pPr lvl="1" marL="864000" indent="-324000">
+              <a:lnSpc>
+                <a:spcPct val="100000"/>
+              </a:lnSpc>
               <a:spcBef>
                 <a:spcPts val="1134"/>
               </a:spcBef>
@@ -2744,6 +2784,9 @@
           </a:p>
           <a:p>
             <a:pPr lvl="2" marL="1296000" indent="-288000">
+              <a:lnSpc>
+                <a:spcPct val="100000"/>
+              </a:lnSpc>
               <a:spcBef>
                 <a:spcPts val="850"/>
               </a:spcBef>
@@ -2776,6 +2819,9 @@
           </a:p>
           <a:p>
             <a:pPr lvl="3" marL="1728000" indent="-216000">
+              <a:lnSpc>
+                <a:spcPct val="100000"/>
+              </a:lnSpc>
               <a:spcBef>
                 <a:spcPts val="567"/>
               </a:spcBef>
@@ -2808,6 +2854,9 @@
           </a:p>
           <a:p>
             <a:pPr lvl="4" marL="2160000" indent="-216000">
+              <a:lnSpc>
+                <a:spcPct val="100000"/>
+              </a:lnSpc>
               <a:spcBef>
                 <a:spcPts val="283"/>
               </a:spcBef>
@@ -2840,6 +2889,9 @@
           </a:p>
           <a:p>
             <a:pPr lvl="5" marL="2592000" indent="-216000">
+              <a:lnSpc>
+                <a:spcPct val="100000"/>
+              </a:lnSpc>
               <a:spcBef>
                 <a:spcPts val="283"/>
               </a:spcBef>
@@ -2872,6 +2924,9 @@
           </a:p>
           <a:p>
             <a:pPr lvl="6" marL="3024000" indent="-216000">
+              <a:lnSpc>
+                <a:spcPct val="100000"/>
+              </a:lnSpc>
               <a:spcBef>
                 <a:spcPts val="283"/>
               </a:spcBef>
@@ -2954,7 +3009,7 @@
         <p:spPr>
           <a:xfrm>
             <a:off x="779400" y="6289200"/>
-            <a:ext cx="1429200" cy="430920"/>
+            <a:ext cx="1428840" cy="430560"/>
           </a:xfrm>
           <a:prstGeom prst="rect">
             <a:avLst/>
@@ -2980,7 +3035,7 @@
         <p:spPr>
           <a:xfrm>
             <a:off x="10184760" y="5404680"/>
-            <a:ext cx="1543680" cy="1543680"/>
+            <a:ext cx="1543320" cy="1543320"/>
           </a:xfrm>
           <a:prstGeom prst="rect">
             <a:avLst/>
@@ -2998,13 +3053,13 @@
             <a:spLocks noGrp="1"/>
           </p:cNvSpPr>
           <p:nvPr>
-            <p:ph type="ftr" idx="5"/>
+            <p:ph type="title"/>
           </p:nvPr>
         </p:nvSpPr>
         <p:spPr>
           <a:xfrm>
-            <a:off x="4038480" y="6356520"/>
-            <a:ext cx="4113720" cy="363960"/>
+            <a:off x="1523880" y="2178000"/>
+            <a:ext cx="9142560" cy="274680"/>
           </a:xfrm>
           <a:prstGeom prst="rect">
             <a:avLst/>
@@ -3015,11 +3070,11 @@
           </a:ln>
         </p:spPr>
         <p:txBody>
-          <a:bodyPr lIns="91440" rIns="91440" tIns="45720" bIns="45720" anchor="ctr">
-            <a:noAutofit/>
+          <a:bodyPr lIns="0" rIns="0" tIns="0" bIns="0" anchor="ctr">
+            <a:spAutoFit/>
           </a:bodyPr>
-          <a:lstStyle>
-            <a:lvl1pPr indent="0" algn="ctr" defTabSz="914400">
+          <a:p>
+            <a:pPr indent="0">
               <a:lnSpc>
                 <a:spcPct val="100000"/>
               </a:lnSpc>
@@ -3027,48 +3082,25 @@
               <a:tabLst>
                 <a:tab algn="l" pos="0"/>
               </a:tabLst>
-              <a:defRPr b="0" lang="sv-SE" sz="1200" strike="noStrike" u="none">
-                <a:solidFill>
-                  <a:schemeClr val="lt1">
-                    <a:tint val="82000"/>
-                  </a:schemeClr>
-                </a:solidFill>
-                <a:effectLst/>
-                <a:uFillTx/>
-                <a:latin typeface="Aptos"/>
-              </a:defRPr>
-            </a:lvl1pPr>
-          </a:lstStyle>
-          <a:p>
-            <a:pPr indent="0" algn="ctr" defTabSz="914400">
-              <a:lnSpc>
-                <a:spcPct val="100000"/>
-              </a:lnSpc>
-              <a:buNone/>
-              <a:tabLst>
-                <a:tab algn="l" pos="0"/>
-              </a:tabLst>
-            </a:pPr>
-            <a:r>
-              <a:rPr b="0" lang="sv-SE" sz="1200" strike="noStrike" u="none">
-                <a:solidFill>
-                  <a:schemeClr val="lt1">
-                    <a:tint val="82000"/>
-                  </a:schemeClr>
-                </a:solidFill>
-                <a:effectLst/>
-                <a:uFillTx/>
-                <a:latin typeface="Aptos"/>
-              </a:rPr>
-              <a:t>&lt;footer&gt;</a:t>
-            </a:r>
-            <a:endParaRPr b="0" lang="sv-SE" sz="1200" strike="noStrike" u="none">
-              <a:solidFill>
-                <a:srgbClr val="ffffff"/>
-              </a:solidFill>
-              <a:effectLst/>
-              <a:uFillTx/>
-              <a:latin typeface="Times New Roman"/>
+            </a:pPr>
+            <a:r>
+              <a:rPr b="0" lang="sv-SE" sz="1800" strike="noStrike" u="none">
+                <a:solidFill>
+                  <a:srgbClr val="ffffff"/>
+                </a:solidFill>
+                <a:effectLst/>
+                <a:uFillTx/>
+                <a:latin typeface="Arial"/>
+              </a:rPr>
+              <a:t>Click to edit the title text format</a:t>
+            </a:r>
+            <a:endParaRPr b="0" lang="sv-SE" sz="1800" strike="noStrike" u="none">
+              <a:solidFill>
+                <a:srgbClr val="ffffff"/>
+              </a:solidFill>
+              <a:effectLst/>
+              <a:uFillTx/>
+              <a:latin typeface="Arial"/>
             </a:endParaRPr>
           </a:p>
         </p:txBody>
@@ -3080,13 +3112,13 @@
             <a:spLocks noGrp="1"/>
           </p:cNvSpPr>
           <p:nvPr>
-            <p:ph type="sldNum" idx="6"/>
+            <p:ph type="ftr" idx="5"/>
           </p:nvPr>
         </p:nvSpPr>
         <p:spPr>
           <a:xfrm>
-            <a:off x="8610480" y="6356520"/>
-            <a:ext cx="2742120" cy="363960"/>
+            <a:off x="4038480" y="6356520"/>
+            <a:ext cx="4113360" cy="363600"/>
           </a:xfrm>
           <a:prstGeom prst="rect">
             <a:avLst/>
@@ -3101,6 +3133,88 @@
             <a:noAutofit/>
           </a:bodyPr>
           <a:lstStyle>
+            <a:lvl1pPr indent="0" algn="ctr" defTabSz="914400">
+              <a:lnSpc>
+                <a:spcPct val="100000"/>
+              </a:lnSpc>
+              <a:buNone/>
+              <a:tabLst>
+                <a:tab algn="l" pos="0"/>
+              </a:tabLst>
+              <a:defRPr b="0" lang="sv-SE" sz="1200" strike="noStrike" u="none">
+                <a:solidFill>
+                  <a:schemeClr val="lt1">
+                    <a:tint val="82000"/>
+                  </a:schemeClr>
+                </a:solidFill>
+                <a:effectLst/>
+                <a:uFillTx/>
+                <a:latin typeface="Aptos"/>
+              </a:defRPr>
+            </a:lvl1pPr>
+          </a:lstStyle>
+          <a:p>
+            <a:pPr indent="0" algn="ctr" defTabSz="914400">
+              <a:lnSpc>
+                <a:spcPct val="100000"/>
+              </a:lnSpc>
+              <a:buNone/>
+              <a:tabLst>
+                <a:tab algn="l" pos="0"/>
+              </a:tabLst>
+            </a:pPr>
+            <a:r>
+              <a:rPr b="0" lang="sv-SE" sz="1200" strike="noStrike" u="none">
+                <a:solidFill>
+                  <a:schemeClr val="lt1">
+                    <a:tint val="82000"/>
+                  </a:schemeClr>
+                </a:solidFill>
+                <a:effectLst/>
+                <a:uFillTx/>
+                <a:latin typeface="Aptos"/>
+              </a:rPr>
+              <a:t>&lt;footer&gt;</a:t>
+            </a:r>
+            <a:endParaRPr b="0" lang="sv-SE" sz="1200" strike="noStrike" u="none">
+              <a:solidFill>
+                <a:srgbClr val="ffffff"/>
+              </a:solidFill>
+              <a:effectLst/>
+              <a:uFillTx/>
+              <a:latin typeface="Times New Roman"/>
+            </a:endParaRPr>
+          </a:p>
+        </p:txBody>
+      </p:sp>
+      <p:sp>
+        <p:nvSpPr>
+          <p:cNvPr id="18" name="PlaceHolder 3"/>
+          <p:cNvSpPr>
+            <a:spLocks noGrp="1"/>
+          </p:cNvSpPr>
+          <p:nvPr>
+            <p:ph type="sldNum" idx="6"/>
+          </p:nvPr>
+        </p:nvSpPr>
+        <p:spPr>
+          <a:xfrm>
+            <a:off x="8610480" y="6356520"/>
+            <a:ext cx="2741760" cy="363600"/>
+          </a:xfrm>
+          <a:prstGeom prst="rect">
+            <a:avLst/>
+          </a:prstGeom>
+          <a:noFill/>
+          <a:ln w="0">
+            <a:noFill/>
+          </a:ln>
+        </p:spPr>
+        <p:txBody>
+          <a:bodyPr lIns="91440" rIns="91440" tIns="45720" bIns="45720" anchor="ctr">
+            <a:noAutofit/>
+          </a:bodyPr>
+          <a:lstStyle>
             <a:lvl1pPr indent="0" algn="r" defTabSz="914400">
               <a:lnSpc>
                 <a:spcPct val="100000"/>
@@ -3131,7 +3245,7 @@
                 <a:tab algn="l" pos="0"/>
               </a:tabLst>
             </a:pPr>
-            <a:fld id="{D7C63BB7-DC6C-4771-B24D-16F350F2309D}" type="slidenum">
+            <a:fld id="{75BFECF0-37E7-4490-A9F0-8E5C53454B4A}" type="slidenum">
               <a:rPr b="0" lang="en-SE" sz="1200" strike="noStrike" u="none">
                 <a:solidFill>
                   <a:schemeClr val="lt1">
@@ -3151,6 +3265,280 @@
               <a:effectLst/>
               <a:uFillTx/>
               <a:latin typeface="Times New Roman"/>
+            </a:endParaRPr>
+          </a:p>
+        </p:txBody>
+      </p:sp>
+      <p:sp>
+        <p:nvSpPr>
+          <p:cNvPr id="19" name="PlaceHolder 4"/>
+          <p:cNvSpPr>
+            <a:spLocks noGrp="1"/>
+          </p:cNvSpPr>
+          <p:nvPr>
+            <p:ph type="body"/>
+          </p:nvPr>
+        </p:nvSpPr>
+        <p:spPr>
+          <a:xfrm>
+            <a:off x="609480" y="1604520"/>
+            <a:ext cx="10972080" cy="3976920"/>
+          </a:xfrm>
+          <a:prstGeom prst="rect">
+            <a:avLst/>
+          </a:prstGeom>
+          <a:noFill/>
+          <a:ln w="0">
+            <a:noFill/>
+          </a:ln>
+        </p:spPr>
+        <p:txBody>
+          <a:bodyPr lIns="0" rIns="0" tIns="0" bIns="0" anchor="t">
+            <a:normAutofit/>
+          </a:bodyPr>
+          <a:p>
+            <a:pPr marL="432000" indent="-324000">
+              <a:lnSpc>
+                <a:spcPct val="100000"/>
+              </a:lnSpc>
+              <a:spcBef>
+                <a:spcPts val="1417"/>
+              </a:spcBef>
+              <a:buClr>
+                <a:srgbClr val="ffffff"/>
+              </a:buClr>
+              <a:buSzPct val="45000"/>
+              <a:buFont typeface="Wingdings" charset="2"/>
+              <a:buChar char=""/>
+            </a:pPr>
+            <a:r>
+              <a:rPr b="0" lang="sv-SE" sz="3200" strike="noStrike" u="none">
+                <a:solidFill>
+                  <a:srgbClr val="ffffff"/>
+                </a:solidFill>
+                <a:effectLst/>
+                <a:uFillTx/>
+                <a:latin typeface="Arial"/>
+              </a:rPr>
+              <a:t>Click to edit the outline text format</a:t>
+            </a:r>
+            <a:endParaRPr b="0" lang="sv-SE" sz="3200" strike="noStrike" u="none">
+              <a:solidFill>
+                <a:srgbClr val="ffffff"/>
+              </a:solidFill>
+              <a:effectLst/>
+              <a:uFillTx/>
+              <a:latin typeface="Arial"/>
+            </a:endParaRPr>
+          </a:p>
+          <a:p>
+            <a:pPr lvl="1" marL="864000" indent="-324000">
+              <a:lnSpc>
+                <a:spcPct val="100000"/>
+              </a:lnSpc>
+              <a:spcBef>
+                <a:spcPts val="1134"/>
+              </a:spcBef>
+              <a:buClr>
+                <a:srgbClr val="ffffff"/>
+              </a:buClr>
+              <a:buSzPct val="75000"/>
+              <a:buFont typeface="Symbol" charset="2"/>
+              <a:buChar char=""/>
+            </a:pPr>
+            <a:r>
+              <a:rPr b="0" lang="sv-SE" sz="2800" strike="noStrike" u="none">
+                <a:solidFill>
+                  <a:srgbClr val="ffffff"/>
+                </a:solidFill>
+                <a:effectLst/>
+                <a:uFillTx/>
+                <a:latin typeface="Arial"/>
+              </a:rPr>
+              <a:t>Second Outline Level</a:t>
+            </a:r>
+            <a:endParaRPr b="0" lang="sv-SE" sz="2800" strike="noStrike" u="none">
+              <a:solidFill>
+                <a:srgbClr val="ffffff"/>
+              </a:solidFill>
+              <a:effectLst/>
+              <a:uFillTx/>
+              <a:latin typeface="Arial"/>
+            </a:endParaRPr>
+          </a:p>
+          <a:p>
+            <a:pPr lvl="2" marL="1296000" indent="-288000">
+              <a:lnSpc>
+                <a:spcPct val="100000"/>
+              </a:lnSpc>
+              <a:spcBef>
+                <a:spcPts val="850"/>
+              </a:spcBef>
+              <a:buClr>
+                <a:srgbClr val="ffffff"/>
+              </a:buClr>
+              <a:buSzPct val="45000"/>
+              <a:buFont typeface="Wingdings" charset="2"/>
+              <a:buChar char=""/>
+            </a:pPr>
+            <a:r>
+              <a:rPr b="0" lang="sv-SE" sz="2400" strike="noStrike" u="none">
+                <a:solidFill>
+                  <a:srgbClr val="ffffff"/>
+                </a:solidFill>
+                <a:effectLst/>
+                <a:uFillTx/>
+                <a:latin typeface="Arial"/>
+              </a:rPr>
+              <a:t>Third Outline Level</a:t>
+            </a:r>
+            <a:endParaRPr b="0" lang="sv-SE" sz="2400" strike="noStrike" u="none">
+              <a:solidFill>
+                <a:srgbClr val="ffffff"/>
+              </a:solidFill>
+              <a:effectLst/>
+              <a:uFillTx/>
+              <a:latin typeface="Arial"/>
+            </a:endParaRPr>
+          </a:p>
+          <a:p>
+            <a:pPr lvl="3" marL="1728000" indent="-216000">
+              <a:lnSpc>
+                <a:spcPct val="100000"/>
+              </a:lnSpc>
+              <a:spcBef>
+                <a:spcPts val="567"/>
+              </a:spcBef>
+              <a:buClr>
+                <a:srgbClr val="ffffff"/>
+              </a:buClr>
+              <a:buSzPct val="75000"/>
+              <a:buFont typeface="Symbol" charset="2"/>
+              <a:buChar char=""/>
+            </a:pPr>
+            <a:r>
+              <a:rPr b="0" lang="sv-SE" sz="2000" strike="noStrike" u="none">
+                <a:solidFill>
+                  <a:srgbClr val="ffffff"/>
+                </a:solidFill>
+                <a:effectLst/>
+                <a:uFillTx/>
+                <a:latin typeface="Arial"/>
+              </a:rPr>
+              <a:t>Fourth Outline Level</a:t>
+            </a:r>
+            <a:endParaRPr b="0" lang="sv-SE" sz="2000" strike="noStrike" u="none">
+              <a:solidFill>
+                <a:srgbClr val="ffffff"/>
+              </a:solidFill>
+              <a:effectLst/>
+              <a:uFillTx/>
+              <a:latin typeface="Arial"/>
+            </a:endParaRPr>
+          </a:p>
+          <a:p>
+            <a:pPr lvl="4" marL="2160000" indent="-216000">
+              <a:lnSpc>
+                <a:spcPct val="100000"/>
+              </a:lnSpc>
+              <a:spcBef>
+                <a:spcPts val="283"/>
+              </a:spcBef>
+              <a:buClr>
+                <a:srgbClr val="ffffff"/>
+              </a:buClr>
+              <a:buSzPct val="45000"/>
+              <a:buFont typeface="Wingdings" charset="2"/>
+              <a:buChar char=""/>
+            </a:pPr>
+            <a:r>
+              <a:rPr b="0" lang="sv-SE" sz="2000" strike="noStrike" u="none">
+                <a:solidFill>
+                  <a:srgbClr val="ffffff"/>
+                </a:solidFill>
+                <a:effectLst/>
+                <a:uFillTx/>
+                <a:latin typeface="Arial"/>
+              </a:rPr>
+              <a:t>Fifth Outline Level</a:t>
+            </a:r>
+            <a:endParaRPr b="0" lang="sv-SE" sz="2000" strike="noStrike" u="none">
+              <a:solidFill>
+                <a:srgbClr val="ffffff"/>
+              </a:solidFill>
+              <a:effectLst/>
+              <a:uFillTx/>
+              <a:latin typeface="Arial"/>
+            </a:endParaRPr>
+          </a:p>
+          <a:p>
+            <a:pPr lvl="5" marL="2592000" indent="-216000">
+              <a:lnSpc>
+                <a:spcPct val="100000"/>
+              </a:lnSpc>
+              <a:spcBef>
+                <a:spcPts val="283"/>
+              </a:spcBef>
+              <a:buClr>
+                <a:srgbClr val="ffffff"/>
+              </a:buClr>
+              <a:buSzPct val="45000"/>
+              <a:buFont typeface="Wingdings" charset="2"/>
+              <a:buChar char=""/>
+            </a:pPr>
+            <a:r>
+              <a:rPr b="0" lang="sv-SE" sz="2000" strike="noStrike" u="none">
+                <a:solidFill>
+                  <a:srgbClr val="ffffff"/>
+                </a:solidFill>
+                <a:effectLst/>
+                <a:uFillTx/>
+                <a:latin typeface="Arial"/>
+              </a:rPr>
+              <a:t>Sixth Outline Level</a:t>
+            </a:r>
+            <a:endParaRPr b="0" lang="sv-SE" sz="2000" strike="noStrike" u="none">
+              <a:solidFill>
+                <a:srgbClr val="ffffff"/>
+              </a:solidFill>
+              <a:effectLst/>
+              <a:uFillTx/>
+              <a:latin typeface="Arial"/>
+            </a:endParaRPr>
+          </a:p>
+          <a:p>
+            <a:pPr lvl="6" marL="3024000" indent="-216000">
+              <a:lnSpc>
+                <a:spcPct val="100000"/>
+              </a:lnSpc>
+              <a:spcBef>
+                <a:spcPts val="283"/>
+              </a:spcBef>
+              <a:buClr>
+                <a:srgbClr val="ffffff"/>
+              </a:buClr>
+              <a:buSzPct val="45000"/>
+              <a:buFont typeface="Wingdings" charset="2"/>
+              <a:buChar char=""/>
+            </a:pPr>
+            <a:r>
+              <a:rPr b="0" lang="sv-SE" sz="2000" strike="noStrike" u="none">
+                <a:solidFill>
+                  <a:srgbClr val="ffffff"/>
+                </a:solidFill>
+                <a:effectLst/>
+                <a:uFillTx/>
+                <a:latin typeface="Arial"/>
+              </a:rPr>
+              <a:t>Seventh Outline Level</a:t>
+            </a:r>
+            <a:endParaRPr b="0" lang="sv-SE" sz="2000" strike="noStrike" u="none">
+              <a:solidFill>
+                <a:srgbClr val="ffffff"/>
+              </a:solidFill>
+              <a:effectLst/>
+              <a:uFillTx/>
+              <a:latin typeface="Arial"/>
             </a:endParaRPr>
           </a:p>
         </p:txBody>
@@ -3162,284 +3550,7 @@
 
 <file path=ppt/slideLayouts/slideLayout4.xml><?xml version="1.0" encoding="utf-8"?>
 <p:sldLayout xmlns:a="http://schemas.openxmlformats.org/drawingml/2006/main" xmlns:p="http://schemas.openxmlformats.org/presentationml/2006/main" xmlns:r="http://schemas.openxmlformats.org/officeDocument/2006/relationships" xmlns:p14="http://schemas.microsoft.com/office/powerpoint/2010/main" xmlns:p15="http://schemas.microsoft.com/office/powerpoint/2012/main" xmlns:mc="http://schemas.openxmlformats.org/markup-compatibility/2006" type="blank" preserve="1">
-  <p:cSld name="Title and Text">
-    <p:spTree>
-      <p:nvGrpSpPr>
-        <p:cNvPr id="1" name=""/>
-        <p:cNvGrpSpPr/>
-        <p:nvPr/>
-      </p:nvGrpSpPr>
-      <p:grpSpPr>
-        <a:xfrm>
-          <a:off x="0" y="0"/>
-          <a:ext cx="0" cy="0"/>
-          <a:chOff x="0" y="0"/>
-          <a:chExt cx="0" cy="0"/>
-        </a:xfrm>
-      </p:grpSpPr>
-      <p:sp>
-        <p:nvSpPr>
-          <p:cNvPr id="2" name="PlaceHolder 1"/>
-          <p:cNvSpPr>
-            <a:spLocks noGrp="1"/>
-          </p:cNvSpPr>
-          <p:nvPr>
-            <p:ph type="ftr" idx="7"/>
-          </p:nvPr>
-        </p:nvSpPr>
-        <p:spPr/>
-        <p:txBody>
-          <a:bodyPr/>
-          <a:p>
-            <a:r>
-              <a:t>Footer</a:t>
-            </a:r>
-          </a:p>
-        </p:txBody>
-      </p:sp>
-      <p:sp>
-        <p:nvSpPr>
-          <p:cNvPr id="3" name="PlaceHolder 2"/>
-          <p:cNvSpPr>
-            <a:spLocks noGrp="1"/>
-          </p:cNvSpPr>
-          <p:nvPr>
-            <p:ph type="sldNum" idx="8"/>
-          </p:nvPr>
-        </p:nvSpPr>
-        <p:spPr/>
-        <p:txBody>
-          <a:bodyPr/>
-          <a:p>
-            <a:fld id="{01D097E8-F7FB-456E-BB48-73ACA8C09B6F}" type="slidenum">
-              <a:t>&lt;#&gt;</a:t>
-            </a:fld>
-          </a:p>
-        </p:txBody>
-      </p:sp>
-      <p:sp>
-        <p:nvSpPr>
-          <p:cNvPr id="4" name="PlaceHolder 3"/>
-          <p:cNvSpPr>
-            <a:spLocks noGrp="1"/>
-          </p:cNvSpPr>
-          <p:nvPr>
-            <p:ph type="dt" idx="9"/>
-          </p:nvPr>
-        </p:nvSpPr>
-        <p:spPr/>
-        <p:txBody>
-          <a:bodyPr/>
-          <a:p>
-            <a:r>
-              <a:rPr lang="sv-SE"/>
-              <a:t/>
-            </a:r>
-          </a:p>
-        </p:txBody>
-      </p:sp>
-    </p:spTree>
-  </p:cSld>
-</p:sldLayout>
-</file>
-
-<file path=ppt/slideLayouts/slideLayout5.xml><?xml version="1.0" encoding="utf-8"?>
-<p:sldLayout xmlns:a="http://schemas.openxmlformats.org/drawingml/2006/main" xmlns:p="http://schemas.openxmlformats.org/presentationml/2006/main" xmlns:r="http://schemas.openxmlformats.org/officeDocument/2006/relationships" xmlns:p14="http://schemas.microsoft.com/office/powerpoint/2010/main" xmlns:p15="http://schemas.microsoft.com/office/powerpoint/2012/main" xmlns:mc="http://schemas.openxmlformats.org/markup-compatibility/2006" type="blank" preserve="1">
-  <p:cSld name="Section Header">
-    <p:spTree>
-      <p:nvGrpSpPr>
-        <p:cNvPr id="1" name=""/>
-        <p:cNvGrpSpPr/>
-        <p:nvPr/>
-      </p:nvGrpSpPr>
-      <p:grpSpPr>
-        <a:xfrm>
-          <a:off x="0" y="0"/>
-          <a:ext cx="0" cy="0"/>
-          <a:chOff x="0" y="0"/>
-          <a:chExt cx="0" cy="0"/>
-        </a:xfrm>
-      </p:grpSpPr>
-      <p:sp>
-        <p:nvSpPr>
-          <p:cNvPr id="2" name="PlaceHolder 1"/>
-          <p:cNvSpPr>
-            <a:spLocks noGrp="1"/>
-          </p:cNvSpPr>
-          <p:nvPr>
-            <p:ph type="ftr" idx="10"/>
-          </p:nvPr>
-        </p:nvSpPr>
-        <p:spPr/>
-        <p:txBody>
-          <a:bodyPr/>
-          <a:p>
-            <a:r>
-              <a:t>Footer</a:t>
-            </a:r>
-          </a:p>
-        </p:txBody>
-      </p:sp>
-      <p:sp>
-        <p:nvSpPr>
-          <p:cNvPr id="3" name="PlaceHolder 2"/>
-          <p:cNvSpPr>
-            <a:spLocks noGrp="1"/>
-          </p:cNvSpPr>
-          <p:nvPr>
-            <p:ph type="sldNum" idx="11"/>
-          </p:nvPr>
-        </p:nvSpPr>
-        <p:spPr/>
-        <p:txBody>
-          <a:bodyPr/>
-          <a:p>
-            <a:fld id="{2CF52632-1DA5-4538-B25E-24E4747D2419}" type="slidenum">
-              <a:t>&lt;#&gt;</a:t>
-            </a:fld>
-          </a:p>
-        </p:txBody>
-      </p:sp>
-      <p:sp>
-        <p:nvSpPr>
-          <p:cNvPr id="4" name="PlaceHolder 3"/>
-          <p:cNvSpPr>
-            <a:spLocks noGrp="1"/>
-          </p:cNvSpPr>
-          <p:nvPr>
-            <p:ph type="dt" idx="12"/>
-          </p:nvPr>
-        </p:nvSpPr>
-        <p:spPr/>
-        <p:txBody>
-          <a:bodyPr/>
-          <a:p>
-            <a:r>
-              <a:rPr lang="sv-SE"/>
-              <a:t/>
-            </a:r>
-          </a:p>
-        </p:txBody>
-      </p:sp>
-    </p:spTree>
-  </p:cSld>
-</p:sldLayout>
-</file>
-
-<file path=ppt/slideLayouts/slideLayout6.xml><?xml version="1.0" encoding="utf-8"?>
-<p:sldLayout xmlns:a="http://schemas.openxmlformats.org/drawingml/2006/main" xmlns:p="http://schemas.openxmlformats.org/presentationml/2006/main" xmlns:r="http://schemas.openxmlformats.org/officeDocument/2006/relationships" xmlns:p14="http://schemas.microsoft.com/office/powerpoint/2010/main" xmlns:p15="http://schemas.microsoft.com/office/powerpoint/2012/main" xmlns:mc="http://schemas.openxmlformats.org/markup-compatibility/2006" type="blank" preserve="1">
-  <p:cSld name="Content with Caption">
-    <p:spTree>
-      <p:nvGrpSpPr>
-        <p:cNvPr id="1" name=""/>
-        <p:cNvGrpSpPr/>
-        <p:nvPr/>
-      </p:nvGrpSpPr>
-      <p:grpSpPr>
-        <a:xfrm>
-          <a:off x="0" y="0"/>
-          <a:ext cx="0" cy="0"/>
-          <a:chOff x="0" y="0"/>
-          <a:chExt cx="0" cy="0"/>
-        </a:xfrm>
-      </p:grpSpPr>
-      <p:sp>
-        <p:nvSpPr>
-          <p:cNvPr id="2" name="PlaceHolder 1"/>
-          <p:cNvSpPr>
-            <a:spLocks noGrp="1"/>
-          </p:cNvSpPr>
-          <p:nvPr>
-            <p:ph type="ftr" idx="13"/>
-          </p:nvPr>
-        </p:nvSpPr>
-        <p:spPr/>
-        <p:txBody>
-          <a:bodyPr/>
-          <a:p>
-            <a:r>
-              <a:t>Footer</a:t>
-            </a:r>
-          </a:p>
-        </p:txBody>
-      </p:sp>
-      <p:sp>
-        <p:nvSpPr>
-          <p:cNvPr id="3" name="PlaceHolder 2"/>
-          <p:cNvSpPr>
-            <a:spLocks noGrp="1"/>
-          </p:cNvSpPr>
-          <p:nvPr>
-            <p:ph type="sldNum" idx="14"/>
-          </p:nvPr>
-        </p:nvSpPr>
-        <p:spPr/>
-        <p:txBody>
-          <a:bodyPr/>
-          <a:p>
-            <a:fld id="{85639016-DBD9-4BD1-B3AC-B54177F0B6DF}" type="slidenum">
-              <a:t>&lt;#&gt;</a:t>
-            </a:fld>
-          </a:p>
-        </p:txBody>
-      </p:sp>
-      <p:sp>
-        <p:nvSpPr>
-          <p:cNvPr id="4" name="PlaceHolder 3"/>
-          <p:cNvSpPr>
-            <a:spLocks noGrp="1"/>
-          </p:cNvSpPr>
-          <p:nvPr>
-            <p:ph type="dt" idx="15"/>
-          </p:nvPr>
-        </p:nvSpPr>
-        <p:spPr/>
-        <p:txBody>
-          <a:bodyPr/>
-          <a:p>
-            <a:r>
-              <a:rPr lang="sv-SE"/>
-              <a:t/>
-            </a:r>
-          </a:p>
-        </p:txBody>
-      </p:sp>
-    </p:spTree>
-  </p:cSld>
-</p:sldLayout>
-</file>
-
-<file path=ppt/slideMasters/slideMaster1.xml><?xml version="1.0" encoding="utf-8"?>
-<p:sldMaster xmlns:a="http://schemas.openxmlformats.org/drawingml/2006/main" xmlns:p="http://schemas.openxmlformats.org/presentationml/2006/main" xmlns:r="http://schemas.openxmlformats.org/officeDocument/2006/relationships" xmlns:p14="http://schemas.microsoft.com/office/powerpoint/2010/main" xmlns:p15="http://schemas.microsoft.com/office/powerpoint/2012/main" xmlns:mc="http://schemas.openxmlformats.org/markup-compatibility/2006">
-  <p:cSld>
-    <p:spTree>
-      <p:nvGrpSpPr>
-        <p:cNvPr id="1" name=""/>
-        <p:cNvGrpSpPr/>
-        <p:nvPr/>
-      </p:nvGrpSpPr>
-      <p:grpSpPr>
-        <a:xfrm>
-          <a:off x="0" y="0"/>
-          <a:ext cx="0" cy="0"/>
-          <a:chOff x="0" y="0"/>
-          <a:chExt cx="0" cy="0"/>
-        </a:xfrm>
-      </p:grpSpPr>
-    </p:spTree>
-  </p:cSld>
-  <p:clrMap bg1="lt1" tx1="dk1" bg2="lt2" tx2="dk2" accent1="accent1" accent2="accent2" accent3="accent3" accent4="accent4" accent5="accent5" accent6="accent6" hlink="hlink" folHlink="folHlink"/>
-  <p:sldLayoutIdLst>
-    <p:sldLayoutId id="2147483649" r:id="rId2"/>
-    <p:sldLayoutId id="2147483650" r:id="rId3"/>
-    <p:sldLayoutId id="2147483651" r:id="rId4"/>
-  </p:sldLayoutIdLst>
-</p:sldMaster>
-</file>
-
-<file path=ppt/slideMasters/slideMaster3.xml><?xml version="1.0" encoding="utf-8"?>
-<p:sldMaster xmlns:a="http://schemas.openxmlformats.org/drawingml/2006/main" xmlns:p="http://schemas.openxmlformats.org/presentationml/2006/main" xmlns:r="http://schemas.openxmlformats.org/officeDocument/2006/relationships" xmlns:p14="http://schemas.microsoft.com/office/powerpoint/2010/main" xmlns:p15="http://schemas.microsoft.com/office/powerpoint/2012/main" xmlns:mc="http://schemas.openxmlformats.org/markup-compatibility/2006">
-  <p:cSld>
+  <p:cSld name="Default 1">
     <p:bg>
       <p:bgPr>
         <a:gradFill rotWithShape="0">
@@ -3471,7 +3582,7 @@
       </p:grpSpPr>
       <p:pic>
         <p:nvPicPr>
-          <p:cNvPr id="18" name="Picture 11" descr=""/>
+          <p:cNvPr id="20" name="Picture 11" descr=""/>
           <p:cNvPicPr/>
           <p:nvPr/>
         </p:nvPicPr>
@@ -3482,7 +3593,7 @@
         <p:spPr>
           <a:xfrm>
             <a:off x="779400" y="6289200"/>
-            <a:ext cx="1429200" cy="430920"/>
+            <a:ext cx="1428840" cy="430560"/>
           </a:xfrm>
           <a:prstGeom prst="rect">
             <a:avLst/>
@@ -3495,7 +3606,7 @@
       </p:pic>
       <p:pic>
         <p:nvPicPr>
-          <p:cNvPr id="19" name="Picture 3" descr=""/>
+          <p:cNvPr id="21" name="Picture 3" descr=""/>
           <p:cNvPicPr/>
           <p:nvPr/>
         </p:nvPicPr>
@@ -3508,7 +3619,7 @@
         <p:spPr>
           <a:xfrm>
             <a:off x="10184760" y="5404680"/>
-            <a:ext cx="1543680" cy="1543680"/>
+            <a:ext cx="1543320" cy="1543320"/>
           </a:xfrm>
           <a:prstGeom prst="rect">
             <a:avLst/>
@@ -3521,7 +3632,7 @@
       </p:pic>
       <p:sp>
         <p:nvSpPr>
-          <p:cNvPr id="20" name="PlaceHolder 1"/>
+          <p:cNvPr id="22" name="PlaceHolder 1"/>
           <p:cNvSpPr>
             <a:spLocks noGrp="1"/>
           </p:cNvSpPr>
@@ -3532,7 +3643,7 @@
         <p:spPr>
           <a:xfrm>
             <a:off x="4038480" y="6356520"/>
-            <a:ext cx="4113720" cy="363960"/>
+            <a:ext cx="4113360" cy="363600"/>
           </a:xfrm>
           <a:prstGeom prst="rect">
             <a:avLst/>
@@ -3603,7 +3714,7 @@
       </p:sp>
       <p:sp>
         <p:nvSpPr>
-          <p:cNvPr id="21" name="PlaceHolder 2"/>
+          <p:cNvPr id="23" name="PlaceHolder 2"/>
           <p:cNvSpPr>
             <a:spLocks noGrp="1"/>
           </p:cNvSpPr>
@@ -3614,7 +3725,7 @@
         <p:spPr>
           <a:xfrm>
             <a:off x="8610480" y="6356520"/>
-            <a:ext cx="2742120" cy="363960"/>
+            <a:ext cx="2741760" cy="363600"/>
           </a:xfrm>
           <a:prstGeom prst="rect">
             <a:avLst/>
@@ -3659,7 +3770,7 @@
                 <a:tab algn="l" pos="0"/>
               </a:tabLst>
             </a:pPr>
-            <a:fld id="{60ED31DA-6C68-4B72-805C-25E0776120A2}" type="slidenum">
+            <a:fld id="{BF25D876-3B39-4013-9360-F24824BF32BB}" type="slidenum">
               <a:rPr b="0" lang="en-SE" sz="1200" strike="noStrike" u="none">
                 <a:solidFill>
                   <a:schemeClr val="lt1">
@@ -3683,383 +3794,285 @@
           </a:p>
         </p:txBody>
       </p:sp>
-      <p:sp>
-        <p:nvSpPr>
-          <p:cNvPr id="22" name="PlaceHolder 3"/>
-          <p:cNvSpPr>
-            <a:spLocks noGrp="1"/>
-          </p:cNvSpPr>
-          <p:nvPr>
-            <p:ph type="dt" idx="9"/>
-          </p:nvPr>
-        </p:nvSpPr>
-        <p:spPr>
-          <a:xfrm>
-            <a:off x="838080" y="6356520"/>
-            <a:ext cx="2742120" cy="363960"/>
-          </a:xfrm>
-          <a:prstGeom prst="rect">
-            <a:avLst/>
-          </a:prstGeom>
-          <a:noFill/>
-          <a:ln w="0">
-            <a:noFill/>
-          </a:ln>
-        </p:spPr>
-        <p:txBody>
-          <a:bodyPr lIns="90000" rIns="90000" tIns="45000" bIns="45000" anchor="t">
-            <a:noAutofit/>
-          </a:bodyPr>
-          <a:lstStyle>
-            <a:lvl1pPr indent="0">
-              <a:buNone/>
-              <a:defRPr b="0" lang="sv-SE" sz="1400" strike="noStrike" u="none">
-                <a:solidFill>
-                  <a:srgbClr val="ffffff"/>
-                </a:solidFill>
-                <a:effectLst/>
-                <a:uFillTx/>
-                <a:latin typeface="Times New Roman"/>
-              </a:defRPr>
-            </a:lvl1pPr>
-          </a:lstStyle>
-          <a:p>
-            <a:pPr indent="0">
-              <a:buNone/>
-            </a:pPr>
-            <a:r>
-              <a:rPr b="0" lang="sv-SE" sz="1400" strike="noStrike" u="none">
-                <a:solidFill>
-                  <a:srgbClr val="ffffff"/>
-                </a:solidFill>
-                <a:effectLst/>
-                <a:uFillTx/>
-                <a:latin typeface="Times New Roman"/>
-              </a:rPr>
-              <a:t>&lt;date/time&gt;</a:t>
-            </a:r>
-            <a:endParaRPr b="0" lang="sv-SE" sz="1400" strike="noStrike" u="none">
-              <a:solidFill>
-                <a:srgbClr val="ffffff"/>
-              </a:solidFill>
-              <a:effectLst/>
-              <a:uFillTx/>
-              <a:latin typeface="Times New Roman"/>
-            </a:endParaRPr>
-          </a:p>
-        </p:txBody>
-      </p:sp>
-      <p:sp>
-        <p:nvSpPr>
-          <p:cNvPr id="23" name="PlaceHolder 4"/>
-          <p:cNvSpPr>
-            <a:spLocks noGrp="1"/>
-          </p:cNvSpPr>
-          <p:nvPr>
-            <p:ph type="title"/>
-          </p:nvPr>
-        </p:nvSpPr>
-        <p:spPr>
-          <a:xfrm>
-            <a:off x="609480" y="273600"/>
-            <a:ext cx="10972440" cy="1144800"/>
-          </a:xfrm>
-          <a:prstGeom prst="rect">
-            <a:avLst/>
-          </a:prstGeom>
-          <a:noFill/>
-          <a:ln w="0">
-            <a:noFill/>
-          </a:ln>
-        </p:spPr>
-        <p:txBody>
-          <a:bodyPr lIns="0" rIns="0" tIns="0" bIns="0" anchor="ctr">
-            <a:noAutofit/>
-          </a:bodyPr>
-          <a:p>
-            <a:pPr indent="0" algn="ctr">
-              <a:buNone/>
-            </a:pPr>
-            <a:r>
-              <a:rPr b="0" lang="sv-SE" sz="4400" strike="noStrike" u="none">
-                <a:solidFill>
-                  <a:srgbClr val="ffffff"/>
-                </a:solidFill>
-                <a:effectLst/>
-                <a:uFillTx/>
-                <a:latin typeface="Arial"/>
-              </a:rPr>
-              <a:t>Click to edit the title text format</a:t>
-            </a:r>
-            <a:endParaRPr b="0" lang="sv-SE" sz="4400" strike="noStrike" u="none">
-              <a:solidFill>
-                <a:srgbClr val="ffffff"/>
-              </a:solidFill>
-              <a:effectLst/>
-              <a:uFillTx/>
-              <a:latin typeface="Arial"/>
-            </a:endParaRPr>
-          </a:p>
-        </p:txBody>
-      </p:sp>
-      <p:sp>
-        <p:nvSpPr>
-          <p:cNvPr id="24" name="PlaceHolder 5"/>
-          <p:cNvSpPr>
-            <a:spLocks noGrp="1"/>
-          </p:cNvSpPr>
-          <p:nvPr>
-            <p:ph type="body"/>
-          </p:nvPr>
-        </p:nvSpPr>
-        <p:spPr>
-          <a:xfrm>
-            <a:off x="609480" y="1604520"/>
-            <a:ext cx="10972440" cy="3977280"/>
-          </a:xfrm>
-          <a:prstGeom prst="rect">
-            <a:avLst/>
-          </a:prstGeom>
-          <a:noFill/>
-          <a:ln w="0">
-            <a:noFill/>
-          </a:ln>
-        </p:spPr>
-        <p:txBody>
-          <a:bodyPr lIns="0" rIns="0" tIns="0" bIns="0" anchor="t">
-            <a:normAutofit/>
-          </a:bodyPr>
-          <a:p>
-            <a:pPr marL="432000" indent="-324000">
-              <a:spcBef>
-                <a:spcPts val="1417"/>
-              </a:spcBef>
-              <a:buClr>
-                <a:srgbClr val="ffffff"/>
-              </a:buClr>
-              <a:buSzPct val="45000"/>
-              <a:buFont typeface="Wingdings" charset="2"/>
-              <a:buChar char=""/>
-            </a:pPr>
-            <a:r>
-              <a:rPr b="0" lang="sv-SE" sz="3200" strike="noStrike" u="none">
-                <a:solidFill>
-                  <a:srgbClr val="ffffff"/>
-                </a:solidFill>
-                <a:effectLst/>
-                <a:uFillTx/>
-                <a:latin typeface="Arial"/>
-              </a:rPr>
-              <a:t>Click to edit the outline text format</a:t>
-            </a:r>
-            <a:endParaRPr b="0" lang="sv-SE" sz="3200" strike="noStrike" u="none">
-              <a:solidFill>
-                <a:srgbClr val="ffffff"/>
-              </a:solidFill>
-              <a:effectLst/>
-              <a:uFillTx/>
-              <a:latin typeface="Arial"/>
-            </a:endParaRPr>
-          </a:p>
-          <a:p>
-            <a:pPr lvl="1" marL="864000" indent="-324000">
-              <a:spcBef>
-                <a:spcPts val="1134"/>
-              </a:spcBef>
-              <a:buClr>
-                <a:srgbClr val="ffffff"/>
-              </a:buClr>
-              <a:buSzPct val="75000"/>
-              <a:buFont typeface="Symbol" charset="2"/>
-              <a:buChar char=""/>
-            </a:pPr>
-            <a:r>
-              <a:rPr b="0" lang="sv-SE" sz="2800" strike="noStrike" u="none">
-                <a:solidFill>
-                  <a:srgbClr val="ffffff"/>
-                </a:solidFill>
-                <a:effectLst/>
-                <a:uFillTx/>
-                <a:latin typeface="Arial"/>
-              </a:rPr>
-              <a:t>Second Outline Level</a:t>
-            </a:r>
-            <a:endParaRPr b="0" lang="sv-SE" sz="2800" strike="noStrike" u="none">
-              <a:solidFill>
-                <a:srgbClr val="ffffff"/>
-              </a:solidFill>
-              <a:effectLst/>
-              <a:uFillTx/>
-              <a:latin typeface="Arial"/>
-            </a:endParaRPr>
-          </a:p>
-          <a:p>
-            <a:pPr lvl="2" marL="1296000" indent="-288000">
-              <a:spcBef>
-                <a:spcPts val="850"/>
-              </a:spcBef>
-              <a:buClr>
-                <a:srgbClr val="ffffff"/>
-              </a:buClr>
-              <a:buSzPct val="45000"/>
-              <a:buFont typeface="Wingdings" charset="2"/>
-              <a:buChar char=""/>
-            </a:pPr>
-            <a:r>
-              <a:rPr b="0" lang="sv-SE" sz="2400" strike="noStrike" u="none">
-                <a:solidFill>
-                  <a:srgbClr val="ffffff"/>
-                </a:solidFill>
-                <a:effectLst/>
-                <a:uFillTx/>
-                <a:latin typeface="Arial"/>
-              </a:rPr>
-              <a:t>Third Outline Level</a:t>
-            </a:r>
-            <a:endParaRPr b="0" lang="sv-SE" sz="2400" strike="noStrike" u="none">
-              <a:solidFill>
-                <a:srgbClr val="ffffff"/>
-              </a:solidFill>
-              <a:effectLst/>
-              <a:uFillTx/>
-              <a:latin typeface="Arial"/>
-            </a:endParaRPr>
-          </a:p>
-          <a:p>
-            <a:pPr lvl="3" marL="1728000" indent="-216000">
-              <a:spcBef>
-                <a:spcPts val="567"/>
-              </a:spcBef>
-              <a:buClr>
-                <a:srgbClr val="ffffff"/>
-              </a:buClr>
-              <a:buSzPct val="75000"/>
-              <a:buFont typeface="Symbol" charset="2"/>
-              <a:buChar char=""/>
-            </a:pPr>
-            <a:r>
-              <a:rPr b="0" lang="sv-SE" sz="2000" strike="noStrike" u="none">
-                <a:solidFill>
-                  <a:srgbClr val="ffffff"/>
-                </a:solidFill>
-                <a:effectLst/>
-                <a:uFillTx/>
-                <a:latin typeface="Arial"/>
-              </a:rPr>
-              <a:t>Fourth Outline Level</a:t>
-            </a:r>
-            <a:endParaRPr b="0" lang="sv-SE" sz="2000" strike="noStrike" u="none">
-              <a:solidFill>
-                <a:srgbClr val="ffffff"/>
-              </a:solidFill>
-              <a:effectLst/>
-              <a:uFillTx/>
-              <a:latin typeface="Arial"/>
-            </a:endParaRPr>
-          </a:p>
-          <a:p>
-            <a:pPr lvl="4" marL="2160000" indent="-216000">
-              <a:spcBef>
-                <a:spcPts val="283"/>
-              </a:spcBef>
-              <a:buClr>
-                <a:srgbClr val="ffffff"/>
-              </a:buClr>
-              <a:buSzPct val="45000"/>
-              <a:buFont typeface="Wingdings" charset="2"/>
-              <a:buChar char=""/>
-            </a:pPr>
-            <a:r>
-              <a:rPr b="0" lang="sv-SE" sz="2000" strike="noStrike" u="none">
-                <a:solidFill>
-                  <a:srgbClr val="ffffff"/>
-                </a:solidFill>
-                <a:effectLst/>
-                <a:uFillTx/>
-                <a:latin typeface="Arial"/>
-              </a:rPr>
-              <a:t>Fifth Outline Level</a:t>
-            </a:r>
-            <a:endParaRPr b="0" lang="sv-SE" sz="2000" strike="noStrike" u="none">
-              <a:solidFill>
-                <a:srgbClr val="ffffff"/>
-              </a:solidFill>
-              <a:effectLst/>
-              <a:uFillTx/>
-              <a:latin typeface="Arial"/>
-            </a:endParaRPr>
-          </a:p>
-          <a:p>
-            <a:pPr lvl="5" marL="2592000" indent="-216000">
-              <a:spcBef>
-                <a:spcPts val="283"/>
-              </a:spcBef>
-              <a:buClr>
-                <a:srgbClr val="ffffff"/>
-              </a:buClr>
-              <a:buSzPct val="45000"/>
-              <a:buFont typeface="Wingdings" charset="2"/>
-              <a:buChar char=""/>
-            </a:pPr>
-            <a:r>
-              <a:rPr b="0" lang="sv-SE" sz="2000" strike="noStrike" u="none">
-                <a:solidFill>
-                  <a:srgbClr val="ffffff"/>
-                </a:solidFill>
-                <a:effectLst/>
-                <a:uFillTx/>
-                <a:latin typeface="Arial"/>
-              </a:rPr>
-              <a:t>Sixth Outline Level</a:t>
-            </a:r>
-            <a:endParaRPr b="0" lang="sv-SE" sz="2000" strike="noStrike" u="none">
-              <a:solidFill>
-                <a:srgbClr val="ffffff"/>
-              </a:solidFill>
-              <a:effectLst/>
-              <a:uFillTx/>
-              <a:latin typeface="Arial"/>
-            </a:endParaRPr>
-          </a:p>
-          <a:p>
-            <a:pPr lvl="6" marL="3024000" indent="-216000">
-              <a:spcBef>
-                <a:spcPts val="283"/>
-              </a:spcBef>
-              <a:buClr>
-                <a:srgbClr val="ffffff"/>
-              </a:buClr>
-              <a:buSzPct val="45000"/>
-              <a:buFont typeface="Wingdings" charset="2"/>
-              <a:buChar char=""/>
-            </a:pPr>
-            <a:r>
-              <a:rPr b="0" lang="sv-SE" sz="2000" strike="noStrike" u="none">
-                <a:solidFill>
-                  <a:srgbClr val="ffffff"/>
-                </a:solidFill>
-                <a:effectLst/>
-                <a:uFillTx/>
-                <a:latin typeface="Arial"/>
-              </a:rPr>
-              <a:t>Seventh Outline Level</a:t>
-            </a:r>
-            <a:endParaRPr b="0" lang="sv-SE" sz="2000" strike="noStrike" u="none">
-              <a:solidFill>
-                <a:srgbClr val="ffffff"/>
-              </a:solidFill>
-              <a:effectLst/>
-              <a:uFillTx/>
-              <a:latin typeface="Arial"/>
-            </a:endParaRPr>
-          </a:p>
-        </p:txBody>
-      </p:sp>
+    </p:spTree>
+  </p:cSld>
+</p:sldLayout>
+</file>
+
+<file path=ppt/slideLayouts/slideLayout5.xml><?xml version="1.0" encoding="utf-8"?>
+<p:sldLayout xmlns:a="http://schemas.openxmlformats.org/drawingml/2006/main" xmlns:p="http://schemas.openxmlformats.org/presentationml/2006/main" xmlns:r="http://schemas.openxmlformats.org/officeDocument/2006/relationships" xmlns:p14="http://schemas.microsoft.com/office/powerpoint/2010/main" xmlns:p15="http://schemas.microsoft.com/office/powerpoint/2012/main" xmlns:mc="http://schemas.openxmlformats.org/markup-compatibility/2006" type="blank" preserve="1">
+  <p:cSld name="Title and Text">
+    <p:spTree>
+      <p:nvGrpSpPr>
+        <p:cNvPr id="1" name=""/>
+        <p:cNvGrpSpPr/>
+        <p:nvPr/>
+      </p:nvGrpSpPr>
+      <p:grpSpPr>
+        <a:xfrm>
+          <a:off x="0" y="0"/>
+          <a:ext cx="0" cy="0"/>
+          <a:chOff x="0" y="0"/>
+          <a:chExt cx="0" cy="0"/>
+        </a:xfrm>
+      </p:grpSpPr>
+      <p:sp>
+        <p:nvSpPr>
+          <p:cNvPr id="2" name="PlaceHolder 1"/>
+          <p:cNvSpPr>
+            <a:spLocks noGrp="1"/>
+          </p:cNvSpPr>
+          <p:nvPr>
+            <p:ph type="ftr" idx="9"/>
+          </p:nvPr>
+        </p:nvSpPr>
+        <p:spPr/>
+        <p:txBody>
+          <a:bodyPr/>
+          <a:p>
+            <a:r>
+              <a:t>Footer</a:t>
+            </a:r>
+          </a:p>
+        </p:txBody>
+      </p:sp>
+      <p:sp>
+        <p:nvSpPr>
+          <p:cNvPr id="3" name="PlaceHolder 2"/>
+          <p:cNvSpPr>
+            <a:spLocks noGrp="1"/>
+          </p:cNvSpPr>
+          <p:nvPr>
+            <p:ph type="sldNum" idx="10"/>
+          </p:nvPr>
+        </p:nvSpPr>
+        <p:spPr/>
+        <p:txBody>
+          <a:bodyPr/>
+          <a:p>
+            <a:fld id="{38148EFF-2C57-4CBE-91D2-D363AF6206EB}" type="slidenum">
+              <a:t>&lt;#&gt;</a:t>
+            </a:fld>
+          </a:p>
+        </p:txBody>
+      </p:sp>
+      <p:sp>
+        <p:nvSpPr>
+          <p:cNvPr id="4" name="PlaceHolder 3"/>
+          <p:cNvSpPr>
+            <a:spLocks noGrp="1"/>
+          </p:cNvSpPr>
+          <p:nvPr>
+            <p:ph type="dt" idx="11"/>
+          </p:nvPr>
+        </p:nvSpPr>
+        <p:spPr/>
+        <p:txBody>
+          <a:bodyPr/>
+          <a:p>
+            <a:r>
+              <a:rPr lang="sv-SE"/>
+              <a:t/>
+            </a:r>
+          </a:p>
+        </p:txBody>
+      </p:sp>
+    </p:spTree>
+  </p:cSld>
+</p:sldLayout>
+</file>
+
+<file path=ppt/slideLayouts/slideLayout6.xml><?xml version="1.0" encoding="utf-8"?>
+<p:sldLayout xmlns:a="http://schemas.openxmlformats.org/drawingml/2006/main" xmlns:p="http://schemas.openxmlformats.org/presentationml/2006/main" xmlns:r="http://schemas.openxmlformats.org/officeDocument/2006/relationships" xmlns:p14="http://schemas.microsoft.com/office/powerpoint/2010/main" xmlns:p15="http://schemas.microsoft.com/office/powerpoint/2012/main" xmlns:mc="http://schemas.openxmlformats.org/markup-compatibility/2006" type="blank" preserve="1">
+  <p:cSld name="Section Header">
+    <p:spTree>
+      <p:nvGrpSpPr>
+        <p:cNvPr id="1" name=""/>
+        <p:cNvGrpSpPr/>
+        <p:nvPr/>
+      </p:nvGrpSpPr>
+      <p:grpSpPr>
+        <a:xfrm>
+          <a:off x="0" y="0"/>
+          <a:ext cx="0" cy="0"/>
+          <a:chOff x="0" y="0"/>
+          <a:chExt cx="0" cy="0"/>
+        </a:xfrm>
+      </p:grpSpPr>
+      <p:sp>
+        <p:nvSpPr>
+          <p:cNvPr id="2" name="PlaceHolder 1"/>
+          <p:cNvSpPr>
+            <a:spLocks noGrp="1"/>
+          </p:cNvSpPr>
+          <p:nvPr>
+            <p:ph type="ftr" idx="12"/>
+          </p:nvPr>
+        </p:nvSpPr>
+        <p:spPr/>
+        <p:txBody>
+          <a:bodyPr/>
+          <a:p>
+            <a:r>
+              <a:t>Footer</a:t>
+            </a:r>
+          </a:p>
+        </p:txBody>
+      </p:sp>
+      <p:sp>
+        <p:nvSpPr>
+          <p:cNvPr id="3" name="PlaceHolder 2"/>
+          <p:cNvSpPr>
+            <a:spLocks noGrp="1"/>
+          </p:cNvSpPr>
+          <p:nvPr>
+            <p:ph type="sldNum" idx="13"/>
+          </p:nvPr>
+        </p:nvSpPr>
+        <p:spPr/>
+        <p:txBody>
+          <a:bodyPr/>
+          <a:p>
+            <a:fld id="{7E2B102A-3224-4C3D-823B-6B2174CF5A99}" type="slidenum">
+              <a:t>&lt;#&gt;</a:t>
+            </a:fld>
+          </a:p>
+        </p:txBody>
+      </p:sp>
+      <p:sp>
+        <p:nvSpPr>
+          <p:cNvPr id="4" name="PlaceHolder 3"/>
+          <p:cNvSpPr>
+            <a:spLocks noGrp="1"/>
+          </p:cNvSpPr>
+          <p:nvPr>
+            <p:ph type="dt" idx="14"/>
+          </p:nvPr>
+        </p:nvSpPr>
+        <p:spPr/>
+        <p:txBody>
+          <a:bodyPr/>
+          <a:p>
+            <a:r>
+              <a:rPr lang="sv-SE"/>
+              <a:t/>
+            </a:r>
+          </a:p>
+        </p:txBody>
+      </p:sp>
+    </p:spTree>
+  </p:cSld>
+</p:sldLayout>
+</file>
+
+<file path=ppt/slideLayouts/slideLayout7.xml><?xml version="1.0" encoding="utf-8"?>
+<p:sldLayout xmlns:a="http://schemas.openxmlformats.org/drawingml/2006/main" xmlns:p="http://schemas.openxmlformats.org/presentationml/2006/main" xmlns:r="http://schemas.openxmlformats.org/officeDocument/2006/relationships" xmlns:p14="http://schemas.microsoft.com/office/powerpoint/2010/main" xmlns:p15="http://schemas.microsoft.com/office/powerpoint/2012/main" xmlns:mc="http://schemas.openxmlformats.org/markup-compatibility/2006" type="blank" preserve="1">
+  <p:cSld name="Content with Caption">
+    <p:spTree>
+      <p:nvGrpSpPr>
+        <p:cNvPr id="1" name=""/>
+        <p:cNvGrpSpPr/>
+        <p:nvPr/>
+      </p:nvGrpSpPr>
+      <p:grpSpPr>
+        <a:xfrm>
+          <a:off x="0" y="0"/>
+          <a:ext cx="0" cy="0"/>
+          <a:chOff x="0" y="0"/>
+          <a:chExt cx="0" cy="0"/>
+        </a:xfrm>
+      </p:grpSpPr>
+      <p:sp>
+        <p:nvSpPr>
+          <p:cNvPr id="2" name="PlaceHolder 1"/>
+          <p:cNvSpPr>
+            <a:spLocks noGrp="1"/>
+          </p:cNvSpPr>
+          <p:nvPr>
+            <p:ph type="ftr" idx="15"/>
+          </p:nvPr>
+        </p:nvSpPr>
+        <p:spPr/>
+        <p:txBody>
+          <a:bodyPr/>
+          <a:p>
+            <a:r>
+              <a:t>Footer</a:t>
+            </a:r>
+          </a:p>
+        </p:txBody>
+      </p:sp>
+      <p:sp>
+        <p:nvSpPr>
+          <p:cNvPr id="3" name="PlaceHolder 2"/>
+          <p:cNvSpPr>
+            <a:spLocks noGrp="1"/>
+          </p:cNvSpPr>
+          <p:nvPr>
+            <p:ph type="sldNum" idx="16"/>
+          </p:nvPr>
+        </p:nvSpPr>
+        <p:spPr/>
+        <p:txBody>
+          <a:bodyPr/>
+          <a:p>
+            <a:fld id="{4030D99D-38A6-4691-A2DD-534D5E049625}" type="slidenum">
+              <a:t>&lt;#&gt;</a:t>
+            </a:fld>
+          </a:p>
+        </p:txBody>
+      </p:sp>
+      <p:sp>
+        <p:nvSpPr>
+          <p:cNvPr id="4" name="PlaceHolder 3"/>
+          <p:cNvSpPr>
+            <a:spLocks noGrp="1"/>
+          </p:cNvSpPr>
+          <p:nvPr>
+            <p:ph type="dt" idx="17"/>
+          </p:nvPr>
+        </p:nvSpPr>
+        <p:spPr/>
+        <p:txBody>
+          <a:bodyPr/>
+          <a:p>
+            <a:r>
+              <a:rPr lang="sv-SE"/>
+              <a:t/>
+            </a:r>
+          </a:p>
+        </p:txBody>
+      </p:sp>
+    </p:spTree>
+  </p:cSld>
+</p:sldLayout>
+</file>
+
+<file path=ppt/slideMasters/slideMaster1.xml><?xml version="1.0" encoding="utf-8"?>
+<p:sldMaster xmlns:a="http://schemas.openxmlformats.org/drawingml/2006/main" xmlns:p="http://schemas.openxmlformats.org/presentationml/2006/main" xmlns:r="http://schemas.openxmlformats.org/officeDocument/2006/relationships" xmlns:p14="http://schemas.microsoft.com/office/powerpoint/2010/main" xmlns:p15="http://schemas.microsoft.com/office/powerpoint/2012/main" xmlns:mc="http://schemas.openxmlformats.org/markup-compatibility/2006">
+  <p:cSld>
+    <p:spTree>
+      <p:nvGrpSpPr>
+        <p:cNvPr id="1" name=""/>
+        <p:cNvGrpSpPr/>
+        <p:nvPr/>
+      </p:nvGrpSpPr>
+      <p:grpSpPr>
+        <a:xfrm>
+          <a:off x="0" y="0"/>
+          <a:ext cx="0" cy="0"/>
+          <a:chOff x="0" y="0"/>
+          <a:chExt cx="0" cy="0"/>
+        </a:xfrm>
+      </p:grpSpPr>
     </p:spTree>
   </p:cSld>
   <p:clrMap bg1="lt1" tx1="dk1" bg2="lt2" tx2="dk2" accent1="accent1" accent2="accent2" accent3="accent3" accent4="accent4" accent5="accent5" accent6="accent6" hlink="hlink" folHlink="folHlink"/>
   <p:sldLayoutIdLst>
-    <p:sldLayoutId id="2147483653" r:id="rId4"/>
+    <p:sldLayoutId id="2147483649" r:id="rId2"/>
+    <p:sldLayoutId id="2147483650" r:id="rId3"/>
+    <p:sldLayoutId id="2147483651" r:id="rId4"/>
+    <p:sldLayoutId id="2147483652" r:id="rId5"/>
   </p:sldLayoutIdLst>
 </p:sldMaster>
 </file>
@@ -4098,7 +4111,7 @@
       </p:grpSpPr>
       <p:pic>
         <p:nvPicPr>
-          <p:cNvPr id="25" name="Picture 11" descr=""/>
+          <p:cNvPr id="24" name="Picture 11" descr=""/>
           <p:cNvPicPr/>
           <p:nvPr/>
         </p:nvPicPr>
@@ -4109,7 +4122,7 @@
         <p:spPr>
           <a:xfrm>
             <a:off x="779400" y="6289200"/>
-            <a:ext cx="1429200" cy="430920"/>
+            <a:ext cx="1428840" cy="430560"/>
           </a:xfrm>
           <a:prstGeom prst="rect">
             <a:avLst/>
@@ -4122,7 +4135,7 @@
       </p:pic>
       <p:pic>
         <p:nvPicPr>
-          <p:cNvPr id="26" name="Picture 3" descr=""/>
+          <p:cNvPr id="25" name="Picture 3" descr=""/>
           <p:cNvPicPr/>
           <p:nvPr/>
         </p:nvPicPr>
@@ -4135,7 +4148,7 @@
         <p:spPr>
           <a:xfrm>
             <a:off x="10184760" y="5404680"/>
-            <a:ext cx="1543680" cy="1543680"/>
+            <a:ext cx="1543320" cy="1543320"/>
           </a:xfrm>
           <a:prstGeom prst="rect">
             <a:avLst/>
@@ -4148,18 +4161,18 @@
       </p:pic>
       <p:sp>
         <p:nvSpPr>
-          <p:cNvPr id="27" name="PlaceHolder 1"/>
-          <p:cNvSpPr>
-            <a:spLocks noGrp="1"/>
-          </p:cNvSpPr>
-          <p:nvPr>
-            <p:ph type="ftr" idx="10"/>
+          <p:cNvPr id="26" name="PlaceHolder 1"/>
+          <p:cNvSpPr>
+            <a:spLocks noGrp="1"/>
+          </p:cNvSpPr>
+          <p:nvPr>
+            <p:ph type="ftr" idx="9"/>
           </p:nvPr>
         </p:nvSpPr>
         <p:spPr>
           <a:xfrm>
             <a:off x="4038480" y="6356520"/>
-            <a:ext cx="4113720" cy="363960"/>
+            <a:ext cx="4113360" cy="363600"/>
           </a:xfrm>
           <a:prstGeom prst="rect">
             <a:avLst/>
@@ -4215,7 +4228,7 @@
                 <a:uFillTx/>
                 <a:latin typeface="Aptos"/>
               </a:rPr>
-              <a:t> </a:t>
+              <a:t>&lt;footer&gt;</a:t>
             </a:r>
             <a:endParaRPr b="0" lang="sv-SE" sz="1200" strike="noStrike" u="none">
               <a:solidFill>
@@ -4230,18 +4243,18 @@
       </p:sp>
       <p:sp>
         <p:nvSpPr>
-          <p:cNvPr id="28" name="PlaceHolder 2"/>
-          <p:cNvSpPr>
-            <a:spLocks noGrp="1"/>
-          </p:cNvSpPr>
-          <p:nvPr>
-            <p:ph type="sldNum" idx="11"/>
+          <p:cNvPr id="27" name="PlaceHolder 2"/>
+          <p:cNvSpPr>
+            <a:spLocks noGrp="1"/>
+          </p:cNvSpPr>
+          <p:nvPr>
+            <p:ph type="sldNum" idx="10"/>
           </p:nvPr>
         </p:nvSpPr>
         <p:spPr>
           <a:xfrm>
             <a:off x="8610480" y="6356520"/>
-            <a:ext cx="2742120" cy="363960"/>
+            <a:ext cx="2741760" cy="363600"/>
           </a:xfrm>
           <a:prstGeom prst="rect">
             <a:avLst/>
@@ -4286,7 +4299,7 @@
                 <a:tab algn="l" pos="0"/>
               </a:tabLst>
             </a:pPr>
-            <a:fld id="{D0806B25-3BF7-48F5-AA4A-E70D59726FD5}" type="slidenum">
+            <a:fld id="{1D3CD96E-3D15-4848-B459-7429E83AB024}" type="slidenum">
               <a:rPr b="0" lang="en-SE" sz="1200" strike="noStrike" u="none">
                 <a:solidFill>
                   <a:schemeClr val="lt1">
@@ -4297,7 +4310,7 @@
                 <a:uFillTx/>
                 <a:latin typeface="Aptos"/>
               </a:rPr>
-              <a:t>1</a:t>
+              <a:t>&lt;number&gt;</a:t>
             </a:fld>
             <a:endParaRPr b="0" lang="sv-SE" sz="1200" strike="noStrike" u="none">
               <a:solidFill>
@@ -4312,18 +4325,18 @@
       </p:sp>
       <p:sp>
         <p:nvSpPr>
-          <p:cNvPr id="29" name="PlaceHolder 3"/>
-          <p:cNvSpPr>
-            <a:spLocks noGrp="1"/>
-          </p:cNvSpPr>
-          <p:nvPr>
-            <p:ph type="dt" idx="12"/>
+          <p:cNvPr id="28" name="PlaceHolder 3"/>
+          <p:cNvSpPr>
+            <a:spLocks noGrp="1"/>
+          </p:cNvSpPr>
+          <p:nvPr>
+            <p:ph type="dt" idx="11"/>
           </p:nvPr>
         </p:nvSpPr>
         <p:spPr>
           <a:xfrm>
             <a:off x="838080" y="6356520"/>
-            <a:ext cx="2742120" cy="363960"/>
+            <a:ext cx="2741760" cy="363600"/>
           </a:xfrm>
           <a:prstGeom prst="rect">
             <a:avLst/>
@@ -4363,7 +4376,7 @@
                 <a:uFillTx/>
                 <a:latin typeface="Times New Roman"/>
               </a:rPr>
-              <a:t> </a:t>
+              <a:t>&lt;date/time&gt;</a:t>
             </a:r>
             <a:endParaRPr b="0" lang="sv-SE" sz="1400" strike="noStrike" u="none">
               <a:solidFill>
@@ -4378,7 +4391,7 @@
       </p:sp>
       <p:sp>
         <p:nvSpPr>
-          <p:cNvPr id="30" name="PlaceHolder 4"/>
+          <p:cNvPr id="29" name="PlaceHolder 4"/>
           <p:cNvSpPr>
             <a:spLocks noGrp="1"/>
           </p:cNvSpPr>
@@ -4431,7 +4444,7 @@
       </p:sp>
       <p:sp>
         <p:nvSpPr>
-          <p:cNvPr id="31" name="PlaceHolder 5"/>
+          <p:cNvPr id="30" name="PlaceHolder 5"/>
           <p:cNvSpPr>
             <a:spLocks noGrp="1"/>
           </p:cNvSpPr>
@@ -4686,7 +4699,7 @@
   </p:cSld>
   <p:clrMap bg1="lt1" tx1="dk1" bg2="lt2" tx2="dk2" accent1="accent1" accent2="accent2" accent3="accent3" accent4="accent4" accent5="accent5" accent6="accent6" hlink="hlink" folHlink="folHlink"/>
   <p:sldLayoutIdLst>
-    <p:sldLayoutId id="2147483655" r:id="rId4"/>
+    <p:sldLayoutId id="2147483654" r:id="rId4"/>
   </p:sldLayoutIdLst>
 </p:sldMaster>
 </file>
@@ -4725,7 +4738,7 @@
       </p:grpSpPr>
       <p:pic>
         <p:nvPicPr>
-          <p:cNvPr id="32" name="Picture 11" descr=""/>
+          <p:cNvPr id="31" name="Picture 11" descr=""/>
           <p:cNvPicPr/>
           <p:nvPr/>
         </p:nvPicPr>
@@ -4736,7 +4749,7 @@
         <p:spPr>
           <a:xfrm>
             <a:off x="779400" y="6289200"/>
-            <a:ext cx="1429200" cy="430920"/>
+            <a:ext cx="1428840" cy="430560"/>
           </a:xfrm>
           <a:prstGeom prst="rect">
             <a:avLst/>
@@ -4749,7 +4762,7 @@
       </p:pic>
       <p:pic>
         <p:nvPicPr>
-          <p:cNvPr id="33" name="Picture 3" descr=""/>
+          <p:cNvPr id="32" name="Picture 3" descr=""/>
           <p:cNvPicPr/>
           <p:nvPr/>
         </p:nvPicPr>
@@ -4762,7 +4775,7 @@
         <p:spPr>
           <a:xfrm>
             <a:off x="10184760" y="5404680"/>
-            <a:ext cx="1543680" cy="1543680"/>
+            <a:ext cx="1543320" cy="1543320"/>
           </a:xfrm>
           <a:prstGeom prst="rect">
             <a:avLst/>
@@ -4773,22 +4786,20 @@
           </a:ln>
         </p:spPr>
       </p:pic>
-      <p:pic>
-        <p:nvPicPr>
-          <p:cNvPr id="34" name="Picture 7" descr=""/>
-          <p:cNvPicPr/>
-          <p:nvPr/>
-        </p:nvPicPr>
-        <p:blipFill>
-          <a:blip r:embed="rId4">
-            <a:alphaModFix amt="70000"/>
-          </a:blip>
-          <a:stretch/>
-        </p:blipFill>
+      <p:sp>
+        <p:nvSpPr>
+          <p:cNvPr id="33" name="PlaceHolder 1"/>
+          <p:cNvSpPr>
+            <a:spLocks noGrp="1"/>
+          </p:cNvSpPr>
+          <p:nvPr>
+            <p:ph type="ftr" idx="12"/>
+          </p:nvPr>
+        </p:nvSpPr>
         <p:spPr>
           <a:xfrm>
-            <a:off x="5543280" y="457200"/>
-            <a:ext cx="5807880" cy="3441240"/>
+            <a:off x="4038480" y="6356520"/>
+            <a:ext cx="4113360" cy="363600"/>
           </a:xfrm>
           <a:prstGeom prst="rect">
             <a:avLst/>
@@ -4798,21 +4809,79 @@
             <a:noFill/>
           </a:ln>
         </p:spPr>
-      </p:pic>
-      <p:sp>
-        <p:nvSpPr>
-          <p:cNvPr id="35" name="PlaceHolder 1"/>
-          <p:cNvSpPr>
-            <a:spLocks noGrp="1"/>
-          </p:cNvSpPr>
-          <p:nvPr>
-            <p:ph type="ftr" idx="13"/>
+        <p:txBody>
+          <a:bodyPr lIns="91440" rIns="91440" tIns="45720" bIns="45720" anchor="ctr">
+            <a:noAutofit/>
+          </a:bodyPr>
+          <a:lstStyle>
+            <a:lvl1pPr indent="0" algn="ctr" defTabSz="914400">
+              <a:lnSpc>
+                <a:spcPct val="100000"/>
+              </a:lnSpc>
+              <a:buNone/>
+              <a:tabLst>
+                <a:tab algn="l" pos="0"/>
+              </a:tabLst>
+              <a:defRPr b="0" lang="sv-SE" sz="1200" strike="noStrike" u="none">
+                <a:solidFill>
+                  <a:schemeClr val="lt1">
+                    <a:tint val="82000"/>
+                  </a:schemeClr>
+                </a:solidFill>
+                <a:effectLst/>
+                <a:uFillTx/>
+                <a:latin typeface="Aptos"/>
+              </a:defRPr>
+            </a:lvl1pPr>
+          </a:lstStyle>
+          <a:p>
+            <a:pPr indent="0" algn="ctr" defTabSz="914400">
+              <a:lnSpc>
+                <a:spcPct val="100000"/>
+              </a:lnSpc>
+              <a:buNone/>
+              <a:tabLst>
+                <a:tab algn="l" pos="0"/>
+              </a:tabLst>
+            </a:pPr>
+            <a:r>
+              <a:rPr b="0" lang="sv-SE" sz="1200" strike="noStrike" u="none">
+                <a:solidFill>
+                  <a:schemeClr val="lt1">
+                    <a:tint val="82000"/>
+                  </a:schemeClr>
+                </a:solidFill>
+                <a:effectLst/>
+                <a:uFillTx/>
+                <a:latin typeface="Aptos"/>
+              </a:rPr>
+              <a:t> </a:t>
+            </a:r>
+            <a:endParaRPr b="0" lang="sv-SE" sz="1200" strike="noStrike" u="none">
+              <a:solidFill>
+                <a:srgbClr val="ffffff"/>
+              </a:solidFill>
+              <a:effectLst/>
+              <a:uFillTx/>
+              <a:latin typeface="Times New Roman"/>
+            </a:endParaRPr>
+          </a:p>
+        </p:txBody>
+      </p:sp>
+      <p:sp>
+        <p:nvSpPr>
+          <p:cNvPr id="34" name="PlaceHolder 2"/>
+          <p:cNvSpPr>
+            <a:spLocks noGrp="1"/>
+          </p:cNvSpPr>
+          <p:nvPr>
+            <p:ph type="sldNum" idx="13"/>
           </p:nvPr>
         </p:nvSpPr>
         <p:spPr>
           <a:xfrm>
-            <a:off x="4038480" y="6356520"/>
-            <a:ext cx="4113720" cy="363960"/>
+            <a:off x="8610480" y="6356520"/>
+            <a:ext cx="2741760" cy="363600"/>
           </a:xfrm>
           <a:prstGeom prst="rect">
             <a:avLst/>
@@ -4827,7 +4896,7 @@
             <a:noAutofit/>
           </a:bodyPr>
           <a:lstStyle>
-            <a:lvl1pPr indent="0" algn="ctr" defTabSz="914400">
+            <a:lvl1pPr indent="0" algn="r" defTabSz="914400">
               <a:lnSpc>
                 <a:spcPct val="100000"/>
               </a:lnSpc>
@@ -4835,7 +4904,7 @@
               <a:tabLst>
                 <a:tab algn="l" pos="0"/>
               </a:tabLst>
-              <a:defRPr b="0" lang="sv-SE" sz="1200" strike="noStrike" u="none">
+              <a:defRPr b="0" lang="en-SE" sz="1200" strike="noStrike" u="none">
                 <a:solidFill>
                   <a:schemeClr val="lt1">
                     <a:tint val="82000"/>
@@ -4848,7 +4917,7 @@
             </a:lvl1pPr>
           </a:lstStyle>
           <a:p>
-            <a:pPr indent="0" algn="ctr" defTabSz="914400">
+            <a:pPr indent="0" algn="r" defTabSz="914400">
               <a:lnSpc>
                 <a:spcPct val="100000"/>
               </a:lnSpc>
@@ -4857,8 +4926,8 @@
                 <a:tab algn="l" pos="0"/>
               </a:tabLst>
             </a:pPr>
-            <a:r>
-              <a:rPr b="0" lang="sv-SE" sz="1200" strike="noStrike" u="none">
+            <a:fld id="{EA41B5DA-CE1F-41BC-A1DE-DA722CC58240}" type="slidenum">
+              <a:rPr b="0" lang="en-SE" sz="1200" strike="noStrike" u="none">
                 <a:solidFill>
                   <a:schemeClr val="lt1">
                     <a:tint val="82000"/>
@@ -4868,8 +4937,8 @@
                 <a:uFillTx/>
                 <a:latin typeface="Aptos"/>
               </a:rPr>
-              <a:t> </a:t>
-            </a:r>
+              <a:t>1</a:t>
+            </a:fld>
             <a:endParaRPr b="0" lang="sv-SE" sz="1200" strike="noStrike" u="none">
               <a:solidFill>
                 <a:srgbClr val="ffffff"/>
@@ -4883,18 +4952,18 @@
       </p:sp>
       <p:sp>
         <p:nvSpPr>
-          <p:cNvPr id="36" name="PlaceHolder 2"/>
-          <p:cNvSpPr>
-            <a:spLocks noGrp="1"/>
-          </p:cNvSpPr>
-          <p:nvPr>
-            <p:ph type="sldNum" idx="14"/>
+          <p:cNvPr id="35" name="PlaceHolder 3"/>
+          <p:cNvSpPr>
+            <a:spLocks noGrp="1"/>
+          </p:cNvSpPr>
+          <p:nvPr>
+            <p:ph type="dt" idx="14"/>
           </p:nvPr>
         </p:nvSpPr>
         <p:spPr>
           <a:xfrm>
-            <a:off x="8610480" y="6356520"/>
-            <a:ext cx="2742120" cy="363960"/>
+            <a:off x="838080" y="6356520"/>
+            <a:ext cx="2741760" cy="363600"/>
           </a:xfrm>
           <a:prstGeom prst="rect">
             <a:avLst/>
@@ -4905,88 +4974,6 @@
           </a:ln>
         </p:spPr>
         <p:txBody>
-          <a:bodyPr lIns="91440" rIns="91440" tIns="45720" bIns="45720" anchor="ctr">
-            <a:noAutofit/>
-          </a:bodyPr>
-          <a:lstStyle>
-            <a:lvl1pPr indent="0" algn="r" defTabSz="914400">
-              <a:lnSpc>
-                <a:spcPct val="100000"/>
-              </a:lnSpc>
-              <a:buNone/>
-              <a:tabLst>
-                <a:tab algn="l" pos="0"/>
-              </a:tabLst>
-              <a:defRPr b="0" lang="en-SE" sz="1200" strike="noStrike" u="none">
-                <a:solidFill>
-                  <a:schemeClr val="lt1">
-                    <a:tint val="82000"/>
-                  </a:schemeClr>
-                </a:solidFill>
-                <a:effectLst/>
-                <a:uFillTx/>
-                <a:latin typeface="Aptos"/>
-              </a:defRPr>
-            </a:lvl1pPr>
-          </a:lstStyle>
-          <a:p>
-            <a:pPr indent="0" algn="r" defTabSz="914400">
-              <a:lnSpc>
-                <a:spcPct val="100000"/>
-              </a:lnSpc>
-              <a:buNone/>
-              <a:tabLst>
-                <a:tab algn="l" pos="0"/>
-              </a:tabLst>
-            </a:pPr>
-            <a:fld id="{50FA23CB-9907-4636-A097-AE53ABFE51D6}" type="slidenum">
-              <a:rPr b="0" lang="en-SE" sz="1200" strike="noStrike" u="none">
-                <a:solidFill>
-                  <a:schemeClr val="lt1">
-                    <a:tint val="82000"/>
-                  </a:schemeClr>
-                </a:solidFill>
-                <a:effectLst/>
-                <a:uFillTx/>
-                <a:latin typeface="Aptos"/>
-              </a:rPr>
-              <a:t>1</a:t>
-            </a:fld>
-            <a:endParaRPr b="0" lang="sv-SE" sz="1200" strike="noStrike" u="none">
-              <a:solidFill>
-                <a:srgbClr val="ffffff"/>
-              </a:solidFill>
-              <a:effectLst/>
-              <a:uFillTx/>
-              <a:latin typeface="Times New Roman"/>
-            </a:endParaRPr>
-          </a:p>
-        </p:txBody>
-      </p:sp>
-      <p:sp>
-        <p:nvSpPr>
-          <p:cNvPr id="37" name="PlaceHolder 3"/>
-          <p:cNvSpPr>
-            <a:spLocks noGrp="1"/>
-          </p:cNvSpPr>
-          <p:nvPr>
-            <p:ph type="dt" idx="15"/>
-          </p:nvPr>
-        </p:nvSpPr>
-        <p:spPr>
-          <a:xfrm>
-            <a:off x="838080" y="6356520"/>
-            <a:ext cx="2742120" cy="363960"/>
-          </a:xfrm>
-          <a:prstGeom prst="rect">
-            <a:avLst/>
-          </a:prstGeom>
-          <a:noFill/>
-          <a:ln w="0">
-            <a:noFill/>
-          </a:ln>
-        </p:spPr>
-        <p:txBody>
           <a:bodyPr lIns="90000" rIns="90000" tIns="45000" bIns="45000" anchor="t">
             <a:noAutofit/>
           </a:bodyPr>
@@ -5031,7 +5018,7 @@
       </p:sp>
       <p:sp>
         <p:nvSpPr>
-          <p:cNvPr id="38" name="PlaceHolder 4"/>
+          <p:cNvPr id="36" name="PlaceHolder 4"/>
           <p:cNvSpPr>
             <a:spLocks noGrp="1"/>
           </p:cNvSpPr>
@@ -5084,7 +5071,7 @@
       </p:sp>
       <p:sp>
         <p:nvSpPr>
-          <p:cNvPr id="39" name="PlaceHolder 5"/>
+          <p:cNvPr id="37" name="PlaceHolder 5"/>
           <p:cNvSpPr>
             <a:spLocks noGrp="1"/>
           </p:cNvSpPr>
@@ -5339,7 +5326,660 @@
   </p:cSld>
   <p:clrMap bg1="lt1" tx1="dk1" bg2="lt2" tx2="dk2" accent1="accent1" accent2="accent2" accent3="accent3" accent4="accent4" accent5="accent5" accent6="accent6" hlink="hlink" folHlink="folHlink"/>
   <p:sldLayoutIdLst>
-    <p:sldLayoutId id="2147483657" r:id="rId5"/>
+    <p:sldLayoutId id="2147483656" r:id="rId4"/>
+  </p:sldLayoutIdLst>
+</p:sldMaster>
+</file>
+
+<file path=ppt/slideMasters/slideMaster6.xml><?xml version="1.0" encoding="utf-8"?>
+<p:sldMaster xmlns:a="http://schemas.openxmlformats.org/drawingml/2006/main" xmlns:p="http://schemas.openxmlformats.org/presentationml/2006/main" xmlns:r="http://schemas.openxmlformats.org/officeDocument/2006/relationships" xmlns:p14="http://schemas.microsoft.com/office/powerpoint/2010/main" xmlns:p15="http://schemas.microsoft.com/office/powerpoint/2012/main" xmlns:mc="http://schemas.openxmlformats.org/markup-compatibility/2006">
+  <p:cSld>
+    <p:bg>
+      <p:bgPr>
+        <a:gradFill rotWithShape="0">
+          <a:gsLst>
+            <a:gs pos="13000">
+              <a:srgbClr val="43454b"/>
+            </a:gs>
+            <a:gs pos="95000">
+              <a:srgbClr val="8e919a"/>
+            </a:gs>
+          </a:gsLst>
+          <a:lin ang="2700000"/>
+        </a:gradFill>
+      </p:bgPr>
+    </p:bg>
+    <p:spTree>
+      <p:nvGrpSpPr>
+        <p:cNvPr id="1" name=""/>
+        <p:cNvGrpSpPr/>
+        <p:nvPr/>
+      </p:nvGrpSpPr>
+      <p:grpSpPr>
+        <a:xfrm>
+          <a:off x="0" y="0"/>
+          <a:ext cx="0" cy="0"/>
+          <a:chOff x="0" y="0"/>
+          <a:chExt cx="0" cy="0"/>
+        </a:xfrm>
+      </p:grpSpPr>
+      <p:pic>
+        <p:nvPicPr>
+          <p:cNvPr id="38" name="Picture 11" descr=""/>
+          <p:cNvPicPr/>
+          <p:nvPr/>
+        </p:nvPicPr>
+        <p:blipFill>
+          <a:blip r:embed="rId2"/>
+          <a:stretch/>
+        </p:blipFill>
+        <p:spPr>
+          <a:xfrm>
+            <a:off x="779400" y="6289200"/>
+            <a:ext cx="1428840" cy="430560"/>
+          </a:xfrm>
+          <a:prstGeom prst="rect">
+            <a:avLst/>
+          </a:prstGeom>
+          <a:noFill/>
+          <a:ln w="0">
+            <a:noFill/>
+          </a:ln>
+        </p:spPr>
+      </p:pic>
+      <p:pic>
+        <p:nvPicPr>
+          <p:cNvPr id="39" name="Picture 3" descr=""/>
+          <p:cNvPicPr/>
+          <p:nvPr/>
+        </p:nvPicPr>
+        <p:blipFill>
+          <a:blip r:embed="rId3">
+            <a:alphaModFix amt="20000"/>
+          </a:blip>
+          <a:stretch/>
+        </p:blipFill>
+        <p:spPr>
+          <a:xfrm>
+            <a:off x="10184760" y="5404680"/>
+            <a:ext cx="1543320" cy="1543320"/>
+          </a:xfrm>
+          <a:prstGeom prst="rect">
+            <a:avLst/>
+          </a:prstGeom>
+          <a:noFill/>
+          <a:ln w="0">
+            <a:noFill/>
+          </a:ln>
+        </p:spPr>
+      </p:pic>
+      <p:pic>
+        <p:nvPicPr>
+          <p:cNvPr id="40" name="Picture 7" descr=""/>
+          <p:cNvPicPr/>
+          <p:nvPr/>
+        </p:nvPicPr>
+        <p:blipFill>
+          <a:blip r:embed="rId4">
+            <a:alphaModFix amt="70000"/>
+          </a:blip>
+          <a:stretch/>
+        </p:blipFill>
+        <p:spPr>
+          <a:xfrm>
+            <a:off x="5543280" y="457200"/>
+            <a:ext cx="5807520" cy="3440880"/>
+          </a:xfrm>
+          <a:prstGeom prst="rect">
+            <a:avLst/>
+          </a:prstGeom>
+          <a:noFill/>
+          <a:ln w="0">
+            <a:noFill/>
+          </a:ln>
+        </p:spPr>
+      </p:pic>
+      <p:sp>
+        <p:nvSpPr>
+          <p:cNvPr id="41" name="PlaceHolder 1"/>
+          <p:cNvSpPr>
+            <a:spLocks noGrp="1"/>
+          </p:cNvSpPr>
+          <p:nvPr>
+            <p:ph type="ftr" idx="15"/>
+          </p:nvPr>
+        </p:nvSpPr>
+        <p:spPr>
+          <a:xfrm>
+            <a:off x="4038480" y="6356520"/>
+            <a:ext cx="4113360" cy="363600"/>
+          </a:xfrm>
+          <a:prstGeom prst="rect">
+            <a:avLst/>
+          </a:prstGeom>
+          <a:noFill/>
+          <a:ln w="0">
+            <a:noFill/>
+          </a:ln>
+        </p:spPr>
+        <p:txBody>
+          <a:bodyPr lIns="91440" rIns="91440" tIns="45720" bIns="45720" anchor="ctr">
+            <a:noAutofit/>
+          </a:bodyPr>
+          <a:lstStyle>
+            <a:lvl1pPr indent="0" algn="ctr" defTabSz="914400">
+              <a:lnSpc>
+                <a:spcPct val="100000"/>
+              </a:lnSpc>
+              <a:buNone/>
+              <a:tabLst>
+                <a:tab algn="l" pos="0"/>
+              </a:tabLst>
+              <a:defRPr b="0" lang="sv-SE" sz="1200" strike="noStrike" u="none">
+                <a:solidFill>
+                  <a:schemeClr val="lt1">
+                    <a:tint val="82000"/>
+                  </a:schemeClr>
+                </a:solidFill>
+                <a:effectLst/>
+                <a:uFillTx/>
+                <a:latin typeface="Aptos"/>
+              </a:defRPr>
+            </a:lvl1pPr>
+          </a:lstStyle>
+          <a:p>
+            <a:pPr indent="0" algn="ctr" defTabSz="914400">
+              <a:lnSpc>
+                <a:spcPct val="100000"/>
+              </a:lnSpc>
+              <a:buNone/>
+              <a:tabLst>
+                <a:tab algn="l" pos="0"/>
+              </a:tabLst>
+            </a:pPr>
+            <a:r>
+              <a:rPr b="0" lang="sv-SE" sz="1200" strike="noStrike" u="none">
+                <a:solidFill>
+                  <a:schemeClr val="lt1">
+                    <a:tint val="82000"/>
+                  </a:schemeClr>
+                </a:solidFill>
+                <a:effectLst/>
+                <a:uFillTx/>
+                <a:latin typeface="Aptos"/>
+              </a:rPr>
+              <a:t> </a:t>
+            </a:r>
+            <a:endParaRPr b="0" lang="sv-SE" sz="1200" strike="noStrike" u="none">
+              <a:solidFill>
+                <a:srgbClr val="ffffff"/>
+              </a:solidFill>
+              <a:effectLst/>
+              <a:uFillTx/>
+              <a:latin typeface="Times New Roman"/>
+            </a:endParaRPr>
+          </a:p>
+        </p:txBody>
+      </p:sp>
+      <p:sp>
+        <p:nvSpPr>
+          <p:cNvPr id="42" name="PlaceHolder 2"/>
+          <p:cNvSpPr>
+            <a:spLocks noGrp="1"/>
+          </p:cNvSpPr>
+          <p:nvPr>
+            <p:ph type="sldNum" idx="16"/>
+          </p:nvPr>
+        </p:nvSpPr>
+        <p:spPr>
+          <a:xfrm>
+            <a:off x="8610480" y="6356520"/>
+            <a:ext cx="2741760" cy="363600"/>
+          </a:xfrm>
+          <a:prstGeom prst="rect">
+            <a:avLst/>
+          </a:prstGeom>
+          <a:noFill/>
+          <a:ln w="0">
+            <a:noFill/>
+          </a:ln>
+        </p:spPr>
+        <p:txBody>
+          <a:bodyPr lIns="91440" rIns="91440" tIns="45720" bIns="45720" anchor="ctr">
+            <a:noAutofit/>
+          </a:bodyPr>
+          <a:lstStyle>
+            <a:lvl1pPr indent="0" algn="r" defTabSz="914400">
+              <a:lnSpc>
+                <a:spcPct val="100000"/>
+              </a:lnSpc>
+              <a:buNone/>
+              <a:tabLst>
+                <a:tab algn="l" pos="0"/>
+              </a:tabLst>
+              <a:defRPr b="0" lang="en-SE" sz="1200" strike="noStrike" u="none">
+                <a:solidFill>
+                  <a:schemeClr val="lt1">
+                    <a:tint val="82000"/>
+                  </a:schemeClr>
+                </a:solidFill>
+                <a:effectLst/>
+                <a:uFillTx/>
+                <a:latin typeface="Aptos"/>
+              </a:defRPr>
+            </a:lvl1pPr>
+          </a:lstStyle>
+          <a:p>
+            <a:pPr indent="0" algn="r" defTabSz="914400">
+              <a:lnSpc>
+                <a:spcPct val="100000"/>
+              </a:lnSpc>
+              <a:buNone/>
+              <a:tabLst>
+                <a:tab algn="l" pos="0"/>
+              </a:tabLst>
+            </a:pPr>
+            <a:fld id="{9370896D-D3F2-4056-B2E8-8C9F37927243}" type="slidenum">
+              <a:rPr b="0" lang="en-SE" sz="1200" strike="noStrike" u="none">
+                <a:solidFill>
+                  <a:schemeClr val="lt1">
+                    <a:tint val="82000"/>
+                  </a:schemeClr>
+                </a:solidFill>
+                <a:effectLst/>
+                <a:uFillTx/>
+                <a:latin typeface="Aptos"/>
+              </a:rPr>
+              <a:t>1</a:t>
+            </a:fld>
+            <a:endParaRPr b="0" lang="sv-SE" sz="1200" strike="noStrike" u="none">
+              <a:solidFill>
+                <a:srgbClr val="ffffff"/>
+              </a:solidFill>
+              <a:effectLst/>
+              <a:uFillTx/>
+              <a:latin typeface="Times New Roman"/>
+            </a:endParaRPr>
+          </a:p>
+        </p:txBody>
+      </p:sp>
+      <p:sp>
+        <p:nvSpPr>
+          <p:cNvPr id="43" name="PlaceHolder 3"/>
+          <p:cNvSpPr>
+            <a:spLocks noGrp="1"/>
+          </p:cNvSpPr>
+          <p:nvPr>
+            <p:ph type="dt" idx="17"/>
+          </p:nvPr>
+        </p:nvSpPr>
+        <p:spPr>
+          <a:xfrm>
+            <a:off x="838080" y="6356520"/>
+            <a:ext cx="2741760" cy="363600"/>
+          </a:xfrm>
+          <a:prstGeom prst="rect">
+            <a:avLst/>
+          </a:prstGeom>
+          <a:noFill/>
+          <a:ln w="0">
+            <a:noFill/>
+          </a:ln>
+        </p:spPr>
+        <p:txBody>
+          <a:bodyPr lIns="90000" rIns="90000" tIns="45000" bIns="45000" anchor="t">
+            <a:noAutofit/>
+          </a:bodyPr>
+          <a:lstStyle>
+            <a:lvl1pPr indent="0">
+              <a:buNone/>
+              <a:defRPr b="0" lang="sv-SE" sz="1400" strike="noStrike" u="none">
+                <a:solidFill>
+                  <a:srgbClr val="ffffff"/>
+                </a:solidFill>
+                <a:effectLst/>
+                <a:uFillTx/>
+                <a:latin typeface="Times New Roman"/>
+              </a:defRPr>
+            </a:lvl1pPr>
+          </a:lstStyle>
+          <a:p>
+            <a:pPr indent="0">
+              <a:buNone/>
+            </a:pPr>
+            <a:r>
+              <a:rPr b="0" lang="sv-SE" sz="1400" strike="noStrike" u="none">
+                <a:solidFill>
+                  <a:srgbClr val="ffffff"/>
+                </a:solidFill>
+                <a:effectLst/>
+                <a:uFillTx/>
+                <a:latin typeface="Times New Roman"/>
+              </a:rPr>
+              <a:t> </a:t>
+            </a:r>
+            <a:endParaRPr b="0" lang="sv-SE" sz="1400" strike="noStrike" u="none">
+              <a:solidFill>
+                <a:srgbClr val="ffffff"/>
+              </a:solidFill>
+              <a:effectLst/>
+              <a:uFillTx/>
+              <a:latin typeface="Times New Roman"/>
+            </a:endParaRPr>
+          </a:p>
+        </p:txBody>
+      </p:sp>
+      <p:sp>
+        <p:nvSpPr>
+          <p:cNvPr id="44" name="PlaceHolder 4"/>
+          <p:cNvSpPr>
+            <a:spLocks noGrp="1"/>
+          </p:cNvSpPr>
+          <p:nvPr>
+            <p:ph type="title"/>
+          </p:nvPr>
+        </p:nvSpPr>
+        <p:spPr>
+          <a:xfrm>
+            <a:off x="609480" y="273600"/>
+            <a:ext cx="10972440" cy="1144800"/>
+          </a:xfrm>
+          <a:prstGeom prst="rect">
+            <a:avLst/>
+          </a:prstGeom>
+          <a:noFill/>
+          <a:ln w="0">
+            <a:noFill/>
+          </a:ln>
+        </p:spPr>
+        <p:txBody>
+          <a:bodyPr lIns="0" rIns="0" tIns="0" bIns="0" anchor="ctr">
+            <a:noAutofit/>
+          </a:bodyPr>
+          <a:p>
+            <a:pPr indent="0" algn="ctr">
+              <a:buNone/>
+            </a:pPr>
+            <a:r>
+              <a:rPr b="0" lang="sv-SE" sz="4400" strike="noStrike" u="none">
+                <a:solidFill>
+                  <a:srgbClr val="ffffff"/>
+                </a:solidFill>
+                <a:effectLst/>
+                <a:uFillTx/>
+                <a:latin typeface="Arial"/>
+              </a:rPr>
+              <a:t>Click to edit the title text format</a:t>
+            </a:r>
+            <a:endParaRPr b="0" lang="sv-SE" sz="4400" strike="noStrike" u="none">
+              <a:solidFill>
+                <a:srgbClr val="ffffff"/>
+              </a:solidFill>
+              <a:effectLst/>
+              <a:uFillTx/>
+              <a:latin typeface="Arial"/>
+            </a:endParaRPr>
+          </a:p>
+        </p:txBody>
+      </p:sp>
+      <p:sp>
+        <p:nvSpPr>
+          <p:cNvPr id="45" name="PlaceHolder 5"/>
+          <p:cNvSpPr>
+            <a:spLocks noGrp="1"/>
+          </p:cNvSpPr>
+          <p:nvPr>
+            <p:ph type="body"/>
+          </p:nvPr>
+        </p:nvSpPr>
+        <p:spPr>
+          <a:xfrm>
+            <a:off x="609480" y="1604520"/>
+            <a:ext cx="10972440" cy="3977280"/>
+          </a:xfrm>
+          <a:prstGeom prst="rect">
+            <a:avLst/>
+          </a:prstGeom>
+          <a:noFill/>
+          <a:ln w="0">
+            <a:noFill/>
+          </a:ln>
+        </p:spPr>
+        <p:txBody>
+          <a:bodyPr lIns="0" rIns="0" tIns="0" bIns="0" anchor="t">
+            <a:normAutofit/>
+          </a:bodyPr>
+          <a:p>
+            <a:pPr marL="432000" indent="-324000">
+              <a:spcBef>
+                <a:spcPts val="1417"/>
+              </a:spcBef>
+              <a:buClr>
+                <a:srgbClr val="ffffff"/>
+              </a:buClr>
+              <a:buSzPct val="45000"/>
+              <a:buFont typeface="Wingdings" charset="2"/>
+              <a:buChar char=""/>
+            </a:pPr>
+            <a:r>
+              <a:rPr b="0" lang="sv-SE" sz="3200" strike="noStrike" u="none">
+                <a:solidFill>
+                  <a:srgbClr val="ffffff"/>
+                </a:solidFill>
+                <a:effectLst/>
+                <a:uFillTx/>
+                <a:latin typeface="Arial"/>
+              </a:rPr>
+              <a:t>Click to edit the outline text format</a:t>
+            </a:r>
+            <a:endParaRPr b="0" lang="sv-SE" sz="3200" strike="noStrike" u="none">
+              <a:solidFill>
+                <a:srgbClr val="ffffff"/>
+              </a:solidFill>
+              <a:effectLst/>
+              <a:uFillTx/>
+              <a:latin typeface="Arial"/>
+            </a:endParaRPr>
+          </a:p>
+          <a:p>
+            <a:pPr lvl="1" marL="864000" indent="-324000">
+              <a:spcBef>
+                <a:spcPts val="1134"/>
+              </a:spcBef>
+              <a:buClr>
+                <a:srgbClr val="ffffff"/>
+              </a:buClr>
+              <a:buSzPct val="75000"/>
+              <a:buFont typeface="Symbol" charset="2"/>
+              <a:buChar char=""/>
+            </a:pPr>
+            <a:r>
+              <a:rPr b="0" lang="sv-SE" sz="2800" strike="noStrike" u="none">
+                <a:solidFill>
+                  <a:srgbClr val="ffffff"/>
+                </a:solidFill>
+                <a:effectLst/>
+                <a:uFillTx/>
+                <a:latin typeface="Arial"/>
+              </a:rPr>
+              <a:t>Second Outline Level</a:t>
+            </a:r>
+            <a:endParaRPr b="0" lang="sv-SE" sz="2800" strike="noStrike" u="none">
+              <a:solidFill>
+                <a:srgbClr val="ffffff"/>
+              </a:solidFill>
+              <a:effectLst/>
+              <a:uFillTx/>
+              <a:latin typeface="Arial"/>
+            </a:endParaRPr>
+          </a:p>
+          <a:p>
+            <a:pPr lvl="2" marL="1296000" indent="-288000">
+              <a:spcBef>
+                <a:spcPts val="850"/>
+              </a:spcBef>
+              <a:buClr>
+                <a:srgbClr val="ffffff"/>
+              </a:buClr>
+              <a:buSzPct val="45000"/>
+              <a:buFont typeface="Wingdings" charset="2"/>
+              <a:buChar char=""/>
+            </a:pPr>
+            <a:r>
+              <a:rPr b="0" lang="sv-SE" sz="2400" strike="noStrike" u="none">
+                <a:solidFill>
+                  <a:srgbClr val="ffffff"/>
+                </a:solidFill>
+                <a:effectLst/>
+                <a:uFillTx/>
+                <a:latin typeface="Arial"/>
+              </a:rPr>
+              <a:t>Third Outline Level</a:t>
+            </a:r>
+            <a:endParaRPr b="0" lang="sv-SE" sz="2400" strike="noStrike" u="none">
+              <a:solidFill>
+                <a:srgbClr val="ffffff"/>
+              </a:solidFill>
+              <a:effectLst/>
+              <a:uFillTx/>
+              <a:latin typeface="Arial"/>
+            </a:endParaRPr>
+          </a:p>
+          <a:p>
+            <a:pPr lvl="3" marL="1728000" indent="-216000">
+              <a:spcBef>
+                <a:spcPts val="567"/>
+              </a:spcBef>
+              <a:buClr>
+                <a:srgbClr val="ffffff"/>
+              </a:buClr>
+              <a:buSzPct val="75000"/>
+              <a:buFont typeface="Symbol" charset="2"/>
+              <a:buChar char=""/>
+            </a:pPr>
+            <a:r>
+              <a:rPr b="0" lang="sv-SE" sz="2000" strike="noStrike" u="none">
+                <a:solidFill>
+                  <a:srgbClr val="ffffff"/>
+                </a:solidFill>
+                <a:effectLst/>
+                <a:uFillTx/>
+                <a:latin typeface="Arial"/>
+              </a:rPr>
+              <a:t>Fourth Outline Level</a:t>
+            </a:r>
+            <a:endParaRPr b="0" lang="sv-SE" sz="2000" strike="noStrike" u="none">
+              <a:solidFill>
+                <a:srgbClr val="ffffff"/>
+              </a:solidFill>
+              <a:effectLst/>
+              <a:uFillTx/>
+              <a:latin typeface="Arial"/>
+            </a:endParaRPr>
+          </a:p>
+          <a:p>
+            <a:pPr lvl="4" marL="2160000" indent="-216000">
+              <a:spcBef>
+                <a:spcPts val="283"/>
+              </a:spcBef>
+              <a:buClr>
+                <a:srgbClr val="ffffff"/>
+              </a:buClr>
+              <a:buSzPct val="45000"/>
+              <a:buFont typeface="Wingdings" charset="2"/>
+              <a:buChar char=""/>
+            </a:pPr>
+            <a:r>
+              <a:rPr b="0" lang="sv-SE" sz="2000" strike="noStrike" u="none">
+                <a:solidFill>
+                  <a:srgbClr val="ffffff"/>
+                </a:solidFill>
+                <a:effectLst/>
+                <a:uFillTx/>
+                <a:latin typeface="Arial"/>
+              </a:rPr>
+              <a:t>Fifth Outline Level</a:t>
+            </a:r>
+            <a:endParaRPr b="0" lang="sv-SE" sz="2000" strike="noStrike" u="none">
+              <a:solidFill>
+                <a:srgbClr val="ffffff"/>
+              </a:solidFill>
+              <a:effectLst/>
+              <a:uFillTx/>
+              <a:latin typeface="Arial"/>
+            </a:endParaRPr>
+          </a:p>
+          <a:p>
+            <a:pPr lvl="5" marL="2592000" indent="-216000">
+              <a:spcBef>
+                <a:spcPts val="283"/>
+              </a:spcBef>
+              <a:buClr>
+                <a:srgbClr val="ffffff"/>
+              </a:buClr>
+              <a:buSzPct val="45000"/>
+              <a:buFont typeface="Wingdings" charset="2"/>
+              <a:buChar char=""/>
+            </a:pPr>
+            <a:r>
+              <a:rPr b="0" lang="sv-SE" sz="2000" strike="noStrike" u="none">
+                <a:solidFill>
+                  <a:srgbClr val="ffffff"/>
+                </a:solidFill>
+                <a:effectLst/>
+                <a:uFillTx/>
+                <a:latin typeface="Arial"/>
+              </a:rPr>
+              <a:t>Sixth Outline Level</a:t>
+            </a:r>
+            <a:endParaRPr b="0" lang="sv-SE" sz="2000" strike="noStrike" u="none">
+              <a:solidFill>
+                <a:srgbClr val="ffffff"/>
+              </a:solidFill>
+              <a:effectLst/>
+              <a:uFillTx/>
+              <a:latin typeface="Arial"/>
+            </a:endParaRPr>
+          </a:p>
+          <a:p>
+            <a:pPr lvl="6" marL="3024000" indent="-216000">
+              <a:spcBef>
+                <a:spcPts val="283"/>
+              </a:spcBef>
+              <a:buClr>
+                <a:srgbClr val="ffffff"/>
+              </a:buClr>
+              <a:buSzPct val="45000"/>
+              <a:buFont typeface="Wingdings" charset="2"/>
+              <a:buChar char=""/>
+            </a:pPr>
+            <a:r>
+              <a:rPr b="0" lang="sv-SE" sz="2000" strike="noStrike" u="none">
+                <a:solidFill>
+                  <a:srgbClr val="ffffff"/>
+                </a:solidFill>
+                <a:effectLst/>
+                <a:uFillTx/>
+                <a:latin typeface="Arial"/>
+              </a:rPr>
+              <a:t>Seventh Outline Level</a:t>
+            </a:r>
+            <a:endParaRPr b="0" lang="sv-SE" sz="2000" strike="noStrike" u="none">
+              <a:solidFill>
+                <a:srgbClr val="ffffff"/>
+              </a:solidFill>
+              <a:effectLst/>
+              <a:uFillTx/>
+              <a:latin typeface="Arial"/>
+            </a:endParaRPr>
+          </a:p>
+        </p:txBody>
+      </p:sp>
+    </p:spTree>
+  </p:cSld>
+  <p:clrMap bg1="lt1" tx1="dk1" bg2="lt2" tx2="dk2" accent1="accent1" accent2="accent2" accent3="accent3" accent4="accent4" accent5="accent5" accent6="accent6" hlink="hlink" folHlink="folHlink"/>
+  <p:sldLayoutIdLst>
+    <p:sldLayoutId id="2147483658" r:id="rId5"/>
   </p:sldLayoutIdLst>
 </p:sldMaster>
 </file>
@@ -5363,7 +6003,7 @@
       </p:grpSpPr>
       <p:sp>
         <p:nvSpPr>
-          <p:cNvPr id="46" name="PlaceHolder 1"/>
+          <p:cNvPr id="52" name="PlaceHolder 1"/>
           <p:cNvSpPr>
             <a:spLocks noGrp="1"/>
           </p:cNvSpPr>
@@ -5374,7 +6014,7 @@
         <p:spPr>
           <a:xfrm>
             <a:off x="1523880" y="1122480"/>
-            <a:ext cx="9142920" cy="2386440"/>
+            <a:ext cx="9142560" cy="2386080"/>
           </a:xfrm>
           <a:prstGeom prst="rect">
             <a:avLst/>
@@ -5422,7 +6062,7 @@
       </p:sp>
       <p:sp>
         <p:nvSpPr>
-          <p:cNvPr id="47" name="PlaceHolder 2"/>
+          <p:cNvPr id="53" name="PlaceHolder 2"/>
           <p:cNvSpPr>
             <a:spLocks noGrp="1"/>
           </p:cNvSpPr>
@@ -5433,7 +6073,7 @@
         <p:spPr>
           <a:xfrm>
             <a:off x="1523880" y="3602160"/>
-            <a:ext cx="9142920" cy="1654560"/>
+            <a:ext cx="9142560" cy="1654200"/>
           </a:xfrm>
           <a:prstGeom prst="rect">
             <a:avLst/>
@@ -5494,7 +6134,7 @@
       </p:grpSpPr>
       <p:sp>
         <p:nvSpPr>
-          <p:cNvPr id="64" name="PlaceHolder 1"/>
+          <p:cNvPr id="70" name="PlaceHolder 1"/>
           <p:cNvSpPr>
             <a:spLocks noGrp="1"/>
           </p:cNvSpPr>
@@ -5505,7 +6145,7 @@
         <p:spPr>
           <a:xfrm>
             <a:off x="831960" y="1709640"/>
-            <a:ext cx="10514520" cy="2851560"/>
+            <a:ext cx="10514160" cy="2851200"/>
           </a:xfrm>
           <a:prstGeom prst="rect">
             <a:avLst/>
@@ -5553,7 +6193,7 @@
       </p:sp>
       <p:sp>
         <p:nvSpPr>
-          <p:cNvPr id="65" name="PlaceHolder 2"/>
+          <p:cNvPr id="71" name="PlaceHolder 2"/>
           <p:cNvSpPr>
             <a:spLocks noGrp="1"/>
           </p:cNvSpPr>
@@ -5564,7 +6204,7 @@
         <p:spPr>
           <a:xfrm>
             <a:off x="831960" y="4589640"/>
-            <a:ext cx="10514520" cy="1499040"/>
+            <a:ext cx="10514160" cy="1498680"/>
           </a:xfrm>
           <a:prstGeom prst="rect">
             <a:avLst/>
@@ -5603,7 +6243,7 @@
             <a:spLocks noGrp="1"/>
           </p:cNvSpPr>
           <p:nvPr>
-            <p:ph type="ftr" idx="10"/>
+            <p:ph type="ftr" idx="12"/>
           </p:nvPr>
         </p:nvSpPr>
         <p:spPr/>
@@ -5623,14 +6263,14 @@
             <a:spLocks noGrp="1"/>
           </p:cNvSpPr>
           <p:nvPr>
-            <p:ph type="sldNum" idx="11"/>
+            <p:ph type="sldNum" idx="13"/>
           </p:nvPr>
         </p:nvSpPr>
         <p:spPr/>
         <p:txBody>
           <a:bodyPr/>
           <a:p>
-            <a:fld id="{9659E083-52EA-4F7B-9DDE-E36C5E1D306B}" type="slidenum">
+            <a:fld id="{D63A9A8C-876F-4C47-9882-1DC99E5F16BA}" type="slidenum">
               <a:t>10</a:t>
             </a:fld>
           </a:p>
@@ -5668,7 +6308,7 @@
       </p:grpSpPr>
       <p:sp>
         <p:nvSpPr>
-          <p:cNvPr id="66" name="PlaceHolder 1"/>
+          <p:cNvPr id="72" name="PlaceHolder 1"/>
           <p:cNvSpPr>
             <a:spLocks noGrp="1"/>
           </p:cNvSpPr>
@@ -5679,7 +6319,7 @@
         <p:spPr>
           <a:xfrm>
             <a:off x="838080" y="365040"/>
-            <a:ext cx="10514520" cy="1324440"/>
+            <a:ext cx="10514160" cy="1324080"/>
           </a:xfrm>
           <a:prstGeom prst="rect">
             <a:avLst/>
@@ -5727,7 +6367,7 @@
       </p:sp>
       <p:sp>
         <p:nvSpPr>
-          <p:cNvPr id="67" name="PlaceHolder 2"/>
+          <p:cNvPr id="73" name="PlaceHolder 2"/>
           <p:cNvSpPr>
             <a:spLocks noGrp="1"/>
           </p:cNvSpPr>
@@ -5738,7 +6378,7 @@
         <p:spPr>
           <a:xfrm>
             <a:off x="838080" y="1825560"/>
-            <a:ext cx="10514520" cy="4350240"/>
+            <a:ext cx="10514160" cy="4349880"/>
           </a:xfrm>
           <a:prstGeom prst="rect">
             <a:avLst/>
@@ -6101,7 +6741,7 @@
             <a:spLocks noGrp="1"/>
           </p:cNvSpPr>
           <p:nvPr>
-            <p:ph type="ftr" idx="7"/>
+            <p:ph type="ftr" idx="9"/>
           </p:nvPr>
         </p:nvSpPr>
         <p:spPr/>
@@ -6121,14 +6761,14 @@
             <a:spLocks noGrp="1"/>
           </p:cNvSpPr>
           <p:nvPr>
-            <p:ph type="sldNum" idx="8"/>
+            <p:ph type="sldNum" idx="10"/>
           </p:nvPr>
         </p:nvSpPr>
         <p:spPr/>
         <p:txBody>
           <a:bodyPr/>
           <a:p>
-            <a:fld id="{CD4CC7A0-BB47-49E6-A298-B84CE44C1303}" type="slidenum">
+            <a:fld id="{3BE6C524-C196-4A5A-9C78-46D3413E9387}" type="slidenum">
               <a:t>11</a:t>
             </a:fld>
           </a:p>
@@ -6166,7 +6806,7 @@
       </p:grpSpPr>
       <p:sp>
         <p:nvSpPr>
-          <p:cNvPr id="68" name="PlaceHolder 1"/>
+          <p:cNvPr id="74" name="PlaceHolder 1"/>
           <p:cNvSpPr>
             <a:spLocks noGrp="1"/>
           </p:cNvSpPr>
@@ -6177,7 +6817,7 @@
         <p:spPr>
           <a:xfrm>
             <a:off x="838080" y="365040"/>
-            <a:ext cx="10514520" cy="1324440"/>
+            <a:ext cx="10514160" cy="1324080"/>
           </a:xfrm>
           <a:prstGeom prst="rect">
             <a:avLst/>
@@ -6225,7 +6865,7 @@
       </p:sp>
       <p:sp>
         <p:nvSpPr>
-          <p:cNvPr id="69" name="PlaceHolder 2"/>
+          <p:cNvPr id="75" name="PlaceHolder 2"/>
           <p:cNvSpPr>
             <a:spLocks noGrp="1"/>
           </p:cNvSpPr>
@@ -6236,7 +6876,7 @@
         <p:spPr>
           <a:xfrm>
             <a:off x="838080" y="1825560"/>
-            <a:ext cx="10514520" cy="4350240"/>
+            <a:ext cx="10514160" cy="4349880"/>
           </a:xfrm>
           <a:prstGeom prst="rect">
             <a:avLst/>
@@ -6417,7 +7057,7 @@
             <a:spLocks noGrp="1"/>
           </p:cNvSpPr>
           <p:nvPr>
-            <p:ph type="ftr" idx="7"/>
+            <p:ph type="ftr" idx="9"/>
           </p:nvPr>
         </p:nvSpPr>
         <p:spPr/>
@@ -6437,14 +7077,14 @@
             <a:spLocks noGrp="1"/>
           </p:cNvSpPr>
           <p:nvPr>
-            <p:ph type="sldNum" idx="8"/>
+            <p:ph type="sldNum" idx="10"/>
           </p:nvPr>
         </p:nvSpPr>
         <p:spPr/>
         <p:txBody>
           <a:bodyPr/>
           <a:p>
-            <a:fld id="{19121A24-7AF2-44C9-8514-3FA1F93EB5B0}" type="slidenum">
+            <a:fld id="{989023D0-AF77-4B78-96A0-FD0DED5F5296}" type="slidenum">
               <a:t>12</a:t>
             </a:fld>
           </a:p>
@@ -6482,7 +7122,7 @@
       </p:grpSpPr>
       <p:sp>
         <p:nvSpPr>
-          <p:cNvPr id="70" name="PlaceHolder 1"/>
+          <p:cNvPr id="76" name="PlaceHolder 1"/>
           <p:cNvSpPr>
             <a:spLocks noGrp="1"/>
           </p:cNvSpPr>
@@ -6493,7 +7133,7 @@
         <p:spPr>
           <a:xfrm>
             <a:off x="838080" y="365040"/>
-            <a:ext cx="10514520" cy="1324440"/>
+            <a:ext cx="10514160" cy="1324080"/>
           </a:xfrm>
           <a:prstGeom prst="rect">
             <a:avLst/>
@@ -6541,7 +7181,7 @@
       </p:sp>
       <p:sp>
         <p:nvSpPr>
-          <p:cNvPr id="71" name="PlaceHolder 2"/>
+          <p:cNvPr id="77" name="PlaceHolder 2"/>
           <p:cNvSpPr>
             <a:spLocks noGrp="1"/>
           </p:cNvSpPr>
@@ -6552,7 +7192,7 @@
         <p:spPr>
           <a:xfrm>
             <a:off x="838080" y="1825560"/>
-            <a:ext cx="10514520" cy="4350240"/>
+            <a:ext cx="10514160" cy="4349880"/>
           </a:xfrm>
           <a:prstGeom prst="rect">
             <a:avLst/>
@@ -6801,7 +7441,7 @@
             <a:spLocks noGrp="1"/>
           </p:cNvSpPr>
           <p:nvPr>
-            <p:ph type="ftr" idx="7"/>
+            <p:ph type="ftr" idx="9"/>
           </p:nvPr>
         </p:nvSpPr>
         <p:spPr/>
@@ -6821,14 +7461,14 @@
             <a:spLocks noGrp="1"/>
           </p:cNvSpPr>
           <p:nvPr>
-            <p:ph type="sldNum" idx="8"/>
+            <p:ph type="sldNum" idx="10"/>
           </p:nvPr>
         </p:nvSpPr>
         <p:spPr/>
         <p:txBody>
           <a:bodyPr/>
           <a:p>
-            <a:fld id="{732A5E49-4BEA-4209-84EC-E1F99EBD97D0}" type="slidenum">
+            <a:fld id="{303D2B86-06D2-496E-977F-077AFC79D917}" type="slidenum">
               <a:t>13</a:t>
             </a:fld>
           </a:p>
@@ -6866,7 +7506,7 @@
       </p:grpSpPr>
       <p:sp>
         <p:nvSpPr>
-          <p:cNvPr id="72" name="PlaceHolder 1"/>
+          <p:cNvPr id="78" name="PlaceHolder 1"/>
           <p:cNvSpPr>
             <a:spLocks noGrp="1"/>
           </p:cNvSpPr>
@@ -6877,7 +7517,7 @@
         <p:spPr>
           <a:xfrm>
             <a:off x="838080" y="365040"/>
-            <a:ext cx="10514520" cy="1324440"/>
+            <a:ext cx="10514160" cy="1324080"/>
           </a:xfrm>
           <a:prstGeom prst="rect">
             <a:avLst/>
@@ -6925,7 +7565,7 @@
       </p:sp>
       <p:sp>
         <p:nvSpPr>
-          <p:cNvPr id="73" name="PlaceHolder 2"/>
+          <p:cNvPr id="79" name="PlaceHolder 2"/>
           <p:cNvSpPr>
             <a:spLocks noGrp="1"/>
           </p:cNvSpPr>
@@ -6936,7 +7576,7 @@
         <p:spPr>
           <a:xfrm>
             <a:off x="838080" y="1825560"/>
-            <a:ext cx="10514520" cy="4350240"/>
+            <a:ext cx="10514160" cy="4349880"/>
           </a:xfrm>
           <a:prstGeom prst="rect">
             <a:avLst/>
@@ -7525,7 +8165,7 @@
             <a:spLocks noGrp="1"/>
           </p:cNvSpPr>
           <p:nvPr>
-            <p:ph type="ftr" idx="7"/>
+            <p:ph type="ftr" idx="9"/>
           </p:nvPr>
         </p:nvSpPr>
         <p:spPr/>
@@ -7545,14 +8185,14 @@
             <a:spLocks noGrp="1"/>
           </p:cNvSpPr>
           <p:nvPr>
-            <p:ph type="sldNum" idx="8"/>
+            <p:ph type="sldNum" idx="10"/>
           </p:nvPr>
         </p:nvSpPr>
         <p:spPr/>
         <p:txBody>
           <a:bodyPr/>
           <a:p>
-            <a:fld id="{24775559-4312-4D92-895B-8C6EE6D8283F}" type="slidenum">
+            <a:fld id="{083470B9-9CA6-4A92-AB37-F64345D42064}" type="slidenum">
               <a:t>14</a:t>
             </a:fld>
           </a:p>
@@ -7590,7 +8230,7 @@
       </p:grpSpPr>
       <p:sp>
         <p:nvSpPr>
-          <p:cNvPr id="74" name="PlaceHolder 1"/>
+          <p:cNvPr id="80" name="PlaceHolder 1"/>
           <p:cNvSpPr>
             <a:spLocks noGrp="1"/>
           </p:cNvSpPr>
@@ -7601,7 +8241,7 @@
         <p:spPr>
           <a:xfrm>
             <a:off x="838080" y="365040"/>
-            <a:ext cx="10514520" cy="1324440"/>
+            <a:ext cx="10514160" cy="1324080"/>
           </a:xfrm>
           <a:prstGeom prst="rect">
             <a:avLst/>
@@ -7649,7 +8289,7 @@
       </p:sp>
       <p:sp>
         <p:nvSpPr>
-          <p:cNvPr id="75" name="PlaceHolder 2"/>
+          <p:cNvPr id="81" name="PlaceHolder 2"/>
           <p:cNvSpPr>
             <a:spLocks noGrp="1"/>
           </p:cNvSpPr>
@@ -7660,7 +8300,7 @@
         <p:spPr>
           <a:xfrm>
             <a:off x="838080" y="1825560"/>
-            <a:ext cx="10514520" cy="4350240"/>
+            <a:ext cx="10514160" cy="4349880"/>
           </a:xfrm>
           <a:prstGeom prst="rect">
             <a:avLst/>
@@ -8045,7 +8685,7 @@
             <a:spLocks noGrp="1"/>
           </p:cNvSpPr>
           <p:nvPr>
-            <p:ph type="ftr" idx="7"/>
+            <p:ph type="ftr" idx="9"/>
           </p:nvPr>
         </p:nvSpPr>
         <p:spPr/>
@@ -8065,14 +8705,14 @@
             <a:spLocks noGrp="1"/>
           </p:cNvSpPr>
           <p:nvPr>
-            <p:ph type="sldNum" idx="8"/>
+            <p:ph type="sldNum" idx="10"/>
           </p:nvPr>
         </p:nvSpPr>
         <p:spPr/>
         <p:txBody>
           <a:bodyPr/>
           <a:p>
-            <a:fld id="{8AF07156-637F-4DE8-A65D-08C3C36C4814}" type="slidenum">
+            <a:fld id="{B372F089-FEEA-4AD6-8365-AFAB1D60CF74}" type="slidenum">
               <a:t>15</a:t>
             </a:fld>
           </a:p>
@@ -8110,7 +8750,7 @@
       </p:grpSpPr>
       <p:sp>
         <p:nvSpPr>
-          <p:cNvPr id="76" name="PlaceHolder 1"/>
+          <p:cNvPr id="82" name="PlaceHolder 1"/>
           <p:cNvSpPr>
             <a:spLocks noGrp="1"/>
           </p:cNvSpPr>
@@ -8121,7 +8761,7 @@
         <p:spPr>
           <a:xfrm>
             <a:off x="838080" y="365040"/>
-            <a:ext cx="10514520" cy="1324440"/>
+            <a:ext cx="10514160" cy="1324080"/>
           </a:xfrm>
           <a:prstGeom prst="rect">
             <a:avLst/>
@@ -8169,7 +8809,7 @@
       </p:sp>
       <p:sp>
         <p:nvSpPr>
-          <p:cNvPr id="77" name="PlaceHolder 2"/>
+          <p:cNvPr id="83" name="PlaceHolder 2"/>
           <p:cNvSpPr>
             <a:spLocks noGrp="1"/>
           </p:cNvSpPr>
@@ -8180,7 +8820,7 @@
         <p:spPr>
           <a:xfrm>
             <a:off x="838080" y="1825560"/>
-            <a:ext cx="10514520" cy="4350240"/>
+            <a:ext cx="10514160" cy="4349880"/>
           </a:xfrm>
           <a:prstGeom prst="rect">
             <a:avLst/>
@@ -8407,7 +9047,7 @@
             <a:spLocks noGrp="1"/>
           </p:cNvSpPr>
           <p:nvPr>
-            <p:ph type="ftr" idx="7"/>
+            <p:ph type="ftr" idx="9"/>
           </p:nvPr>
         </p:nvSpPr>
         <p:spPr/>
@@ -8427,14 +9067,14 @@
             <a:spLocks noGrp="1"/>
           </p:cNvSpPr>
           <p:nvPr>
-            <p:ph type="sldNum" idx="8"/>
+            <p:ph type="sldNum" idx="10"/>
           </p:nvPr>
         </p:nvSpPr>
         <p:spPr/>
         <p:txBody>
           <a:bodyPr/>
           <a:p>
-            <a:fld id="{F5B08A22-8FFF-4C6F-8352-9C8C982FF52F}" type="slidenum">
+            <a:fld id="{B40D3212-DFA8-4603-8774-275B97675E28}" type="slidenum">
               <a:t>16</a:t>
             </a:fld>
           </a:p>
@@ -8472,7 +9112,7 @@
       </p:grpSpPr>
       <p:sp>
         <p:nvSpPr>
-          <p:cNvPr id="78" name="PlaceHolder 1"/>
+          <p:cNvPr id="84" name="PlaceHolder 1"/>
           <p:cNvSpPr>
             <a:spLocks noGrp="1"/>
           </p:cNvSpPr>
@@ -8483,7 +9123,7 @@
         <p:spPr>
           <a:xfrm>
             <a:off x="839880" y="457200"/>
-            <a:ext cx="3931200" cy="1599120"/>
+            <a:ext cx="3930840" cy="1598760"/>
           </a:xfrm>
           <a:prstGeom prst="rect">
             <a:avLst/>
@@ -8531,7 +9171,7 @@
       </p:sp>
       <p:sp>
         <p:nvSpPr>
-          <p:cNvPr id="79" name="PlaceHolder 2"/>
+          <p:cNvPr id="85" name="PlaceHolder 2"/>
           <p:cNvSpPr>
             <a:spLocks noGrp="1"/>
           </p:cNvSpPr>
@@ -8542,7 +9182,7 @@
         <p:spPr>
           <a:xfrm>
             <a:off x="839880" y="2057400"/>
-            <a:ext cx="10875960" cy="3810600"/>
+            <a:ext cx="10875600" cy="3810240"/>
           </a:xfrm>
           <a:prstGeom prst="rect">
             <a:avLst/>
@@ -8789,7 +9429,7 @@
             <a:spLocks noGrp="1"/>
           </p:cNvSpPr>
           <p:nvPr>
-            <p:ph type="ftr" idx="13"/>
+            <p:ph type="ftr" idx="15"/>
           </p:nvPr>
         </p:nvSpPr>
         <p:spPr/>
@@ -8809,14 +9449,14 @@
             <a:spLocks noGrp="1"/>
           </p:cNvSpPr>
           <p:nvPr>
-            <p:ph type="sldNum" idx="14"/>
+            <p:ph type="sldNum" idx="16"/>
           </p:nvPr>
         </p:nvSpPr>
         <p:spPr/>
         <p:txBody>
           <a:bodyPr/>
           <a:p>
-            <a:fld id="{8C12F05E-77A4-4637-8A0F-63598CED8C98}" type="slidenum">
+            <a:fld id="{A645FFD3-D116-477E-A763-5C6FECB8008A}" type="slidenum">
               <a:t>17</a:t>
             </a:fld>
           </a:p>
@@ -8854,7 +9494,7 @@
       </p:grpSpPr>
       <p:sp>
         <p:nvSpPr>
-          <p:cNvPr id="80" name="PlaceHolder 1"/>
+          <p:cNvPr id="86" name="PlaceHolder 1"/>
           <p:cNvSpPr>
             <a:spLocks noGrp="1"/>
           </p:cNvSpPr>
@@ -8865,7 +9505,7 @@
         <p:spPr>
           <a:xfrm>
             <a:off x="831960" y="1709640"/>
-            <a:ext cx="10514520" cy="2851560"/>
+            <a:ext cx="10514160" cy="2851200"/>
           </a:xfrm>
           <a:prstGeom prst="rect">
             <a:avLst/>
@@ -8913,7 +9553,7 @@
       </p:sp>
       <p:sp>
         <p:nvSpPr>
-          <p:cNvPr id="81" name="PlaceHolder 2"/>
+          <p:cNvPr id="87" name="PlaceHolder 2"/>
           <p:cNvSpPr>
             <a:spLocks noGrp="1"/>
           </p:cNvSpPr>
@@ -8924,7 +9564,7 @@
         <p:spPr>
           <a:xfrm>
             <a:off x="831960" y="4589640"/>
-            <a:ext cx="10514520" cy="1499040"/>
+            <a:ext cx="10514160" cy="1498680"/>
           </a:xfrm>
           <a:prstGeom prst="rect">
             <a:avLst/>
@@ -8963,7 +9603,7 @@
             <a:spLocks noGrp="1"/>
           </p:cNvSpPr>
           <p:nvPr>
-            <p:ph type="ftr" idx="10"/>
+            <p:ph type="ftr" idx="12"/>
           </p:nvPr>
         </p:nvSpPr>
         <p:spPr/>
@@ -8983,14 +9623,14 @@
             <a:spLocks noGrp="1"/>
           </p:cNvSpPr>
           <p:nvPr>
-            <p:ph type="sldNum" idx="11"/>
+            <p:ph type="sldNum" idx="13"/>
           </p:nvPr>
         </p:nvSpPr>
         <p:spPr/>
         <p:txBody>
           <a:bodyPr/>
           <a:p>
-            <a:fld id="{4C1E6926-FED0-4BC0-8244-2A24853AA44E}" type="slidenum">
+            <a:fld id="{EB270DA8-541E-4370-8D24-8497B38A9E9D}" type="slidenum">
               <a:t>18</a:t>
             </a:fld>
           </a:p>
@@ -9028,7 +9668,7 @@
       </p:grpSpPr>
       <p:sp>
         <p:nvSpPr>
-          <p:cNvPr id="82" name="PlaceHolder 1"/>
+          <p:cNvPr id="88" name="PlaceHolder 1"/>
           <p:cNvSpPr>
             <a:spLocks noGrp="1"/>
           </p:cNvSpPr>
@@ -9039,7 +9679,7 @@
         <p:spPr>
           <a:xfrm>
             <a:off x="838080" y="365040"/>
-            <a:ext cx="10514520" cy="1324440"/>
+            <a:ext cx="10514160" cy="1324080"/>
           </a:xfrm>
           <a:prstGeom prst="rect">
             <a:avLst/>
@@ -9087,7 +9727,7 @@
       </p:sp>
       <p:sp>
         <p:nvSpPr>
-          <p:cNvPr id="83" name="PlaceHolder 2"/>
+          <p:cNvPr id="89" name="PlaceHolder 2"/>
           <p:cNvSpPr>
             <a:spLocks noGrp="1"/>
           </p:cNvSpPr>
@@ -9098,7 +9738,7 @@
         <p:spPr>
           <a:xfrm>
             <a:off x="838080" y="1825560"/>
-            <a:ext cx="10514520" cy="4350240"/>
+            <a:ext cx="10514160" cy="4349880"/>
           </a:xfrm>
           <a:prstGeom prst="rect">
             <a:avLst/>
@@ -9313,7 +9953,7 @@
             <a:spLocks noGrp="1"/>
           </p:cNvSpPr>
           <p:nvPr>
-            <p:ph type="ftr" idx="7"/>
+            <p:ph type="ftr" idx="9"/>
           </p:nvPr>
         </p:nvSpPr>
         <p:spPr/>
@@ -9333,14 +9973,14 @@
             <a:spLocks noGrp="1"/>
           </p:cNvSpPr>
           <p:nvPr>
-            <p:ph type="sldNum" idx="8"/>
+            <p:ph type="sldNum" idx="10"/>
           </p:nvPr>
         </p:nvSpPr>
         <p:spPr/>
         <p:txBody>
           <a:bodyPr/>
           <a:p>
-            <a:fld id="{A85A5044-A590-4BBE-A738-4BE3FD7E482A}" type="slidenum">
+            <a:fld id="{959524A9-56B2-4542-AA19-FD6FB24E9FE1}" type="slidenum">
               <a:t>19</a:t>
             </a:fld>
           </a:p>
@@ -9378,7 +10018,7 @@
       </p:grpSpPr>
       <p:sp>
         <p:nvSpPr>
-          <p:cNvPr id="48" name="PlaceHolder 1"/>
+          <p:cNvPr id="54" name="PlaceHolder 1"/>
           <p:cNvSpPr>
             <a:spLocks noGrp="1"/>
           </p:cNvSpPr>
@@ -9389,7 +10029,7 @@
         <p:spPr>
           <a:xfrm>
             <a:off x="831960" y="1709640"/>
-            <a:ext cx="10514520" cy="2851560"/>
+            <a:ext cx="10514160" cy="2851200"/>
           </a:xfrm>
           <a:prstGeom prst="rect">
             <a:avLst/>
@@ -9437,7 +10077,7 @@
       </p:sp>
       <p:sp>
         <p:nvSpPr>
-          <p:cNvPr id="49" name="PlaceHolder 2"/>
+          <p:cNvPr id="55" name="PlaceHolder 2"/>
           <p:cNvSpPr>
             <a:spLocks noGrp="1"/>
           </p:cNvSpPr>
@@ -9448,7 +10088,7 @@
         <p:spPr>
           <a:xfrm>
             <a:off x="831960" y="4589640"/>
-            <a:ext cx="10514520" cy="1499040"/>
+            <a:ext cx="10514160" cy="1498680"/>
           </a:xfrm>
           <a:prstGeom prst="rect">
             <a:avLst/>
@@ -9487,7 +10127,7 @@
             <a:spLocks noGrp="1"/>
           </p:cNvSpPr>
           <p:nvPr>
-            <p:ph type="ftr" idx="10"/>
+            <p:ph type="ftr" idx="12"/>
           </p:nvPr>
         </p:nvSpPr>
         <p:spPr/>
@@ -9507,14 +10147,14 @@
             <a:spLocks noGrp="1"/>
           </p:cNvSpPr>
           <p:nvPr>
-            <p:ph type="sldNum" idx="11"/>
+            <p:ph type="sldNum" idx="13"/>
           </p:nvPr>
         </p:nvSpPr>
         <p:spPr/>
         <p:txBody>
           <a:bodyPr/>
           <a:p>
-            <a:fld id="{AF166BB1-2B86-46EE-9899-77B6F0C7C5E4}" type="slidenum">
+            <a:fld id="{55A1ED8D-32FF-4E99-A11D-4030EFD7667F}" type="slidenum">
               <a:t>2</a:t>
             </a:fld>
           </a:p>
@@ -9552,7 +10192,7 @@
       </p:grpSpPr>
       <p:sp>
         <p:nvSpPr>
-          <p:cNvPr id="84" name="PlaceHolder 1"/>
+          <p:cNvPr id="90" name="PlaceHolder 1"/>
           <p:cNvSpPr>
             <a:spLocks noGrp="1"/>
           </p:cNvSpPr>
@@ -9563,7 +10203,7 @@
         <p:spPr>
           <a:xfrm>
             <a:off x="838080" y="365040"/>
-            <a:ext cx="10514520" cy="1324440"/>
+            <a:ext cx="10514160" cy="1324080"/>
           </a:xfrm>
           <a:prstGeom prst="rect">
             <a:avLst/>
@@ -9611,7 +10251,7 @@
       </p:sp>
       <p:sp>
         <p:nvSpPr>
-          <p:cNvPr id="85" name="PlaceHolder 2"/>
+          <p:cNvPr id="91" name="PlaceHolder 2"/>
           <p:cNvSpPr>
             <a:spLocks noGrp="1"/>
           </p:cNvSpPr>
@@ -9622,7 +10262,7 @@
         <p:spPr>
           <a:xfrm>
             <a:off x="838080" y="1825560"/>
-            <a:ext cx="10514520" cy="4350240"/>
+            <a:ext cx="10514160" cy="4349880"/>
           </a:xfrm>
           <a:prstGeom prst="rect">
             <a:avLst/>
@@ -9973,7 +10613,7 @@
             <a:spLocks noGrp="1"/>
           </p:cNvSpPr>
           <p:nvPr>
-            <p:ph type="ftr" idx="7"/>
+            <p:ph type="ftr" idx="9"/>
           </p:nvPr>
         </p:nvSpPr>
         <p:spPr/>
@@ -9993,14 +10633,14 @@
             <a:spLocks noGrp="1"/>
           </p:cNvSpPr>
           <p:nvPr>
-            <p:ph type="sldNum" idx="8"/>
+            <p:ph type="sldNum" idx="10"/>
           </p:nvPr>
         </p:nvSpPr>
         <p:spPr/>
         <p:txBody>
           <a:bodyPr/>
           <a:p>
-            <a:fld id="{040BEB9B-C58F-4B2F-A675-6C3C0E4F935E}" type="slidenum">
+            <a:fld id="{3261459F-D393-4407-8A44-E247ABE9BEDF}" type="slidenum">
               <a:t>20</a:t>
             </a:fld>
           </a:p>
@@ -10038,7 +10678,7 @@
       </p:grpSpPr>
       <p:sp>
         <p:nvSpPr>
-          <p:cNvPr id="86" name="PlaceHolder 1"/>
+          <p:cNvPr id="92" name="PlaceHolder 1"/>
           <p:cNvSpPr>
             <a:spLocks noGrp="1"/>
           </p:cNvSpPr>
@@ -10049,7 +10689,7 @@
         <p:spPr>
           <a:xfrm>
             <a:off x="838080" y="365040"/>
-            <a:ext cx="10514520" cy="1324440"/>
+            <a:ext cx="10514160" cy="1324080"/>
           </a:xfrm>
           <a:prstGeom prst="rect">
             <a:avLst/>
@@ -10097,7 +10737,7 @@
       </p:sp>
       <p:sp>
         <p:nvSpPr>
-          <p:cNvPr id="87" name="PlaceHolder 2"/>
+          <p:cNvPr id="93" name="PlaceHolder 2"/>
           <p:cNvSpPr>
             <a:spLocks noGrp="1"/>
           </p:cNvSpPr>
@@ -10108,7 +10748,7 @@
         <p:spPr>
           <a:xfrm>
             <a:off x="838080" y="1825560"/>
-            <a:ext cx="10514520" cy="4350240"/>
+            <a:ext cx="10514160" cy="4349880"/>
           </a:xfrm>
           <a:prstGeom prst="rect">
             <a:avLst/>
@@ -10357,7 +10997,7 @@
             <a:spLocks noGrp="1"/>
           </p:cNvSpPr>
           <p:nvPr>
-            <p:ph type="ftr" idx="7"/>
+            <p:ph type="ftr" idx="9"/>
           </p:nvPr>
         </p:nvSpPr>
         <p:spPr/>
@@ -10377,14 +11017,14 @@
             <a:spLocks noGrp="1"/>
           </p:cNvSpPr>
           <p:nvPr>
-            <p:ph type="sldNum" idx="8"/>
+            <p:ph type="sldNum" idx="10"/>
           </p:nvPr>
         </p:nvSpPr>
         <p:spPr/>
         <p:txBody>
           <a:bodyPr/>
           <a:p>
-            <a:fld id="{89D2A492-5C69-4C54-90F0-1FD64A2896EE}" type="slidenum">
+            <a:fld id="{2893A35D-CDBA-4482-BA72-AF249B9FB208}" type="slidenum">
               <a:t>21</a:t>
             </a:fld>
           </a:p>
@@ -10422,7 +11062,7 @@
       </p:grpSpPr>
       <p:sp>
         <p:nvSpPr>
-          <p:cNvPr id="88" name="PlaceHolder 1"/>
+          <p:cNvPr id="94" name="PlaceHolder 1"/>
           <p:cNvSpPr>
             <a:spLocks noGrp="1"/>
           </p:cNvSpPr>
@@ -10433,7 +11073,7 @@
         <p:spPr>
           <a:xfrm>
             <a:off x="838080" y="365040"/>
-            <a:ext cx="10514520" cy="1324440"/>
+            <a:ext cx="10514160" cy="1324080"/>
           </a:xfrm>
           <a:prstGeom prst="rect">
             <a:avLst/>
@@ -10481,7 +11121,7 @@
       </p:sp>
       <p:sp>
         <p:nvSpPr>
-          <p:cNvPr id="89" name="PlaceHolder 2"/>
+          <p:cNvPr id="95" name="PlaceHolder 2"/>
           <p:cNvSpPr>
             <a:spLocks noGrp="1"/>
           </p:cNvSpPr>
@@ -10492,7 +11132,7 @@
         <p:spPr>
           <a:xfrm>
             <a:off x="838080" y="1825560"/>
-            <a:ext cx="10514520" cy="4350240"/>
+            <a:ext cx="10514160" cy="4349880"/>
           </a:xfrm>
           <a:prstGeom prst="rect">
             <a:avLst/>
@@ -10685,7 +11325,7 @@
             <a:spLocks noGrp="1"/>
           </p:cNvSpPr>
           <p:nvPr>
-            <p:ph type="ftr" idx="7"/>
+            <p:ph type="ftr" idx="9"/>
           </p:nvPr>
         </p:nvSpPr>
         <p:spPr/>
@@ -10705,14 +11345,14 @@
             <a:spLocks noGrp="1"/>
           </p:cNvSpPr>
           <p:nvPr>
-            <p:ph type="sldNum" idx="8"/>
+            <p:ph type="sldNum" idx="10"/>
           </p:nvPr>
         </p:nvSpPr>
         <p:spPr/>
         <p:txBody>
           <a:bodyPr/>
           <a:p>
-            <a:fld id="{5C040F70-3E45-4886-8417-894311B9FCCB}" type="slidenum">
+            <a:fld id="{7FADE8A4-1045-4BB0-9003-7DBDC9D4C8EE}" type="slidenum">
               <a:t>22</a:t>
             </a:fld>
           </a:p>
@@ -10750,7 +11390,7 @@
       </p:grpSpPr>
       <p:sp>
         <p:nvSpPr>
-          <p:cNvPr id="90" name="PlaceHolder 1"/>
+          <p:cNvPr id="96" name="PlaceHolder 1"/>
           <p:cNvSpPr>
             <a:spLocks noGrp="1"/>
           </p:cNvSpPr>
@@ -10761,7 +11401,7 @@
         <p:spPr>
           <a:xfrm>
             <a:off x="838080" y="365040"/>
-            <a:ext cx="10514520" cy="1324440"/>
+            <a:ext cx="10514160" cy="1324080"/>
           </a:xfrm>
           <a:prstGeom prst="rect">
             <a:avLst/>
@@ -10809,7 +11449,7 @@
       </p:sp>
       <p:sp>
         <p:nvSpPr>
-          <p:cNvPr id="91" name="PlaceHolder 2"/>
+          <p:cNvPr id="97" name="PlaceHolder 2"/>
           <p:cNvSpPr>
             <a:spLocks noGrp="1"/>
           </p:cNvSpPr>
@@ -10820,7 +11460,7 @@
         <p:spPr>
           <a:xfrm>
             <a:off x="838080" y="1753560"/>
-            <a:ext cx="10514520" cy="4350240"/>
+            <a:ext cx="10514160" cy="4349880"/>
           </a:xfrm>
           <a:prstGeom prst="rect">
             <a:avLst/>
@@ -10969,7 +11609,7 @@
             <a:spLocks noGrp="1"/>
           </p:cNvSpPr>
           <p:nvPr>
-            <p:ph type="ftr" idx="7"/>
+            <p:ph type="ftr" idx="9"/>
           </p:nvPr>
         </p:nvSpPr>
         <p:spPr/>
@@ -10989,14 +11629,14 @@
             <a:spLocks noGrp="1"/>
           </p:cNvSpPr>
           <p:nvPr>
-            <p:ph type="sldNum" idx="8"/>
+            <p:ph type="sldNum" idx="10"/>
           </p:nvPr>
         </p:nvSpPr>
         <p:spPr/>
         <p:txBody>
           <a:bodyPr/>
           <a:p>
-            <a:fld id="{31FE33F5-DB03-4555-A904-BFBEF4D6EC2D}" type="slidenum">
+            <a:fld id="{C14D6E09-4E38-4F65-9D69-414EF55F9019}" type="slidenum">
               <a:t>23</a:t>
             </a:fld>
           </a:p>
@@ -11034,7 +11674,7 @@
       </p:grpSpPr>
       <p:sp>
         <p:nvSpPr>
-          <p:cNvPr id="92" name="PlaceHolder 1"/>
+          <p:cNvPr id="98" name="PlaceHolder 1"/>
           <p:cNvSpPr>
             <a:spLocks noGrp="1"/>
           </p:cNvSpPr>
@@ -11045,7 +11685,7 @@
         <p:spPr>
           <a:xfrm>
             <a:off x="831960" y="1709640"/>
-            <a:ext cx="10514520" cy="2851560"/>
+            <a:ext cx="10514160" cy="2851200"/>
           </a:xfrm>
           <a:prstGeom prst="rect">
             <a:avLst/>
@@ -11093,7 +11733,7 @@
       </p:sp>
       <p:sp>
         <p:nvSpPr>
-          <p:cNvPr id="93" name="PlaceHolder 2"/>
+          <p:cNvPr id="99" name="PlaceHolder 2"/>
           <p:cNvSpPr>
             <a:spLocks noGrp="1"/>
           </p:cNvSpPr>
@@ -11104,7 +11744,7 @@
         <p:spPr>
           <a:xfrm>
             <a:off x="831960" y="4589640"/>
-            <a:ext cx="10514520" cy="1499040"/>
+            <a:ext cx="10514160" cy="1498680"/>
           </a:xfrm>
           <a:prstGeom prst="rect">
             <a:avLst/>
@@ -11143,7 +11783,7 @@
             <a:spLocks noGrp="1"/>
           </p:cNvSpPr>
           <p:nvPr>
-            <p:ph type="ftr" idx="10"/>
+            <p:ph type="ftr" idx="12"/>
           </p:nvPr>
         </p:nvSpPr>
         <p:spPr/>
@@ -11163,14 +11803,14 @@
             <a:spLocks noGrp="1"/>
           </p:cNvSpPr>
           <p:nvPr>
-            <p:ph type="sldNum" idx="11"/>
+            <p:ph type="sldNum" idx="13"/>
           </p:nvPr>
         </p:nvSpPr>
         <p:spPr/>
         <p:txBody>
           <a:bodyPr/>
           <a:p>
-            <a:fld id="{1B374248-C0ED-4C3F-A1B9-C6F21CDBE2F4}" type="slidenum">
+            <a:fld id="{9AC109F2-954F-44AD-8FF6-40E12474CF0A}" type="slidenum">
               <a:t>24</a:t>
             </a:fld>
           </a:p>
@@ -11208,7 +11848,7 @@
       </p:grpSpPr>
       <p:sp>
         <p:nvSpPr>
-          <p:cNvPr id="94" name="PlaceHolder 1"/>
+          <p:cNvPr id="100" name="PlaceHolder 1"/>
           <p:cNvSpPr>
             <a:spLocks noGrp="1"/>
           </p:cNvSpPr>
@@ -11219,7 +11859,7 @@
         <p:spPr>
           <a:xfrm>
             <a:off x="838080" y="365040"/>
-            <a:ext cx="10514520" cy="1324440"/>
+            <a:ext cx="10514160" cy="1324080"/>
           </a:xfrm>
           <a:prstGeom prst="rect">
             <a:avLst/>
@@ -11267,7 +11907,7 @@
       </p:sp>
       <p:sp>
         <p:nvSpPr>
-          <p:cNvPr id="95" name="PlaceHolder 2"/>
+          <p:cNvPr id="101" name="PlaceHolder 2"/>
           <p:cNvSpPr>
             <a:spLocks noGrp="1"/>
           </p:cNvSpPr>
@@ -11278,7 +11918,7 @@
         <p:spPr>
           <a:xfrm>
             <a:off x="838080" y="1825560"/>
-            <a:ext cx="10514520" cy="4350240"/>
+            <a:ext cx="10514160" cy="4349880"/>
           </a:xfrm>
           <a:prstGeom prst="rect">
             <a:avLst/>
@@ -11437,7 +12077,7 @@
             <a:spLocks noGrp="1"/>
           </p:cNvSpPr>
           <p:nvPr>
-            <p:ph type="ftr" idx="7"/>
+            <p:ph type="ftr" idx="9"/>
           </p:nvPr>
         </p:nvSpPr>
         <p:spPr/>
@@ -11457,14 +12097,14 @@
             <a:spLocks noGrp="1"/>
           </p:cNvSpPr>
           <p:nvPr>
-            <p:ph type="sldNum" idx="8"/>
+            <p:ph type="sldNum" idx="10"/>
           </p:nvPr>
         </p:nvSpPr>
         <p:spPr/>
         <p:txBody>
           <a:bodyPr/>
           <a:p>
-            <a:fld id="{FDA22C5A-5AA0-4A57-A98A-1F3EDD1629A2}" type="slidenum">
+            <a:fld id="{171D16E9-0475-4AB5-9E8F-CC06ED9FAE8F}" type="slidenum">
               <a:t>25</a:t>
             </a:fld>
           </a:p>
@@ -11502,7 +12142,7 @@
       </p:grpSpPr>
       <p:sp>
         <p:nvSpPr>
-          <p:cNvPr id="96" name="PlaceHolder 1"/>
+          <p:cNvPr id="102" name="PlaceHolder 1"/>
           <p:cNvSpPr>
             <a:spLocks noGrp="1"/>
           </p:cNvSpPr>
@@ -11513,7 +12153,7 @@
         <p:spPr>
           <a:xfrm>
             <a:off x="838080" y="365040"/>
-            <a:ext cx="10514520" cy="1324440"/>
+            <a:ext cx="10514160" cy="1324080"/>
           </a:xfrm>
           <a:prstGeom prst="rect">
             <a:avLst/>
@@ -11561,7 +12201,7 @@
       </p:sp>
       <p:sp>
         <p:nvSpPr>
-          <p:cNvPr id="97" name="PlaceHolder 2"/>
+          <p:cNvPr id="103" name="PlaceHolder 2"/>
           <p:cNvSpPr>
             <a:spLocks noGrp="1"/>
           </p:cNvSpPr>
@@ -11572,7 +12212,7 @@
         <p:spPr>
           <a:xfrm>
             <a:off x="838080" y="1825560"/>
-            <a:ext cx="10514520" cy="4350240"/>
+            <a:ext cx="10514160" cy="4349880"/>
           </a:xfrm>
           <a:prstGeom prst="rect">
             <a:avLst/>
@@ -11692,7 +12332,7 @@
       </p:sp>
       <p:pic>
         <p:nvPicPr>
-          <p:cNvPr id="98" name="Picture 4" descr=""/>
+          <p:cNvPr id="104" name="Picture 4" descr=""/>
           <p:cNvPicPr/>
           <p:nvPr/>
         </p:nvPicPr>
@@ -11703,7 +12343,7 @@
         <p:spPr>
           <a:xfrm>
             <a:off x="3621960" y="990000"/>
-            <a:ext cx="7611480" cy="5519160"/>
+            <a:ext cx="7611120" cy="5518800"/>
           </a:xfrm>
           <a:prstGeom prst="rect">
             <a:avLst/>
@@ -11716,7 +12356,7 @@
       </p:pic>
       <p:pic>
         <p:nvPicPr>
-          <p:cNvPr id="99" name="Picture 6" descr=""/>
+          <p:cNvPr id="105" name="Picture 6" descr=""/>
           <p:cNvPicPr/>
           <p:nvPr/>
         </p:nvPicPr>
@@ -11727,7 +12367,7 @@
         <p:spPr>
           <a:xfrm>
             <a:off x="3621960" y="2489400"/>
-            <a:ext cx="5937840" cy="2137320"/>
+            <a:ext cx="5937480" cy="2136960"/>
           </a:xfrm>
           <a:prstGeom prst="rect">
             <a:avLst/>
@@ -11745,7 +12385,7 @@
             <a:spLocks noGrp="1"/>
           </p:cNvSpPr>
           <p:nvPr>
-            <p:ph type="ftr" idx="7"/>
+            <p:ph type="ftr" idx="9"/>
           </p:nvPr>
         </p:nvSpPr>
         <p:spPr/>
@@ -11765,14 +12405,14 @@
             <a:spLocks noGrp="1"/>
           </p:cNvSpPr>
           <p:nvPr>
-            <p:ph type="sldNum" idx="8"/>
+            <p:ph type="sldNum" idx="10"/>
           </p:nvPr>
         </p:nvSpPr>
         <p:spPr/>
         <p:txBody>
           <a:bodyPr/>
           <a:p>
-            <a:fld id="{585D7C70-5CB0-411B-A7DA-A4AB95B20652}" type="slidenum">
+            <a:fld id="{1967BA3C-556C-4AD9-991D-03D1FB6F62AB}" type="slidenum">
               <a:t>26</a:t>
             </a:fld>
           </a:p>
@@ -11822,7 +12462,7 @@
                                           </p:stCondLst>
                                         </p:cTn>
                                         <p:tgtEl>
-                                          <p:spTgt spid="98"/>
+                                          <p:spTgt spid="104"/>
                                         </p:tgtEl>
                                         <p:attrNameLst>
                                           <p:attrName>style.visibility</p:attrName>
@@ -11836,7 +12476,7 @@
                                       <p:cBhvr additive="repl">
                                         <p:cTn id="7" dur="500"/>
                                         <p:tgtEl>
-                                          <p:spTgt spid="98"/>
+                                          <p:spTgt spid="104"/>
                                         </p:tgtEl>
                                       </p:cBhvr>
                                     </p:animEffect>
@@ -11875,7 +12515,7 @@
                                           </p:stCondLst>
                                         </p:cTn>
                                         <p:tgtEl>
-                                          <p:spTgt spid="97">
+                                          <p:spTgt spid="103">
                                             <p:txEl>
                                               <p:pRg st="2" end="2"/>
                                             </p:txEl>
@@ -11902,7 +12542,7 @@
                                       <p:cBhvr>
                                         <p:cTn id="13" dur="indefinite"/>
                                         <p:tgtEl>
-                                          <p:spTgt spid="98"/>
+                                          <p:spTgt spid="104"/>
                                         </p:tgtEl>
                                         <p:attrNameLst>
                                           <p:attrName>style.opacity</p:attrName>
@@ -11916,7 +12556,7 @@
                                       <p:cBhvr additive="repl">
                                         <p:cTn id="14" dur="indefinite"/>
                                         <p:tgtEl>
-                                          <p:spTgt spid="98"/>
+                                          <p:spTgt spid="104"/>
                                         </p:tgtEl>
                                       </p:cBhvr>
                                     </p:animEffect>
@@ -11955,7 +12595,7 @@
                                           </p:stCondLst>
                                         </p:cTn>
                                         <p:tgtEl>
-                                          <p:spTgt spid="99"/>
+                                          <p:spTgt spid="105"/>
                                         </p:tgtEl>
                                         <p:attrNameLst>
                                           <p:attrName>style.visibility</p:attrName>
@@ -11969,7 +12609,7 @@
                                       <p:cBhvr additive="repl">
                                         <p:cTn id="19" dur="500"/>
                                         <p:tgtEl>
-                                          <p:spTgt spid="99"/>
+                                          <p:spTgt spid="105"/>
                                         </p:tgtEl>
                                       </p:cBhvr>
                                     </p:animEffect>
@@ -12026,7 +12666,7 @@
       </p:grpSpPr>
       <p:sp>
         <p:nvSpPr>
-          <p:cNvPr id="100" name="PlaceHolder 1"/>
+          <p:cNvPr id="106" name="PlaceHolder 1"/>
           <p:cNvSpPr>
             <a:spLocks noGrp="1"/>
           </p:cNvSpPr>
@@ -12037,7 +12677,7 @@
         <p:spPr>
           <a:xfrm>
             <a:off x="838080" y="365040"/>
-            <a:ext cx="10514520" cy="1324440"/>
+            <a:ext cx="10514160" cy="1324080"/>
           </a:xfrm>
           <a:prstGeom prst="rect">
             <a:avLst/>
@@ -12085,7 +12725,7 @@
       </p:sp>
       <p:sp>
         <p:nvSpPr>
-          <p:cNvPr id="101" name="PlaceHolder 2"/>
+          <p:cNvPr id="107" name="PlaceHolder 2"/>
           <p:cNvSpPr>
             <a:spLocks noGrp="1"/>
           </p:cNvSpPr>
@@ -12096,7 +12736,7 @@
         <p:spPr>
           <a:xfrm>
             <a:off x="838080" y="1825560"/>
-            <a:ext cx="10514520" cy="4350240"/>
+            <a:ext cx="10514160" cy="4349880"/>
           </a:xfrm>
           <a:prstGeom prst="rect">
             <a:avLst/>
@@ -12321,7 +12961,7 @@
             <a:spLocks noGrp="1"/>
           </p:cNvSpPr>
           <p:nvPr>
-            <p:ph type="ftr" idx="7"/>
+            <p:ph type="ftr" idx="9"/>
           </p:nvPr>
         </p:nvSpPr>
         <p:spPr/>
@@ -12341,14 +12981,14 @@
             <a:spLocks noGrp="1"/>
           </p:cNvSpPr>
           <p:nvPr>
-            <p:ph type="sldNum" idx="8"/>
+            <p:ph type="sldNum" idx="10"/>
           </p:nvPr>
         </p:nvSpPr>
         <p:spPr/>
         <p:txBody>
           <a:bodyPr/>
           <a:p>
-            <a:fld id="{C3064A74-8C23-4B4F-81BB-611387EBA01F}" type="slidenum">
+            <a:fld id="{B05F1127-51A3-4F6A-B568-D3D4F31A57A7}" type="slidenum">
               <a:t>27</a:t>
             </a:fld>
           </a:p>
@@ -12386,7 +13026,7 @@
       </p:grpSpPr>
       <p:sp>
         <p:nvSpPr>
-          <p:cNvPr id="102" name="PlaceHolder 1"/>
+          <p:cNvPr id="108" name="PlaceHolder 1"/>
           <p:cNvSpPr>
             <a:spLocks noGrp="1"/>
           </p:cNvSpPr>
@@ -12397,7 +13037,7 @@
         <p:spPr>
           <a:xfrm>
             <a:off x="838080" y="365040"/>
-            <a:ext cx="10514520" cy="1324440"/>
+            <a:ext cx="10514160" cy="1324080"/>
           </a:xfrm>
           <a:prstGeom prst="rect">
             <a:avLst/>
@@ -12445,7 +13085,7 @@
       </p:sp>
       <p:sp>
         <p:nvSpPr>
-          <p:cNvPr id="103" name="PlaceHolder 2"/>
+          <p:cNvPr id="109" name="PlaceHolder 2"/>
           <p:cNvSpPr>
             <a:spLocks noGrp="1"/>
           </p:cNvSpPr>
@@ -12456,7 +13096,7 @@
         <p:spPr>
           <a:xfrm>
             <a:off x="838080" y="1825560"/>
-            <a:ext cx="10514520" cy="4350240"/>
+            <a:ext cx="10514160" cy="4349880"/>
           </a:xfrm>
           <a:prstGeom prst="rect">
             <a:avLst/>
@@ -13009,7 +13649,7 @@
             <a:spLocks noGrp="1"/>
           </p:cNvSpPr>
           <p:nvPr>
-            <p:ph type="ftr" idx="7"/>
+            <p:ph type="ftr" idx="9"/>
           </p:nvPr>
         </p:nvSpPr>
         <p:spPr/>
@@ -13029,14 +13669,14 @@
             <a:spLocks noGrp="1"/>
           </p:cNvSpPr>
           <p:nvPr>
-            <p:ph type="sldNum" idx="8"/>
+            <p:ph type="sldNum" idx="10"/>
           </p:nvPr>
         </p:nvSpPr>
         <p:spPr/>
         <p:txBody>
           <a:bodyPr/>
           <a:p>
-            <a:fld id="{90834E59-A800-406E-A9CB-BDC0798D6AFC}" type="slidenum">
+            <a:fld id="{A65B8610-2475-41C0-B305-AF9534027FE6}" type="slidenum">
               <a:t>28</a:t>
             </a:fld>
           </a:p>
@@ -13074,7 +13714,7 @@
       </p:grpSpPr>
       <p:sp>
         <p:nvSpPr>
-          <p:cNvPr id="104" name="PlaceHolder 1"/>
+          <p:cNvPr id="110" name="PlaceHolder 1"/>
           <p:cNvSpPr>
             <a:spLocks noGrp="1"/>
           </p:cNvSpPr>
@@ -13085,7 +13725,7 @@
         <p:spPr>
           <a:xfrm>
             <a:off x="838080" y="365040"/>
-            <a:ext cx="10514520" cy="1324440"/>
+            <a:ext cx="10514160" cy="1324080"/>
           </a:xfrm>
           <a:prstGeom prst="rect">
             <a:avLst/>
@@ -13133,7 +13773,7 @@
       </p:sp>
       <p:sp>
         <p:nvSpPr>
-          <p:cNvPr id="105" name="PlaceHolder 2"/>
+          <p:cNvPr id="111" name="PlaceHolder 2"/>
           <p:cNvSpPr>
             <a:spLocks noGrp="1"/>
           </p:cNvSpPr>
@@ -13144,7 +13784,7 @@
         <p:spPr>
           <a:xfrm>
             <a:off x="838080" y="1825560"/>
-            <a:ext cx="10514520" cy="4350240"/>
+            <a:ext cx="10514160" cy="4349880"/>
           </a:xfrm>
           <a:prstGeom prst="rect">
             <a:avLst/>
@@ -13393,7 +14033,7 @@
             <a:spLocks noGrp="1"/>
           </p:cNvSpPr>
           <p:nvPr>
-            <p:ph type="ftr" idx="7"/>
+            <p:ph type="ftr" idx="9"/>
           </p:nvPr>
         </p:nvSpPr>
         <p:spPr/>
@@ -13413,14 +14053,14 @@
             <a:spLocks noGrp="1"/>
           </p:cNvSpPr>
           <p:nvPr>
-            <p:ph type="sldNum" idx="8"/>
+            <p:ph type="sldNum" idx="10"/>
           </p:nvPr>
         </p:nvSpPr>
         <p:spPr/>
         <p:txBody>
           <a:bodyPr/>
           <a:p>
-            <a:fld id="{31783ED6-E7D9-4166-8490-F7ADB86C3B49}" type="slidenum">
+            <a:fld id="{AA85B2BA-C40A-4C71-A386-AA65B874CBD5}" type="slidenum">
               <a:t>29</a:t>
             </a:fld>
           </a:p>
@@ -13458,7 +14098,7 @@
       </p:grpSpPr>
       <p:sp>
         <p:nvSpPr>
-          <p:cNvPr id="50" name="PlaceHolder 1"/>
+          <p:cNvPr id="56" name="PlaceHolder 1"/>
           <p:cNvSpPr>
             <a:spLocks noGrp="1"/>
           </p:cNvSpPr>
@@ -13469,7 +14109,7 @@
         <p:spPr>
           <a:xfrm>
             <a:off x="838080" y="365040"/>
-            <a:ext cx="10514520" cy="1324440"/>
+            <a:ext cx="10514160" cy="1324080"/>
           </a:xfrm>
           <a:prstGeom prst="rect">
             <a:avLst/>
@@ -13517,7 +14157,7 @@
       </p:sp>
       <p:sp>
         <p:nvSpPr>
-          <p:cNvPr id="51" name="PlaceHolder 2"/>
+          <p:cNvPr id="57" name="PlaceHolder 2"/>
           <p:cNvSpPr>
             <a:spLocks noGrp="1"/>
           </p:cNvSpPr>
@@ -13528,7 +14168,7 @@
         <p:spPr>
           <a:xfrm>
             <a:off x="838080" y="1825560"/>
-            <a:ext cx="10514520" cy="4350240"/>
+            <a:ext cx="10514160" cy="4349880"/>
           </a:xfrm>
           <a:prstGeom prst="rect">
             <a:avLst/>
@@ -13757,7 +14397,7 @@
             <a:spLocks noGrp="1"/>
           </p:cNvSpPr>
           <p:nvPr>
-            <p:ph type="ftr" idx="7"/>
+            <p:ph type="ftr" idx="9"/>
           </p:nvPr>
         </p:nvSpPr>
         <p:spPr/>
@@ -13777,14 +14417,14 @@
             <a:spLocks noGrp="1"/>
           </p:cNvSpPr>
           <p:nvPr>
-            <p:ph type="sldNum" idx="8"/>
+            <p:ph type="sldNum" idx="10"/>
           </p:nvPr>
         </p:nvSpPr>
         <p:spPr/>
         <p:txBody>
           <a:bodyPr/>
           <a:p>
-            <a:fld id="{73784455-C4AC-4D71-9D6A-95E9B0DEA54B}" type="slidenum">
+            <a:fld id="{22DFF264-7889-4AC5-8EA5-D8F393FBD3B5}" type="slidenum">
               <a:t>3</a:t>
             </a:fld>
           </a:p>
@@ -13822,7 +14462,7 @@
       </p:grpSpPr>
       <p:sp>
         <p:nvSpPr>
-          <p:cNvPr id="106" name="PlaceHolder 1"/>
+          <p:cNvPr id="112" name="PlaceHolder 1"/>
           <p:cNvSpPr>
             <a:spLocks noGrp="1"/>
           </p:cNvSpPr>
@@ -13833,7 +14473,7 @@
         <p:spPr>
           <a:xfrm>
             <a:off x="838080" y="365040"/>
-            <a:ext cx="10514520" cy="1324440"/>
+            <a:ext cx="10514160" cy="1324080"/>
           </a:xfrm>
           <a:prstGeom prst="rect">
             <a:avLst/>
@@ -13881,7 +14521,7 @@
       </p:sp>
       <p:sp>
         <p:nvSpPr>
-          <p:cNvPr id="107" name="PlaceHolder 2"/>
+          <p:cNvPr id="113" name="PlaceHolder 2"/>
           <p:cNvSpPr>
             <a:spLocks noGrp="1"/>
           </p:cNvSpPr>
@@ -13892,7 +14532,7 @@
         <p:spPr>
           <a:xfrm>
             <a:off x="838080" y="1825560"/>
-            <a:ext cx="10514520" cy="4350240"/>
+            <a:ext cx="10514160" cy="4349880"/>
           </a:xfrm>
           <a:prstGeom prst="rect">
             <a:avLst/>
@@ -14141,7 +14781,7 @@
             <a:spLocks noGrp="1"/>
           </p:cNvSpPr>
           <p:nvPr>
-            <p:ph type="ftr" idx="7"/>
+            <p:ph type="ftr" idx="9"/>
           </p:nvPr>
         </p:nvSpPr>
         <p:spPr/>
@@ -14161,14 +14801,14 @@
             <a:spLocks noGrp="1"/>
           </p:cNvSpPr>
           <p:nvPr>
-            <p:ph type="sldNum" idx="8"/>
+            <p:ph type="sldNum" idx="10"/>
           </p:nvPr>
         </p:nvSpPr>
         <p:spPr/>
         <p:txBody>
           <a:bodyPr/>
           <a:p>
-            <a:fld id="{E106CB07-FC8C-460F-81BF-4AEF5152E80B}" type="slidenum">
+            <a:fld id="{A1ABBFC8-34F6-40DC-A982-18D13D9CAA41}" type="slidenum">
               <a:t>30</a:t>
             </a:fld>
           </a:p>
@@ -14206,7 +14846,7 @@
       </p:grpSpPr>
       <p:sp>
         <p:nvSpPr>
-          <p:cNvPr id="108" name="PlaceHolder 1"/>
+          <p:cNvPr id="114" name="PlaceHolder 1"/>
           <p:cNvSpPr>
             <a:spLocks noGrp="1"/>
           </p:cNvSpPr>
@@ -14217,7 +14857,7 @@
         <p:spPr>
           <a:xfrm>
             <a:off x="838080" y="365040"/>
-            <a:ext cx="10514520" cy="1324440"/>
+            <a:ext cx="10514160" cy="1324080"/>
           </a:xfrm>
           <a:prstGeom prst="rect">
             <a:avLst/>
@@ -14265,7 +14905,7 @@
       </p:sp>
       <p:sp>
         <p:nvSpPr>
-          <p:cNvPr id="109" name="PlaceHolder 2"/>
+          <p:cNvPr id="115" name="PlaceHolder 2"/>
           <p:cNvSpPr>
             <a:spLocks noGrp="1"/>
           </p:cNvSpPr>
@@ -14276,7 +14916,7 @@
         <p:spPr>
           <a:xfrm>
             <a:off x="838080" y="1825560"/>
-            <a:ext cx="10514520" cy="4350240"/>
+            <a:ext cx="10514160" cy="4349880"/>
           </a:xfrm>
           <a:prstGeom prst="rect">
             <a:avLst/>
@@ -14571,7 +15211,7 @@
             <a:spLocks noGrp="1"/>
           </p:cNvSpPr>
           <p:nvPr>
-            <p:ph type="ftr" idx="7"/>
+            <p:ph type="ftr" idx="9"/>
           </p:nvPr>
         </p:nvSpPr>
         <p:spPr/>
@@ -14591,14 +15231,14 @@
             <a:spLocks noGrp="1"/>
           </p:cNvSpPr>
           <p:nvPr>
-            <p:ph type="sldNum" idx="8"/>
+            <p:ph type="sldNum" idx="10"/>
           </p:nvPr>
         </p:nvSpPr>
         <p:spPr/>
         <p:txBody>
           <a:bodyPr/>
           <a:p>
-            <a:fld id="{D3C76C07-E982-4876-B5DF-67A20F0E1EE5}" type="slidenum">
+            <a:fld id="{A3ABA6E6-3628-40C5-BDB9-E2733B2C17D2}" type="slidenum">
               <a:t>31</a:t>
             </a:fld>
           </a:p>
@@ -14636,7 +15276,7 @@
       </p:grpSpPr>
       <p:sp>
         <p:nvSpPr>
-          <p:cNvPr id="110" name="PlaceHolder 1"/>
+          <p:cNvPr id="116" name="PlaceHolder 1"/>
           <p:cNvSpPr>
             <a:spLocks noGrp="1"/>
           </p:cNvSpPr>
@@ -14647,7 +15287,7 @@
         <p:spPr>
           <a:xfrm>
             <a:off x="838080" y="365040"/>
-            <a:ext cx="10514520" cy="1324440"/>
+            <a:ext cx="10514160" cy="1324080"/>
           </a:xfrm>
           <a:prstGeom prst="rect">
             <a:avLst/>
@@ -14695,7 +15335,7 @@
       </p:sp>
       <p:sp>
         <p:nvSpPr>
-          <p:cNvPr id="111" name="PlaceHolder 2"/>
+          <p:cNvPr id="117" name="PlaceHolder 2"/>
           <p:cNvSpPr>
             <a:spLocks noGrp="1"/>
           </p:cNvSpPr>
@@ -14706,7 +15346,7 @@
         <p:spPr>
           <a:xfrm>
             <a:off x="838080" y="1825560"/>
-            <a:ext cx="10514520" cy="4350240"/>
+            <a:ext cx="10514160" cy="4349880"/>
           </a:xfrm>
           <a:prstGeom prst="rect">
             <a:avLst/>
@@ -14921,7 +15561,7 @@
             <a:spLocks noGrp="1"/>
           </p:cNvSpPr>
           <p:nvPr>
-            <p:ph type="ftr" idx="7"/>
+            <p:ph type="ftr" idx="9"/>
           </p:nvPr>
         </p:nvSpPr>
         <p:spPr/>
@@ -14941,14 +15581,14 @@
             <a:spLocks noGrp="1"/>
           </p:cNvSpPr>
           <p:nvPr>
-            <p:ph type="sldNum" idx="8"/>
+            <p:ph type="sldNum" idx="10"/>
           </p:nvPr>
         </p:nvSpPr>
         <p:spPr/>
         <p:txBody>
           <a:bodyPr/>
           <a:p>
-            <a:fld id="{75BCE4C3-A261-41A2-827D-EFFC39291D59}" type="slidenum">
+            <a:fld id="{C2AEA107-B524-4558-BC28-DC5C2FFFE257}" type="slidenum">
               <a:t>32</a:t>
             </a:fld>
           </a:p>
@@ -14986,7 +15626,7 @@
       </p:grpSpPr>
       <p:sp>
         <p:nvSpPr>
-          <p:cNvPr id="112" name="PlaceHolder 1"/>
+          <p:cNvPr id="118" name="PlaceHolder 1"/>
           <p:cNvSpPr>
             <a:spLocks noGrp="1"/>
           </p:cNvSpPr>
@@ -14997,7 +15637,7 @@
         <p:spPr>
           <a:xfrm>
             <a:off x="838080" y="365040"/>
-            <a:ext cx="10514520" cy="1324440"/>
+            <a:ext cx="10514160" cy="1324080"/>
           </a:xfrm>
           <a:prstGeom prst="rect">
             <a:avLst/>
@@ -15045,7 +15685,7 @@
       </p:sp>
       <p:sp>
         <p:nvSpPr>
-          <p:cNvPr id="113" name="PlaceHolder 2"/>
+          <p:cNvPr id="119" name="PlaceHolder 2"/>
           <p:cNvSpPr>
             <a:spLocks noGrp="1"/>
           </p:cNvSpPr>
@@ -15056,7 +15696,7 @@
         <p:spPr>
           <a:xfrm>
             <a:off x="838080" y="1825560"/>
-            <a:ext cx="10514520" cy="4350240"/>
+            <a:ext cx="10514160" cy="4349880"/>
           </a:xfrm>
           <a:prstGeom prst="rect">
             <a:avLst/>
@@ -15827,7 +16467,7 @@
             <a:spLocks noGrp="1"/>
           </p:cNvSpPr>
           <p:nvPr>
-            <p:ph type="ftr" idx="7"/>
+            <p:ph type="ftr" idx="9"/>
           </p:nvPr>
         </p:nvSpPr>
         <p:spPr/>
@@ -15847,14 +16487,14 @@
             <a:spLocks noGrp="1"/>
           </p:cNvSpPr>
           <p:nvPr>
-            <p:ph type="sldNum" idx="8"/>
+            <p:ph type="sldNum" idx="10"/>
           </p:nvPr>
         </p:nvSpPr>
         <p:spPr/>
         <p:txBody>
           <a:bodyPr/>
           <a:p>
-            <a:fld id="{D6669C81-845E-4CE6-9CDC-CAEAC9D78A61}" type="slidenum">
+            <a:fld id="{BBBD905A-97B3-4E8F-917F-B4EB3A1D2A97}" type="slidenum">
               <a:t>33</a:t>
             </a:fld>
           </a:p>
@@ -15892,7 +16532,7 @@
       </p:grpSpPr>
       <p:sp>
         <p:nvSpPr>
-          <p:cNvPr id="114" name="PlaceHolder 1"/>
+          <p:cNvPr id="120" name="PlaceHolder 1"/>
           <p:cNvSpPr>
             <a:spLocks noGrp="1"/>
           </p:cNvSpPr>
@@ -15903,7 +16543,7 @@
         <p:spPr>
           <a:xfrm>
             <a:off x="838080" y="365040"/>
-            <a:ext cx="10514520" cy="1324440"/>
+            <a:ext cx="10514160" cy="1324080"/>
           </a:xfrm>
           <a:prstGeom prst="rect">
             <a:avLst/>
@@ -15951,7 +16591,7 @@
       </p:sp>
       <p:sp>
         <p:nvSpPr>
-          <p:cNvPr id="115" name="PlaceHolder 2"/>
+          <p:cNvPr id="121" name="PlaceHolder 2"/>
           <p:cNvSpPr>
             <a:spLocks noGrp="1"/>
           </p:cNvSpPr>
@@ -15962,7 +16602,7 @@
         <p:spPr>
           <a:xfrm>
             <a:off x="838080" y="1825560"/>
-            <a:ext cx="10514520" cy="4350240"/>
+            <a:ext cx="10514160" cy="4349880"/>
           </a:xfrm>
           <a:prstGeom prst="rect">
             <a:avLst/>
@@ -16143,7 +16783,7 @@
             <a:spLocks noGrp="1"/>
           </p:cNvSpPr>
           <p:nvPr>
-            <p:ph type="ftr" idx="7"/>
+            <p:ph type="ftr" idx="9"/>
           </p:nvPr>
         </p:nvSpPr>
         <p:spPr/>
@@ -16163,14 +16803,14 @@
             <a:spLocks noGrp="1"/>
           </p:cNvSpPr>
           <p:nvPr>
-            <p:ph type="sldNum" idx="8"/>
+            <p:ph type="sldNum" idx="10"/>
           </p:nvPr>
         </p:nvSpPr>
         <p:spPr/>
         <p:txBody>
           <a:bodyPr/>
           <a:p>
-            <a:fld id="{3CA15D08-D627-4559-A0AF-1867D4DA9E13}" type="slidenum">
+            <a:fld id="{9F10C8EC-CF2E-4AEF-AE0C-582ECECAE599}" type="slidenum">
               <a:t>34</a:t>
             </a:fld>
           </a:p>
@@ -16208,7 +16848,7 @@
       </p:grpSpPr>
       <p:sp>
         <p:nvSpPr>
-          <p:cNvPr id="116" name="PlaceHolder 1"/>
+          <p:cNvPr id="122" name="PlaceHolder 1"/>
           <p:cNvSpPr>
             <a:spLocks noGrp="1"/>
           </p:cNvSpPr>
@@ -16219,7 +16859,7 @@
         <p:spPr>
           <a:xfrm>
             <a:off x="839880" y="457200"/>
-            <a:ext cx="9122040" cy="1599120"/>
+            <a:ext cx="9121680" cy="1598760"/>
           </a:xfrm>
           <a:prstGeom prst="rect">
             <a:avLst/>
@@ -16267,7 +16907,7 @@
       </p:sp>
       <p:sp>
         <p:nvSpPr>
-          <p:cNvPr id="117" name="PlaceHolder 2"/>
+          <p:cNvPr id="123" name="PlaceHolder 2"/>
           <p:cNvSpPr>
             <a:spLocks noGrp="1"/>
           </p:cNvSpPr>
@@ -16278,7 +16918,7 @@
         <p:spPr>
           <a:xfrm>
             <a:off x="839880" y="2057400"/>
-            <a:ext cx="10875960" cy="3810600"/>
+            <a:ext cx="10875600" cy="3810240"/>
           </a:xfrm>
           <a:prstGeom prst="rect">
             <a:avLst/>
@@ -16454,7 +17094,7 @@
             <a:spLocks noGrp="1"/>
           </p:cNvSpPr>
           <p:nvPr>
-            <p:ph type="ftr" idx="13"/>
+            <p:ph type="ftr" idx="15"/>
           </p:nvPr>
         </p:nvSpPr>
         <p:spPr/>
@@ -16474,14 +17114,14 @@
             <a:spLocks noGrp="1"/>
           </p:cNvSpPr>
           <p:nvPr>
-            <p:ph type="sldNum" idx="14"/>
+            <p:ph type="sldNum" idx="16"/>
           </p:nvPr>
         </p:nvSpPr>
         <p:spPr/>
         <p:txBody>
           <a:bodyPr/>
           <a:p>
-            <a:fld id="{75CE251E-852A-4488-8FC3-E7B5D969C01E}" type="slidenum">
+            <a:fld id="{3F24EF70-B78E-451F-A46E-A72B450F1BCD}" type="slidenum">
               <a:t>35</a:t>
             </a:fld>
           </a:p>
@@ -16519,7 +17159,7 @@
       </p:grpSpPr>
       <p:sp>
         <p:nvSpPr>
-          <p:cNvPr id="118" name="PlaceHolder 1"/>
+          <p:cNvPr id="124" name="PlaceHolder 1"/>
           <p:cNvSpPr>
             <a:spLocks noGrp="1"/>
           </p:cNvSpPr>
@@ -16530,7 +17170,7 @@
         <p:spPr>
           <a:xfrm>
             <a:off x="831960" y="1709640"/>
-            <a:ext cx="10514520" cy="2851560"/>
+            <a:ext cx="10514160" cy="2851200"/>
           </a:xfrm>
           <a:prstGeom prst="rect">
             <a:avLst/>
@@ -16578,7 +17218,7 @@
       </p:sp>
       <p:sp>
         <p:nvSpPr>
-          <p:cNvPr id="119" name="PlaceHolder 2"/>
+          <p:cNvPr id="125" name="PlaceHolder 2"/>
           <p:cNvSpPr>
             <a:spLocks noGrp="1"/>
           </p:cNvSpPr>
@@ -16589,7 +17229,7 @@
         <p:spPr>
           <a:xfrm>
             <a:off x="831960" y="4589640"/>
-            <a:ext cx="10514520" cy="1499040"/>
+            <a:ext cx="10514160" cy="1498680"/>
           </a:xfrm>
           <a:prstGeom prst="rect">
             <a:avLst/>
@@ -16628,7 +17268,7 @@
             <a:spLocks noGrp="1"/>
           </p:cNvSpPr>
           <p:nvPr>
-            <p:ph type="ftr" idx="10"/>
+            <p:ph type="ftr" idx="12"/>
           </p:nvPr>
         </p:nvSpPr>
         <p:spPr/>
@@ -16648,14 +17288,14 @@
             <a:spLocks noGrp="1"/>
           </p:cNvSpPr>
           <p:nvPr>
-            <p:ph type="sldNum" idx="11"/>
+            <p:ph type="sldNum" idx="13"/>
           </p:nvPr>
         </p:nvSpPr>
         <p:spPr/>
         <p:txBody>
           <a:bodyPr/>
           <a:p>
-            <a:fld id="{9E135EDC-6244-4654-AA56-5A1A2936B54D}" type="slidenum">
+            <a:fld id="{17191735-E579-4B46-9CDB-233A299FBE39}" type="slidenum">
               <a:t>36</a:t>
             </a:fld>
           </a:p>
@@ -16693,7 +17333,7 @@
       </p:grpSpPr>
       <p:sp>
         <p:nvSpPr>
-          <p:cNvPr id="120" name="PlaceHolder 1"/>
+          <p:cNvPr id="126" name="PlaceHolder 1"/>
           <p:cNvSpPr>
             <a:spLocks noGrp="1"/>
           </p:cNvSpPr>
@@ -16704,7 +17344,7 @@
         <p:spPr>
           <a:xfrm>
             <a:off x="838080" y="365040"/>
-            <a:ext cx="10514520" cy="1324440"/>
+            <a:ext cx="10514160" cy="1324080"/>
           </a:xfrm>
           <a:prstGeom prst="rect">
             <a:avLst/>
@@ -16752,7 +17392,7 @@
       </p:sp>
       <p:sp>
         <p:nvSpPr>
-          <p:cNvPr id="121" name="PlaceHolder 2"/>
+          <p:cNvPr id="127" name="PlaceHolder 2"/>
           <p:cNvSpPr>
             <a:spLocks noGrp="1"/>
           </p:cNvSpPr>
@@ -16763,7 +17403,7 @@
         <p:spPr>
           <a:xfrm>
             <a:off x="838080" y="1825560"/>
-            <a:ext cx="10514520" cy="4350240"/>
+            <a:ext cx="10514160" cy="4349880"/>
           </a:xfrm>
           <a:prstGeom prst="rect">
             <a:avLst/>
@@ -16854,7 +17494,7 @@
             <a:spLocks noGrp="1"/>
           </p:cNvSpPr>
           <p:nvPr>
-            <p:ph type="ftr" idx="7"/>
+            <p:ph type="ftr" idx="9"/>
           </p:nvPr>
         </p:nvSpPr>
         <p:spPr/>
@@ -16874,14 +17514,14 @@
             <a:spLocks noGrp="1"/>
           </p:cNvSpPr>
           <p:nvPr>
-            <p:ph type="sldNum" idx="8"/>
+            <p:ph type="sldNum" idx="10"/>
           </p:nvPr>
         </p:nvSpPr>
         <p:spPr/>
         <p:txBody>
           <a:bodyPr/>
           <a:p>
-            <a:fld id="{D4DDFC61-4483-4DC4-A69C-AB44D846C2AF}" type="slidenum">
+            <a:fld id="{0FDA0F67-8621-4429-B27F-9701B31FE3C9}" type="slidenum">
               <a:t>37</a:t>
             </a:fld>
           </a:p>
@@ -16919,7 +17559,7 @@
       </p:grpSpPr>
       <p:sp>
         <p:nvSpPr>
-          <p:cNvPr id="122" name="PlaceHolder 1"/>
+          <p:cNvPr id="128" name="PlaceHolder 1"/>
           <p:cNvSpPr>
             <a:spLocks noGrp="1"/>
           </p:cNvSpPr>
@@ -16930,7 +17570,7 @@
         <p:spPr>
           <a:xfrm>
             <a:off x="838080" y="365040"/>
-            <a:ext cx="10514520" cy="1324440"/>
+            <a:ext cx="10514160" cy="1324080"/>
           </a:xfrm>
           <a:prstGeom prst="rect">
             <a:avLst/>
@@ -16978,7 +17618,7 @@
       </p:sp>
       <p:sp>
         <p:nvSpPr>
-          <p:cNvPr id="123" name="PlaceHolder 2"/>
+          <p:cNvPr id="129" name="PlaceHolder 2"/>
           <p:cNvSpPr>
             <a:spLocks noGrp="1"/>
           </p:cNvSpPr>
@@ -16989,7 +17629,7 @@
         <p:spPr>
           <a:xfrm>
             <a:off x="838080" y="1825560"/>
-            <a:ext cx="10514520" cy="4350240"/>
+            <a:ext cx="10514160" cy="4349880"/>
           </a:xfrm>
           <a:prstGeom prst="rect">
             <a:avLst/>
@@ -17102,7 +17742,7 @@
             <a:spLocks noGrp="1"/>
           </p:cNvSpPr>
           <p:nvPr>
-            <p:ph type="ftr" idx="7"/>
+            <p:ph type="ftr" idx="9"/>
           </p:nvPr>
         </p:nvSpPr>
         <p:spPr/>
@@ -17122,14 +17762,14 @@
             <a:spLocks noGrp="1"/>
           </p:cNvSpPr>
           <p:nvPr>
-            <p:ph type="sldNum" idx="8"/>
+            <p:ph type="sldNum" idx="10"/>
           </p:nvPr>
         </p:nvSpPr>
         <p:spPr/>
         <p:txBody>
           <a:bodyPr/>
           <a:p>
-            <a:fld id="{E560E3B3-0E97-4F4D-8285-E6714A6F93E4}" type="slidenum">
+            <a:fld id="{4BC61087-8D6E-4EFB-88D6-0588407ABE69}" type="slidenum">
               <a:t>38</a:t>
             </a:fld>
           </a:p>
@@ -17167,7 +17807,7 @@
       </p:grpSpPr>
       <p:sp>
         <p:nvSpPr>
-          <p:cNvPr id="124" name="PlaceHolder 1"/>
+          <p:cNvPr id="130" name="PlaceHolder 1"/>
           <p:cNvSpPr>
             <a:spLocks noGrp="1"/>
           </p:cNvSpPr>
@@ -17178,7 +17818,7 @@
         <p:spPr>
           <a:xfrm>
             <a:off x="838080" y="365040"/>
-            <a:ext cx="10514520" cy="1324440"/>
+            <a:ext cx="10514160" cy="1324080"/>
           </a:xfrm>
           <a:prstGeom prst="rect">
             <a:avLst/>
@@ -17226,7 +17866,7 @@
       </p:sp>
       <p:sp>
         <p:nvSpPr>
-          <p:cNvPr id="125" name="PlaceHolder 2"/>
+          <p:cNvPr id="131" name="PlaceHolder 2"/>
           <p:cNvSpPr>
             <a:spLocks noGrp="1"/>
           </p:cNvSpPr>
@@ -17237,7 +17877,7 @@
         <p:spPr>
           <a:xfrm>
             <a:off x="838080" y="1825560"/>
-            <a:ext cx="10514520" cy="4350240"/>
+            <a:ext cx="10514160" cy="4349880"/>
           </a:xfrm>
           <a:prstGeom prst="rect">
             <a:avLst/>
@@ -17634,7 +18274,7 @@
             <a:spLocks noGrp="1"/>
           </p:cNvSpPr>
           <p:nvPr>
-            <p:ph type="ftr" idx="7"/>
+            <p:ph type="ftr" idx="9"/>
           </p:nvPr>
         </p:nvSpPr>
         <p:spPr/>
@@ -17654,14 +18294,14 @@
             <a:spLocks noGrp="1"/>
           </p:cNvSpPr>
           <p:nvPr>
-            <p:ph type="sldNum" idx="8"/>
+            <p:ph type="sldNum" idx="10"/>
           </p:nvPr>
         </p:nvSpPr>
         <p:spPr/>
         <p:txBody>
           <a:bodyPr/>
           <a:p>
-            <a:fld id="{8922E362-7BB2-44B5-ABA7-E5F73B6751A7}" type="slidenum">
+            <a:fld id="{D9522008-9250-4A04-BFDB-44B46A46A937}" type="slidenum">
               <a:t>39</a:t>
             </a:fld>
           </a:p>
@@ -17699,7 +18339,7 @@
       </p:grpSpPr>
       <p:sp>
         <p:nvSpPr>
-          <p:cNvPr id="52" name="PlaceHolder 1"/>
+          <p:cNvPr id="58" name="PlaceHolder 1"/>
           <p:cNvSpPr>
             <a:spLocks noGrp="1"/>
           </p:cNvSpPr>
@@ -17710,7 +18350,7 @@
         <p:spPr>
           <a:xfrm>
             <a:off x="838080" y="365040"/>
-            <a:ext cx="10514520" cy="1324440"/>
+            <a:ext cx="10514160" cy="1324080"/>
           </a:xfrm>
           <a:prstGeom prst="rect">
             <a:avLst/>
@@ -17758,7 +18398,7 @@
       </p:sp>
       <p:sp>
         <p:nvSpPr>
-          <p:cNvPr id="53" name="PlaceHolder 2"/>
+          <p:cNvPr id="59" name="PlaceHolder 2"/>
           <p:cNvSpPr>
             <a:spLocks noGrp="1"/>
           </p:cNvSpPr>
@@ -17769,7 +18409,7 @@
         <p:spPr>
           <a:xfrm>
             <a:off x="838080" y="1825560"/>
-            <a:ext cx="10514520" cy="4350240"/>
+            <a:ext cx="10514160" cy="4349880"/>
           </a:xfrm>
           <a:prstGeom prst="rect">
             <a:avLst/>
@@ -18166,7 +18806,7 @@
             <a:spLocks noGrp="1"/>
           </p:cNvSpPr>
           <p:nvPr>
-            <p:ph type="ftr" idx="7"/>
+            <p:ph type="ftr" idx="9"/>
           </p:nvPr>
         </p:nvSpPr>
         <p:spPr/>
@@ -18186,14 +18826,14 @@
             <a:spLocks noGrp="1"/>
           </p:cNvSpPr>
           <p:nvPr>
-            <p:ph type="sldNum" idx="8"/>
+            <p:ph type="sldNum" idx="10"/>
           </p:nvPr>
         </p:nvSpPr>
         <p:spPr/>
         <p:txBody>
           <a:bodyPr/>
           <a:p>
-            <a:fld id="{93C2018E-A826-43E7-899E-3F245101CAD7}" type="slidenum">
+            <a:fld id="{9B8E1570-EED6-4D0B-80A1-B7E738BA8173}" type="slidenum">
               <a:t>4</a:t>
             </a:fld>
           </a:p>
@@ -18231,7 +18871,7 @@
       </p:grpSpPr>
       <p:sp>
         <p:nvSpPr>
-          <p:cNvPr id="126" name="PlaceHolder 1"/>
+          <p:cNvPr id="132" name="PlaceHolder 1"/>
           <p:cNvSpPr>
             <a:spLocks noGrp="1"/>
           </p:cNvSpPr>
@@ -18242,7 +18882,7 @@
         <p:spPr>
           <a:xfrm>
             <a:off x="838080" y="365040"/>
-            <a:ext cx="10514520" cy="1324440"/>
+            <a:ext cx="10514160" cy="1324080"/>
           </a:xfrm>
           <a:prstGeom prst="rect">
             <a:avLst/>
@@ -18290,7 +18930,7 @@
       </p:sp>
       <p:sp>
         <p:nvSpPr>
-          <p:cNvPr id="127" name="PlaceHolder 2"/>
+          <p:cNvPr id="133" name="PlaceHolder 2"/>
           <p:cNvSpPr>
             <a:spLocks noGrp="1"/>
           </p:cNvSpPr>
@@ -18301,7 +18941,7 @@
         <p:spPr>
           <a:xfrm>
             <a:off x="838080" y="1825560"/>
-            <a:ext cx="10514520" cy="4350240"/>
+            <a:ext cx="10514160" cy="4349880"/>
           </a:xfrm>
           <a:prstGeom prst="rect">
             <a:avLst/>
@@ -18504,7 +19144,7 @@
             <a:spLocks noGrp="1"/>
           </p:cNvSpPr>
           <p:nvPr>
-            <p:ph type="ftr" idx="7"/>
+            <p:ph type="ftr" idx="9"/>
           </p:nvPr>
         </p:nvSpPr>
         <p:spPr/>
@@ -18524,14 +19164,14 @@
             <a:spLocks noGrp="1"/>
           </p:cNvSpPr>
           <p:nvPr>
-            <p:ph type="sldNum" idx="8"/>
+            <p:ph type="sldNum" idx="10"/>
           </p:nvPr>
         </p:nvSpPr>
         <p:spPr/>
         <p:txBody>
           <a:bodyPr/>
           <a:p>
-            <a:fld id="{B28C8F73-11A6-4CBB-995F-D10A24BC4CBD}" type="slidenum">
+            <a:fld id="{557709D4-68C3-47E5-AB4A-8093C78526E4}" type="slidenum">
               <a:t>40</a:t>
             </a:fld>
           </a:p>
@@ -18569,7 +19209,7 @@
       </p:grpSpPr>
       <p:sp>
         <p:nvSpPr>
-          <p:cNvPr id="128" name="PlaceHolder 1"/>
+          <p:cNvPr id="134" name="PlaceHolder 1"/>
           <p:cNvSpPr>
             <a:spLocks noGrp="1"/>
           </p:cNvSpPr>
@@ -18580,7 +19220,7 @@
         <p:spPr>
           <a:xfrm>
             <a:off x="839880" y="457200"/>
-            <a:ext cx="9122040" cy="1599120"/>
+            <a:ext cx="9121680" cy="1598760"/>
           </a:xfrm>
           <a:prstGeom prst="rect">
             <a:avLst/>
@@ -18628,7 +19268,7 @@
       </p:sp>
       <p:sp>
         <p:nvSpPr>
-          <p:cNvPr id="129" name="PlaceHolder 2"/>
+          <p:cNvPr id="135" name="PlaceHolder 2"/>
           <p:cNvSpPr>
             <a:spLocks noGrp="1"/>
           </p:cNvSpPr>
@@ -18639,7 +19279,7 @@
         <p:spPr>
           <a:xfrm>
             <a:off x="839880" y="2057400"/>
-            <a:ext cx="10875960" cy="3810600"/>
+            <a:ext cx="10875600" cy="3810240"/>
           </a:xfrm>
           <a:prstGeom prst="rect">
             <a:avLst/>
@@ -18793,7 +19433,7 @@
             <a:spLocks noGrp="1"/>
           </p:cNvSpPr>
           <p:nvPr>
-            <p:ph type="ftr" idx="13"/>
+            <p:ph type="ftr" idx="15"/>
           </p:nvPr>
         </p:nvSpPr>
         <p:spPr/>
@@ -18813,14 +19453,14 @@
             <a:spLocks noGrp="1"/>
           </p:cNvSpPr>
           <p:nvPr>
-            <p:ph type="sldNum" idx="14"/>
+            <p:ph type="sldNum" idx="16"/>
           </p:nvPr>
         </p:nvSpPr>
         <p:spPr/>
         <p:txBody>
           <a:bodyPr/>
           <a:p>
-            <a:fld id="{A423DDB3-F189-4D4D-AB71-CC322B1B646B}" type="slidenum">
+            <a:fld id="{A17DDD44-EE4E-4BD2-A88F-7F5DFD9DC2C6}" type="slidenum">
               <a:t>41</a:t>
             </a:fld>
           </a:p>
@@ -18858,7 +19498,7 @@
       </p:grpSpPr>
       <p:sp>
         <p:nvSpPr>
-          <p:cNvPr id="130" name="PlaceHolder 1"/>
+          <p:cNvPr id="136" name="PlaceHolder 1"/>
           <p:cNvSpPr>
             <a:spLocks noGrp="1"/>
           </p:cNvSpPr>
@@ -18869,7 +19509,7 @@
         <p:spPr>
           <a:xfrm>
             <a:off x="831960" y="1709640"/>
-            <a:ext cx="10514520" cy="2851560"/>
+            <a:ext cx="10514160" cy="2851200"/>
           </a:xfrm>
           <a:prstGeom prst="rect">
             <a:avLst/>
@@ -18917,7 +19557,7 @@
       </p:sp>
       <p:sp>
         <p:nvSpPr>
-          <p:cNvPr id="131" name="PlaceHolder 2"/>
+          <p:cNvPr id="137" name="PlaceHolder 2"/>
           <p:cNvSpPr>
             <a:spLocks noGrp="1"/>
           </p:cNvSpPr>
@@ -18928,7 +19568,7 @@
         <p:spPr>
           <a:xfrm>
             <a:off x="831960" y="4589640"/>
-            <a:ext cx="10514520" cy="1499040"/>
+            <a:ext cx="10514160" cy="1498680"/>
           </a:xfrm>
           <a:prstGeom prst="rect">
             <a:avLst/>
@@ -18967,7 +19607,7 @@
             <a:spLocks noGrp="1"/>
           </p:cNvSpPr>
           <p:nvPr>
-            <p:ph type="ftr" idx="10"/>
+            <p:ph type="ftr" idx="12"/>
           </p:nvPr>
         </p:nvSpPr>
         <p:spPr/>
@@ -18987,14 +19627,14 @@
             <a:spLocks noGrp="1"/>
           </p:cNvSpPr>
           <p:nvPr>
-            <p:ph type="sldNum" idx="11"/>
+            <p:ph type="sldNum" idx="13"/>
           </p:nvPr>
         </p:nvSpPr>
         <p:spPr/>
         <p:txBody>
           <a:bodyPr/>
           <a:p>
-            <a:fld id="{09C9B912-29F8-4E88-9E22-FC27619543CA}" type="slidenum">
+            <a:fld id="{FB8B05F7-D906-4B6A-92CE-5978440E4040}" type="slidenum">
               <a:t>42</a:t>
             </a:fld>
           </a:p>
@@ -19032,7 +19672,7 @@
       </p:grpSpPr>
       <p:sp>
         <p:nvSpPr>
-          <p:cNvPr id="132" name="PlaceHolder 1"/>
+          <p:cNvPr id="138" name="PlaceHolder 1"/>
           <p:cNvSpPr>
             <a:spLocks noGrp="1"/>
           </p:cNvSpPr>
@@ -19043,7 +19683,7 @@
         <p:spPr>
           <a:xfrm>
             <a:off x="838080" y="365040"/>
-            <a:ext cx="10514520" cy="1324440"/>
+            <a:ext cx="10514160" cy="1324080"/>
           </a:xfrm>
           <a:prstGeom prst="rect">
             <a:avLst/>
@@ -19091,7 +19731,7 @@
       </p:sp>
       <p:sp>
         <p:nvSpPr>
-          <p:cNvPr id="133" name="PlaceHolder 2"/>
+          <p:cNvPr id="139" name="PlaceHolder 2"/>
           <p:cNvSpPr>
             <a:spLocks noGrp="1"/>
           </p:cNvSpPr>
@@ -19102,7 +19742,7 @@
         <p:spPr>
           <a:xfrm>
             <a:off x="838080" y="1825560"/>
-            <a:ext cx="10514520" cy="4350240"/>
+            <a:ext cx="10514160" cy="4349880"/>
           </a:xfrm>
           <a:prstGeom prst="rect">
             <a:avLst/>
@@ -19385,7 +20025,7 @@
             <a:spLocks noGrp="1"/>
           </p:cNvSpPr>
           <p:nvPr>
-            <p:ph type="ftr" idx="7"/>
+            <p:ph type="ftr" idx="9"/>
           </p:nvPr>
         </p:nvSpPr>
         <p:spPr/>
@@ -19405,14 +20045,14 @@
             <a:spLocks noGrp="1"/>
           </p:cNvSpPr>
           <p:nvPr>
-            <p:ph type="sldNum" idx="8"/>
+            <p:ph type="sldNum" idx="10"/>
           </p:nvPr>
         </p:nvSpPr>
         <p:spPr/>
         <p:txBody>
           <a:bodyPr/>
           <a:p>
-            <a:fld id="{AEC4EA4D-C2BC-4EEA-B17C-5501FC1C0DD5}" type="slidenum">
+            <a:fld id="{43E3DA71-A893-4997-91C1-60D1D486D7D0}" type="slidenum">
               <a:t>43</a:t>
             </a:fld>
           </a:p>
@@ -19450,7 +20090,7 @@
       </p:grpSpPr>
       <p:sp>
         <p:nvSpPr>
-          <p:cNvPr id="134" name="PlaceHolder 1"/>
+          <p:cNvPr id="140" name="PlaceHolder 1"/>
           <p:cNvSpPr>
             <a:spLocks noGrp="1"/>
           </p:cNvSpPr>
@@ -19461,7 +20101,7 @@
         <p:spPr>
           <a:xfrm>
             <a:off x="838080" y="365040"/>
-            <a:ext cx="10514520" cy="1324440"/>
+            <a:ext cx="10514160" cy="1324080"/>
           </a:xfrm>
           <a:prstGeom prst="rect">
             <a:avLst/>
@@ -19509,7 +20149,7 @@
       </p:sp>
       <p:sp>
         <p:nvSpPr>
-          <p:cNvPr id="135" name="PlaceHolder 2"/>
+          <p:cNvPr id="141" name="PlaceHolder 2"/>
           <p:cNvSpPr>
             <a:spLocks noGrp="1"/>
           </p:cNvSpPr>
@@ -19520,7 +20160,7 @@
         <p:spPr>
           <a:xfrm>
             <a:off x="838080" y="1825560"/>
-            <a:ext cx="10514520" cy="4350240"/>
+            <a:ext cx="10514160" cy="4349880"/>
           </a:xfrm>
           <a:prstGeom prst="rect">
             <a:avLst/>
@@ -19701,7 +20341,7 @@
             <a:spLocks noGrp="1"/>
           </p:cNvSpPr>
           <p:nvPr>
-            <p:ph type="ftr" idx="7"/>
+            <p:ph type="ftr" idx="9"/>
           </p:nvPr>
         </p:nvSpPr>
         <p:spPr/>
@@ -19721,14 +20361,14 @@
             <a:spLocks noGrp="1"/>
           </p:cNvSpPr>
           <p:nvPr>
-            <p:ph type="sldNum" idx="8"/>
+            <p:ph type="sldNum" idx="10"/>
           </p:nvPr>
         </p:nvSpPr>
         <p:spPr/>
         <p:txBody>
           <a:bodyPr/>
           <a:p>
-            <a:fld id="{9E340CF6-2E08-4C6A-9225-E8450B97FFB5}" type="slidenum">
+            <a:fld id="{59652BC1-907E-45C2-97F6-C27398BCAA0A}" type="slidenum">
               <a:t>44</a:t>
             </a:fld>
           </a:p>
@@ -19766,7 +20406,7 @@
       </p:grpSpPr>
       <p:sp>
         <p:nvSpPr>
-          <p:cNvPr id="136" name="PlaceHolder 1"/>
+          <p:cNvPr id="142" name="PlaceHolder 1"/>
           <p:cNvSpPr>
             <a:spLocks noGrp="1"/>
           </p:cNvSpPr>
@@ -19777,7 +20417,7 @@
         <p:spPr>
           <a:xfrm>
             <a:off x="838080" y="365040"/>
-            <a:ext cx="10514520" cy="1324440"/>
+            <a:ext cx="10514160" cy="1324080"/>
           </a:xfrm>
           <a:prstGeom prst="rect">
             <a:avLst/>
@@ -19825,7 +20465,7 @@
       </p:sp>
       <p:sp>
         <p:nvSpPr>
-          <p:cNvPr id="137" name="PlaceHolder 2"/>
+          <p:cNvPr id="143" name="PlaceHolder 2"/>
           <p:cNvSpPr>
             <a:spLocks noGrp="1"/>
           </p:cNvSpPr>
@@ -19836,7 +20476,7 @@
         <p:spPr>
           <a:xfrm>
             <a:off x="838080" y="1825560"/>
-            <a:ext cx="10514520" cy="4350240"/>
+            <a:ext cx="10514160" cy="4349880"/>
           </a:xfrm>
           <a:prstGeom prst="rect">
             <a:avLst/>
@@ -20121,7 +20761,7 @@
             <a:spLocks noGrp="1"/>
           </p:cNvSpPr>
           <p:nvPr>
-            <p:ph type="ftr" idx="7"/>
+            <p:ph type="ftr" idx="9"/>
           </p:nvPr>
         </p:nvSpPr>
         <p:spPr/>
@@ -20141,14 +20781,14 @@
             <a:spLocks noGrp="1"/>
           </p:cNvSpPr>
           <p:nvPr>
-            <p:ph type="sldNum" idx="8"/>
+            <p:ph type="sldNum" idx="10"/>
           </p:nvPr>
         </p:nvSpPr>
         <p:spPr/>
         <p:txBody>
           <a:bodyPr/>
           <a:p>
-            <a:fld id="{314DD739-754C-4200-8648-6981560589E2}" type="slidenum">
+            <a:fld id="{1A65D799-0B18-4FCA-9410-073DB88383F6}" type="slidenum">
               <a:t>45</a:t>
             </a:fld>
           </a:p>
@@ -20186,7 +20826,7 @@
       </p:grpSpPr>
       <p:sp>
         <p:nvSpPr>
-          <p:cNvPr id="138" name="PlaceHolder 1"/>
+          <p:cNvPr id="144" name="PlaceHolder 1"/>
           <p:cNvSpPr>
             <a:spLocks noGrp="1"/>
           </p:cNvSpPr>
@@ -20197,7 +20837,7 @@
         <p:spPr>
           <a:xfrm>
             <a:off x="838080" y="365040"/>
-            <a:ext cx="10514520" cy="1324440"/>
+            <a:ext cx="10514160" cy="1324080"/>
           </a:xfrm>
           <a:prstGeom prst="rect">
             <a:avLst/>
@@ -20245,7 +20885,7 @@
       </p:sp>
       <p:sp>
         <p:nvSpPr>
-          <p:cNvPr id="139" name="PlaceHolder 2"/>
+          <p:cNvPr id="145" name="PlaceHolder 2"/>
           <p:cNvSpPr>
             <a:spLocks noGrp="1"/>
           </p:cNvSpPr>
@@ -20256,7 +20896,7 @@
         <p:spPr>
           <a:xfrm>
             <a:off x="838080" y="1825560"/>
-            <a:ext cx="10514520" cy="4350240"/>
+            <a:ext cx="10514160" cy="4349880"/>
           </a:xfrm>
           <a:prstGeom prst="rect">
             <a:avLst/>
@@ -20347,7 +20987,7 @@
             <a:spLocks noGrp="1"/>
           </p:cNvSpPr>
           <p:nvPr>
-            <p:ph type="ftr" idx="7"/>
+            <p:ph type="ftr" idx="9"/>
           </p:nvPr>
         </p:nvSpPr>
         <p:spPr/>
@@ -20367,14 +21007,14 @@
             <a:spLocks noGrp="1"/>
           </p:cNvSpPr>
           <p:nvPr>
-            <p:ph type="sldNum" idx="8"/>
+            <p:ph type="sldNum" idx="10"/>
           </p:nvPr>
         </p:nvSpPr>
         <p:spPr/>
         <p:txBody>
           <a:bodyPr/>
           <a:p>
-            <a:fld id="{A70E8287-14CF-4C9D-9062-B5D5E483D805}" type="slidenum">
+            <a:fld id="{23B43B9D-342D-40F3-8204-B52E70D7271D}" type="slidenum">
               <a:t>46</a:t>
             </a:fld>
           </a:p>
@@ -20412,7 +21052,7 @@
       </p:grpSpPr>
       <p:sp>
         <p:nvSpPr>
-          <p:cNvPr id="140" name="PlaceHolder 1"/>
+          <p:cNvPr id="146" name="PlaceHolder 1"/>
           <p:cNvSpPr>
             <a:spLocks noGrp="1"/>
           </p:cNvSpPr>
@@ -20423,7 +21063,7 @@
         <p:spPr>
           <a:xfrm>
             <a:off x="838080" y="365040"/>
-            <a:ext cx="10514520" cy="1324440"/>
+            <a:ext cx="10514160" cy="1324080"/>
           </a:xfrm>
           <a:prstGeom prst="rect">
             <a:avLst/>
@@ -20471,7 +21111,7 @@
       </p:sp>
       <p:sp>
         <p:nvSpPr>
-          <p:cNvPr id="141" name="PlaceHolder 2"/>
+          <p:cNvPr id="147" name="PlaceHolder 2"/>
           <p:cNvSpPr>
             <a:spLocks noGrp="1"/>
           </p:cNvSpPr>
@@ -20482,7 +21122,7 @@
         <p:spPr>
           <a:xfrm>
             <a:off x="838080" y="1825560"/>
-            <a:ext cx="10514520" cy="4350240"/>
+            <a:ext cx="10514160" cy="4349880"/>
           </a:xfrm>
           <a:prstGeom prst="rect">
             <a:avLst/>
@@ -20845,7 +21485,7 @@
             <a:spLocks noGrp="1"/>
           </p:cNvSpPr>
           <p:nvPr>
-            <p:ph type="ftr" idx="7"/>
+            <p:ph type="ftr" idx="9"/>
           </p:nvPr>
         </p:nvSpPr>
         <p:spPr/>
@@ -20865,14 +21505,14 @@
             <a:spLocks noGrp="1"/>
           </p:cNvSpPr>
           <p:nvPr>
-            <p:ph type="sldNum" idx="8"/>
+            <p:ph type="sldNum" idx="10"/>
           </p:nvPr>
         </p:nvSpPr>
         <p:spPr/>
         <p:txBody>
           <a:bodyPr/>
           <a:p>
-            <a:fld id="{6D5DC576-C18E-478E-B856-EEF1C4CF6210}" type="slidenum">
+            <a:fld id="{8EC9094E-2F18-4225-A8FD-A7B5989B8460}" type="slidenum">
               <a:t>47</a:t>
             </a:fld>
           </a:p>
@@ -20910,7 +21550,7 @@
       </p:grpSpPr>
       <p:sp>
         <p:nvSpPr>
-          <p:cNvPr id="142" name="PlaceHolder 1"/>
+          <p:cNvPr id="148" name="PlaceHolder 1"/>
           <p:cNvSpPr>
             <a:spLocks noGrp="1"/>
           </p:cNvSpPr>
@@ -20921,7 +21561,7 @@
         <p:spPr>
           <a:xfrm>
             <a:off x="838080" y="365040"/>
-            <a:ext cx="10514520" cy="1324440"/>
+            <a:ext cx="10514160" cy="1324080"/>
           </a:xfrm>
           <a:prstGeom prst="rect">
             <a:avLst/>
@@ -20969,7 +21609,7 @@
       </p:sp>
       <p:sp>
         <p:nvSpPr>
-          <p:cNvPr id="143" name="PlaceHolder 2"/>
+          <p:cNvPr id="149" name="PlaceHolder 2"/>
           <p:cNvSpPr>
             <a:spLocks noGrp="1"/>
           </p:cNvSpPr>
@@ -20980,7 +21620,7 @@
         <p:spPr>
           <a:xfrm>
             <a:off x="838080" y="1825560"/>
-            <a:ext cx="10514520" cy="4350240"/>
+            <a:ext cx="10514160" cy="4349880"/>
           </a:xfrm>
           <a:prstGeom prst="rect">
             <a:avLst/>
@@ -21241,7 +21881,7 @@
             <a:spLocks noGrp="1"/>
           </p:cNvSpPr>
           <p:nvPr>
-            <p:ph type="ftr" idx="7"/>
+            <p:ph type="ftr" idx="9"/>
           </p:nvPr>
         </p:nvSpPr>
         <p:spPr/>
@@ -21261,14 +21901,14 @@
             <a:spLocks noGrp="1"/>
           </p:cNvSpPr>
           <p:nvPr>
-            <p:ph type="sldNum" idx="8"/>
+            <p:ph type="sldNum" idx="10"/>
           </p:nvPr>
         </p:nvSpPr>
         <p:spPr/>
         <p:txBody>
           <a:bodyPr/>
           <a:p>
-            <a:fld id="{5D2997D1-80C7-4BEB-8F51-80923C837948}" type="slidenum">
+            <a:fld id="{19C15D95-29F1-4FA6-99EC-A009551FAD19}" type="slidenum">
               <a:t>48</a:t>
             </a:fld>
           </a:p>
@@ -21306,7 +21946,7 @@
       </p:grpSpPr>
       <p:sp>
         <p:nvSpPr>
-          <p:cNvPr id="144" name="PlaceHolder 1"/>
+          <p:cNvPr id="150" name="PlaceHolder 1"/>
           <p:cNvSpPr>
             <a:spLocks noGrp="1"/>
           </p:cNvSpPr>
@@ -21317,7 +21957,7 @@
         <p:spPr>
           <a:xfrm>
             <a:off x="838080" y="365040"/>
-            <a:ext cx="10514520" cy="1324440"/>
+            <a:ext cx="10514160" cy="1324080"/>
           </a:xfrm>
           <a:prstGeom prst="rect">
             <a:avLst/>
@@ -21365,7 +22005,7 @@
       </p:sp>
       <p:sp>
         <p:nvSpPr>
-          <p:cNvPr id="145" name="PlaceHolder 2"/>
+          <p:cNvPr id="151" name="PlaceHolder 2"/>
           <p:cNvSpPr>
             <a:spLocks noGrp="1"/>
           </p:cNvSpPr>
@@ -21376,7 +22016,7 @@
         <p:spPr>
           <a:xfrm>
             <a:off x="838080" y="1825560"/>
-            <a:ext cx="10514520" cy="4350240"/>
+            <a:ext cx="10514160" cy="4349880"/>
           </a:xfrm>
           <a:prstGeom prst="rect">
             <a:avLst/>
@@ -21501,7 +22141,7 @@
             <a:spLocks noGrp="1"/>
           </p:cNvSpPr>
           <p:nvPr>
-            <p:ph type="ftr" idx="7"/>
+            <p:ph type="ftr" idx="9"/>
           </p:nvPr>
         </p:nvSpPr>
         <p:spPr/>
@@ -21521,14 +22161,14 @@
             <a:spLocks noGrp="1"/>
           </p:cNvSpPr>
           <p:nvPr>
-            <p:ph type="sldNum" idx="8"/>
+            <p:ph type="sldNum" idx="10"/>
           </p:nvPr>
         </p:nvSpPr>
         <p:spPr/>
         <p:txBody>
           <a:bodyPr/>
           <a:p>
-            <a:fld id="{29695BA1-A2A3-4CC1-9601-E61B07DBBCF3}" type="slidenum">
+            <a:fld id="{A0D13FF7-58B4-450E-A13C-0AC06FE7DD02}" type="slidenum">
               <a:t>49</a:t>
             </a:fld>
           </a:p>
@@ -21566,7 +22206,7 @@
       </p:grpSpPr>
       <p:sp>
         <p:nvSpPr>
-          <p:cNvPr id="54" name="PlaceHolder 1"/>
+          <p:cNvPr id="60" name="PlaceHolder 1"/>
           <p:cNvSpPr>
             <a:spLocks noGrp="1"/>
           </p:cNvSpPr>
@@ -21577,7 +22217,7 @@
         <p:spPr>
           <a:xfrm>
             <a:off x="838080" y="365040"/>
-            <a:ext cx="10514520" cy="1324440"/>
+            <a:ext cx="10514160" cy="1324080"/>
           </a:xfrm>
           <a:prstGeom prst="rect">
             <a:avLst/>
@@ -21625,7 +22265,7 @@
       </p:sp>
       <p:sp>
         <p:nvSpPr>
-          <p:cNvPr id="55" name="PlaceHolder 2"/>
+          <p:cNvPr id="61" name="PlaceHolder 2"/>
           <p:cNvSpPr>
             <a:spLocks noGrp="1"/>
           </p:cNvSpPr>
@@ -21636,7 +22276,7 @@
         <p:spPr>
           <a:xfrm>
             <a:off x="838080" y="1825560"/>
-            <a:ext cx="10514520" cy="4350240"/>
+            <a:ext cx="10514160" cy="4349880"/>
           </a:xfrm>
           <a:prstGeom prst="rect">
             <a:avLst/>
@@ -21931,7 +22571,7 @@
             <a:spLocks noGrp="1"/>
           </p:cNvSpPr>
           <p:nvPr>
-            <p:ph type="ftr" idx="7"/>
+            <p:ph type="ftr" idx="9"/>
           </p:nvPr>
         </p:nvSpPr>
         <p:spPr/>
@@ -21951,14 +22591,14 @@
             <a:spLocks noGrp="1"/>
           </p:cNvSpPr>
           <p:nvPr>
-            <p:ph type="sldNum" idx="8"/>
+            <p:ph type="sldNum" idx="10"/>
           </p:nvPr>
         </p:nvSpPr>
         <p:spPr/>
         <p:txBody>
           <a:bodyPr/>
           <a:p>
-            <a:fld id="{300A5F9A-05BF-495F-A704-AF4DF38A7D75}" type="slidenum">
+            <a:fld id="{269030D8-96E2-4B62-B843-0F8A659CE4B9}" type="slidenum">
               <a:t>5</a:t>
             </a:fld>
           </a:p>
@@ -21996,7 +22636,7 @@
       </p:grpSpPr>
       <p:sp>
         <p:nvSpPr>
-          <p:cNvPr id="146" name="PlaceHolder 1"/>
+          <p:cNvPr id="152" name="PlaceHolder 1"/>
           <p:cNvSpPr>
             <a:spLocks noGrp="1"/>
           </p:cNvSpPr>
@@ -22007,7 +22647,7 @@
         <p:spPr>
           <a:xfrm>
             <a:off x="839880" y="457200"/>
-            <a:ext cx="9122040" cy="1599120"/>
+            <a:ext cx="9121680" cy="1598760"/>
           </a:xfrm>
           <a:prstGeom prst="rect">
             <a:avLst/>
@@ -22055,7 +22695,7 @@
       </p:sp>
       <p:sp>
         <p:nvSpPr>
-          <p:cNvPr id="147" name="PlaceHolder 2"/>
+          <p:cNvPr id="153" name="PlaceHolder 2"/>
           <p:cNvSpPr>
             <a:spLocks noGrp="1"/>
           </p:cNvSpPr>
@@ -22066,7 +22706,7 @@
         <p:spPr>
           <a:xfrm>
             <a:off x="839880" y="2057400"/>
-            <a:ext cx="10875960" cy="3810600"/>
+            <a:ext cx="10875600" cy="3810240"/>
           </a:xfrm>
           <a:prstGeom prst="rect">
             <a:avLst/>
@@ -22220,7 +22860,7 @@
             <a:spLocks noGrp="1"/>
           </p:cNvSpPr>
           <p:nvPr>
-            <p:ph type="ftr" idx="13"/>
+            <p:ph type="ftr" idx="15"/>
           </p:nvPr>
         </p:nvSpPr>
         <p:spPr/>
@@ -22240,14 +22880,14 @@
             <a:spLocks noGrp="1"/>
           </p:cNvSpPr>
           <p:nvPr>
-            <p:ph type="sldNum" idx="14"/>
+            <p:ph type="sldNum" idx="16"/>
           </p:nvPr>
         </p:nvSpPr>
         <p:spPr/>
         <p:txBody>
           <a:bodyPr/>
           <a:p>
-            <a:fld id="{3B82D5A1-7F89-4D1D-9C17-4B9B6355B432}" type="slidenum">
+            <a:fld id="{243DA704-E337-4721-8F83-7C862EC5BFA3}" type="slidenum">
               <a:t>50</a:t>
             </a:fld>
           </a:p>
@@ -22285,7 +22925,7 @@
       </p:grpSpPr>
       <p:sp>
         <p:nvSpPr>
-          <p:cNvPr id="148" name="PlaceHolder 1"/>
+          <p:cNvPr id="154" name="PlaceHolder 1"/>
           <p:cNvSpPr>
             <a:spLocks noGrp="1"/>
           </p:cNvSpPr>
@@ -22296,7 +22936,7 @@
         <p:spPr>
           <a:xfrm>
             <a:off x="831960" y="1709640"/>
-            <a:ext cx="10514520" cy="2851560"/>
+            <a:ext cx="10514160" cy="2851200"/>
           </a:xfrm>
           <a:prstGeom prst="rect">
             <a:avLst/>
@@ -22344,7 +22984,7 @@
       </p:sp>
       <p:sp>
         <p:nvSpPr>
-          <p:cNvPr id="149" name="PlaceHolder 2"/>
+          <p:cNvPr id="155" name="PlaceHolder 2"/>
           <p:cNvSpPr>
             <a:spLocks noGrp="1"/>
           </p:cNvSpPr>
@@ -22355,7 +22995,7 @@
         <p:spPr>
           <a:xfrm>
             <a:off x="831960" y="4589640"/>
-            <a:ext cx="10514520" cy="1499040"/>
+            <a:ext cx="10514160" cy="1498680"/>
           </a:xfrm>
           <a:prstGeom prst="rect">
             <a:avLst/>
@@ -22413,7 +23053,7 @@
             <a:spLocks noGrp="1"/>
           </p:cNvSpPr>
           <p:nvPr>
-            <p:ph type="ftr" idx="10"/>
+            <p:ph type="ftr" idx="12"/>
           </p:nvPr>
         </p:nvSpPr>
         <p:spPr/>
@@ -22433,14 +23073,14 @@
             <a:spLocks noGrp="1"/>
           </p:cNvSpPr>
           <p:nvPr>
-            <p:ph type="sldNum" idx="11"/>
+            <p:ph type="sldNum" idx="13"/>
           </p:nvPr>
         </p:nvSpPr>
         <p:spPr/>
         <p:txBody>
           <a:bodyPr/>
           <a:p>
-            <a:fld id="{2DE6DCB0-96AB-43CD-9921-7EA516B1B50A}" type="slidenum">
+            <a:fld id="{D224073A-6F65-4303-A6BF-DB27ADDDC554}" type="slidenum">
               <a:t>51</a:t>
             </a:fld>
           </a:p>
@@ -22478,7 +23118,7 @@
       </p:grpSpPr>
       <p:sp>
         <p:nvSpPr>
-          <p:cNvPr id="150" name="PlaceHolder 1"/>
+          <p:cNvPr id="156" name="PlaceHolder 1"/>
           <p:cNvSpPr>
             <a:spLocks noGrp="1"/>
           </p:cNvSpPr>
@@ -22489,7 +23129,7 @@
         <p:spPr>
           <a:xfrm>
             <a:off x="838080" y="365040"/>
-            <a:ext cx="10514520" cy="1324440"/>
+            <a:ext cx="10514160" cy="1324080"/>
           </a:xfrm>
           <a:prstGeom prst="rect">
             <a:avLst/>
@@ -22537,7 +23177,7 @@
       </p:sp>
       <p:sp>
         <p:nvSpPr>
-          <p:cNvPr id="151" name="PlaceHolder 2"/>
+          <p:cNvPr id="157" name="PlaceHolder 2"/>
           <p:cNvSpPr>
             <a:spLocks noGrp="1"/>
           </p:cNvSpPr>
@@ -22548,7 +23188,7 @@
         <p:spPr>
           <a:xfrm>
             <a:off x="838080" y="1825560"/>
-            <a:ext cx="10514520" cy="4350240"/>
+            <a:ext cx="10514160" cy="4349880"/>
           </a:xfrm>
           <a:prstGeom prst="rect">
             <a:avLst/>
@@ -22639,7 +23279,7 @@
             <a:spLocks noGrp="1"/>
           </p:cNvSpPr>
           <p:nvPr>
-            <p:ph type="ftr" idx="7"/>
+            <p:ph type="ftr" idx="9"/>
           </p:nvPr>
         </p:nvSpPr>
         <p:spPr/>
@@ -22659,14 +23299,14 @@
             <a:spLocks noGrp="1"/>
           </p:cNvSpPr>
           <p:nvPr>
-            <p:ph type="sldNum" idx="8"/>
+            <p:ph type="sldNum" idx="10"/>
           </p:nvPr>
         </p:nvSpPr>
         <p:spPr/>
         <p:txBody>
           <a:bodyPr/>
           <a:p>
-            <a:fld id="{3CFA144D-3C7B-423E-BB10-C70D007B7496}" type="slidenum">
+            <a:fld id="{CCE2D552-9EA1-4385-8AF1-7CF9155E9CB6}" type="slidenum">
               <a:t>52</a:t>
             </a:fld>
           </a:p>
@@ -22704,7 +23344,7 @@
       </p:grpSpPr>
       <p:sp>
         <p:nvSpPr>
-          <p:cNvPr id="152" name="PlaceHolder 1"/>
+          <p:cNvPr id="158" name="PlaceHolder 1"/>
           <p:cNvSpPr>
             <a:spLocks noGrp="1"/>
           </p:cNvSpPr>
@@ -22715,7 +23355,7 @@
         <p:spPr>
           <a:xfrm>
             <a:off x="838080" y="365040"/>
-            <a:ext cx="10514520" cy="1324440"/>
+            <a:ext cx="10514160" cy="1324080"/>
           </a:xfrm>
           <a:prstGeom prst="rect">
             <a:avLst/>
@@ -22763,7 +23403,7 @@
       </p:sp>
       <p:sp>
         <p:nvSpPr>
-          <p:cNvPr id="153" name="PlaceHolder 2"/>
+          <p:cNvPr id="159" name="PlaceHolder 2"/>
           <p:cNvSpPr>
             <a:spLocks noGrp="1"/>
           </p:cNvSpPr>
@@ -22774,7 +23414,7 @@
         <p:spPr>
           <a:xfrm>
             <a:off x="838080" y="1825560"/>
-            <a:ext cx="10514520" cy="4350240"/>
+            <a:ext cx="10514160" cy="4349880"/>
           </a:xfrm>
           <a:prstGeom prst="rect">
             <a:avLst/>
@@ -23063,7 +23703,7 @@
             <a:spLocks noGrp="1"/>
           </p:cNvSpPr>
           <p:nvPr>
-            <p:ph type="ftr" idx="7"/>
+            <p:ph type="ftr" idx="9"/>
           </p:nvPr>
         </p:nvSpPr>
         <p:spPr/>
@@ -23083,14 +23723,14 @@
             <a:spLocks noGrp="1"/>
           </p:cNvSpPr>
           <p:nvPr>
-            <p:ph type="sldNum" idx="8"/>
+            <p:ph type="sldNum" idx="10"/>
           </p:nvPr>
         </p:nvSpPr>
         <p:spPr/>
         <p:txBody>
           <a:bodyPr/>
           <a:p>
-            <a:fld id="{9C8C43E4-CF5F-46F6-B646-1BA21F27819F}" type="slidenum">
+            <a:fld id="{DEEEADC1-8D25-4906-ACC4-96CB6ED44D59}" type="slidenum">
               <a:t>53</a:t>
             </a:fld>
           </a:p>
@@ -23128,7 +23768,7 @@
       </p:grpSpPr>
       <p:sp>
         <p:nvSpPr>
-          <p:cNvPr id="154" name="PlaceHolder 1"/>
+          <p:cNvPr id="160" name="PlaceHolder 1"/>
           <p:cNvSpPr>
             <a:spLocks noGrp="1"/>
           </p:cNvSpPr>
@@ -23139,7 +23779,7 @@
         <p:spPr>
           <a:xfrm>
             <a:off x="838080" y="365040"/>
-            <a:ext cx="10514520" cy="1324440"/>
+            <a:ext cx="10514160" cy="1324080"/>
           </a:xfrm>
           <a:prstGeom prst="rect">
             <a:avLst/>
@@ -23187,7 +23827,7 @@
       </p:sp>
       <p:sp>
         <p:nvSpPr>
-          <p:cNvPr id="155" name="PlaceHolder 2"/>
+          <p:cNvPr id="161" name="PlaceHolder 2"/>
           <p:cNvSpPr>
             <a:spLocks noGrp="1"/>
           </p:cNvSpPr>
@@ -23198,7 +23838,7 @@
         <p:spPr>
           <a:xfrm>
             <a:off x="838080" y="1825560"/>
-            <a:ext cx="10514520" cy="4350240"/>
+            <a:ext cx="10514160" cy="4349880"/>
           </a:xfrm>
           <a:prstGeom prst="rect">
             <a:avLst/>
@@ -23425,7 +24065,7 @@
             <a:spLocks noGrp="1"/>
           </p:cNvSpPr>
           <p:nvPr>
-            <p:ph type="ftr" idx="7"/>
+            <p:ph type="ftr" idx="9"/>
           </p:nvPr>
         </p:nvSpPr>
         <p:spPr/>
@@ -23445,14 +24085,14 @@
             <a:spLocks noGrp="1"/>
           </p:cNvSpPr>
           <p:nvPr>
-            <p:ph type="sldNum" idx="8"/>
+            <p:ph type="sldNum" idx="10"/>
           </p:nvPr>
         </p:nvSpPr>
         <p:spPr/>
         <p:txBody>
           <a:bodyPr/>
           <a:p>
-            <a:fld id="{875C31B3-1DFD-4E14-8375-8AA75DD2C843}" type="slidenum">
+            <a:fld id="{7BD4D446-F14F-4ACC-BD82-4C41C7C6FD0C}" type="slidenum">
               <a:t>54</a:t>
             </a:fld>
           </a:p>
@@ -23490,7 +24130,7 @@
       </p:grpSpPr>
       <p:sp>
         <p:nvSpPr>
-          <p:cNvPr id="156" name="PlaceHolder 1"/>
+          <p:cNvPr id="162" name="PlaceHolder 1"/>
           <p:cNvSpPr>
             <a:spLocks noGrp="1"/>
           </p:cNvSpPr>
@@ -23501,7 +24141,7 @@
         <p:spPr>
           <a:xfrm>
             <a:off x="838080" y="365040"/>
-            <a:ext cx="10514520" cy="1324440"/>
+            <a:ext cx="10514160" cy="1324080"/>
           </a:xfrm>
           <a:prstGeom prst="rect">
             <a:avLst/>
@@ -23549,7 +24189,7 @@
       </p:sp>
       <p:sp>
         <p:nvSpPr>
-          <p:cNvPr id="157" name="PlaceHolder 2"/>
+          <p:cNvPr id="163" name="PlaceHolder 2"/>
           <p:cNvSpPr>
             <a:spLocks noGrp="1"/>
           </p:cNvSpPr>
@@ -23560,7 +24200,7 @@
         <p:spPr>
           <a:xfrm>
             <a:off x="838080" y="1825560"/>
-            <a:ext cx="10514520" cy="4350240"/>
+            <a:ext cx="10514160" cy="4349880"/>
           </a:xfrm>
           <a:prstGeom prst="rect">
             <a:avLst/>
@@ -23719,7 +24359,7 @@
             <a:spLocks noGrp="1"/>
           </p:cNvSpPr>
           <p:nvPr>
-            <p:ph type="ftr" idx="7"/>
+            <p:ph type="ftr" idx="9"/>
           </p:nvPr>
         </p:nvSpPr>
         <p:spPr/>
@@ -23739,14 +24379,14 @@
             <a:spLocks noGrp="1"/>
           </p:cNvSpPr>
           <p:nvPr>
-            <p:ph type="sldNum" idx="8"/>
+            <p:ph type="sldNum" idx="10"/>
           </p:nvPr>
         </p:nvSpPr>
         <p:spPr/>
         <p:txBody>
           <a:bodyPr/>
           <a:p>
-            <a:fld id="{24AF5020-AF72-48F5-B78B-B34E6481BA9D}" type="slidenum">
+            <a:fld id="{6619BC5C-9EE9-4004-B331-69315FC3B19F}" type="slidenum">
               <a:t>55</a:t>
             </a:fld>
           </a:p>
@@ -23784,7 +24424,7 @@
       </p:grpSpPr>
       <p:sp>
         <p:nvSpPr>
-          <p:cNvPr id="158" name="PlaceHolder 1"/>
+          <p:cNvPr id="164" name="PlaceHolder 1"/>
           <p:cNvSpPr>
             <a:spLocks noGrp="1"/>
           </p:cNvSpPr>
@@ -23795,7 +24435,7 @@
         <p:spPr>
           <a:xfrm>
             <a:off x="839880" y="457200"/>
-            <a:ext cx="9122040" cy="1599120"/>
+            <a:ext cx="9121680" cy="1598760"/>
           </a:xfrm>
           <a:prstGeom prst="rect">
             <a:avLst/>
@@ -23843,7 +24483,7 @@
       </p:sp>
       <p:sp>
         <p:nvSpPr>
-          <p:cNvPr id="159" name="PlaceHolder 2"/>
+          <p:cNvPr id="165" name="PlaceHolder 2"/>
           <p:cNvSpPr>
             <a:spLocks noGrp="1"/>
           </p:cNvSpPr>
@@ -23854,7 +24494,7 @@
         <p:spPr>
           <a:xfrm>
             <a:off x="839880" y="2057400"/>
-            <a:ext cx="10875960" cy="3810600"/>
+            <a:ext cx="10875600" cy="3810240"/>
           </a:xfrm>
           <a:prstGeom prst="rect">
             <a:avLst/>
@@ -24008,7 +24648,7 @@
             <a:spLocks noGrp="1"/>
           </p:cNvSpPr>
           <p:nvPr>
-            <p:ph type="ftr" idx="13"/>
+            <p:ph type="ftr" idx="15"/>
           </p:nvPr>
         </p:nvSpPr>
         <p:spPr/>
@@ -24028,14 +24668,14 @@
             <a:spLocks noGrp="1"/>
           </p:cNvSpPr>
           <p:nvPr>
-            <p:ph type="sldNum" idx="14"/>
+            <p:ph type="sldNum" idx="16"/>
           </p:nvPr>
         </p:nvSpPr>
         <p:spPr/>
         <p:txBody>
           <a:bodyPr/>
           <a:p>
-            <a:fld id="{F264217A-C022-4A6F-8039-87CEEC3E39A2}" type="slidenum">
+            <a:fld id="{87582DD7-4B3C-46FE-981B-0DF397CA553E}" type="slidenum">
               <a:t>56</a:t>
             </a:fld>
           </a:p>
@@ -24073,7 +24713,7 @@
       </p:grpSpPr>
       <p:sp>
         <p:nvSpPr>
-          <p:cNvPr id="160" name="PlaceHolder 1"/>
+          <p:cNvPr id="166" name="PlaceHolder 1"/>
           <p:cNvSpPr>
             <a:spLocks noGrp="1"/>
           </p:cNvSpPr>
@@ -24084,7 +24724,7 @@
         <p:spPr>
           <a:xfrm>
             <a:off x="831960" y="1709640"/>
-            <a:ext cx="10514520" cy="2851560"/>
+            <a:ext cx="10514160" cy="2851200"/>
           </a:xfrm>
           <a:prstGeom prst="rect">
             <a:avLst/>
@@ -24132,7 +24772,7 @@
       </p:sp>
       <p:sp>
         <p:nvSpPr>
-          <p:cNvPr id="161" name="PlaceHolder 2"/>
+          <p:cNvPr id="167" name="PlaceHolder 2"/>
           <p:cNvSpPr>
             <a:spLocks noGrp="1"/>
           </p:cNvSpPr>
@@ -24143,7 +24783,7 @@
         <p:spPr>
           <a:xfrm>
             <a:off x="831960" y="4589640"/>
-            <a:ext cx="10514520" cy="1499040"/>
+            <a:ext cx="10514160" cy="1498680"/>
           </a:xfrm>
           <a:prstGeom prst="rect">
             <a:avLst/>
@@ -24182,7 +24822,7 @@
             <a:spLocks noGrp="1"/>
           </p:cNvSpPr>
           <p:nvPr>
-            <p:ph type="ftr" idx="10"/>
+            <p:ph type="ftr" idx="12"/>
           </p:nvPr>
         </p:nvSpPr>
         <p:spPr/>
@@ -24202,14 +24842,14 @@
             <a:spLocks noGrp="1"/>
           </p:cNvSpPr>
           <p:nvPr>
-            <p:ph type="sldNum" idx="11"/>
+            <p:ph type="sldNum" idx="13"/>
           </p:nvPr>
         </p:nvSpPr>
         <p:spPr/>
         <p:txBody>
           <a:bodyPr/>
           <a:p>
-            <a:fld id="{5E5D4111-02BD-48AE-A945-D10079902749}" type="slidenum">
+            <a:fld id="{3F64F925-05ED-40BA-8811-7AEE7419704B}" type="slidenum">
               <a:t>57</a:t>
             </a:fld>
           </a:p>
@@ -24247,7 +24887,7 @@
       </p:grpSpPr>
       <p:sp>
         <p:nvSpPr>
-          <p:cNvPr id="162" name="PlaceHolder 1"/>
+          <p:cNvPr id="168" name="PlaceHolder 1"/>
           <p:cNvSpPr>
             <a:spLocks noGrp="1"/>
           </p:cNvSpPr>
@@ -24258,7 +24898,7 @@
         <p:spPr>
           <a:xfrm>
             <a:off x="838080" y="365040"/>
-            <a:ext cx="10514520" cy="1324440"/>
+            <a:ext cx="10514160" cy="1324080"/>
           </a:xfrm>
           <a:prstGeom prst="rect">
             <a:avLst/>
@@ -24306,7 +24946,7 @@
       </p:sp>
       <p:sp>
         <p:nvSpPr>
-          <p:cNvPr id="163" name="PlaceHolder 2"/>
+          <p:cNvPr id="169" name="PlaceHolder 2"/>
           <p:cNvSpPr>
             <a:spLocks noGrp="1"/>
           </p:cNvSpPr>
@@ -24317,7 +24957,7 @@
         <p:spPr>
           <a:xfrm>
             <a:off x="838080" y="1825560"/>
-            <a:ext cx="10514520" cy="4350240"/>
+            <a:ext cx="10514160" cy="4349880"/>
           </a:xfrm>
           <a:prstGeom prst="rect">
             <a:avLst/>
@@ -24727,7 +25367,7 @@
             <a:spLocks noGrp="1"/>
           </p:cNvSpPr>
           <p:nvPr>
-            <p:ph type="ftr" idx="7"/>
+            <p:ph type="ftr" idx="9"/>
           </p:nvPr>
         </p:nvSpPr>
         <p:spPr/>
@@ -24747,14 +25387,14 @@
             <a:spLocks noGrp="1"/>
           </p:cNvSpPr>
           <p:nvPr>
-            <p:ph type="sldNum" idx="8"/>
+            <p:ph type="sldNum" idx="10"/>
           </p:nvPr>
         </p:nvSpPr>
         <p:spPr/>
         <p:txBody>
           <a:bodyPr/>
           <a:p>
-            <a:fld id="{A2F62184-FA3A-45A7-9FF4-67063A580E2C}" type="slidenum">
+            <a:fld id="{16E1E5A7-60D4-496D-B590-624A253E9D35}" type="slidenum">
               <a:t>58</a:t>
             </a:fld>
           </a:p>
@@ -24792,7 +25432,7 @@
       </p:grpSpPr>
       <p:sp>
         <p:nvSpPr>
-          <p:cNvPr id="164" name="PlaceHolder 1"/>
+          <p:cNvPr id="170" name="PlaceHolder 1"/>
           <p:cNvSpPr>
             <a:spLocks noGrp="1"/>
           </p:cNvSpPr>
@@ -24803,7 +25443,7 @@
         <p:spPr>
           <a:xfrm>
             <a:off x="838080" y="365040"/>
-            <a:ext cx="10514520" cy="1324440"/>
+            <a:ext cx="10514160" cy="1324080"/>
           </a:xfrm>
           <a:prstGeom prst="rect">
             <a:avLst/>
@@ -24851,7 +25491,7 @@
       </p:sp>
       <p:sp>
         <p:nvSpPr>
-          <p:cNvPr id="165" name="PlaceHolder 2"/>
+          <p:cNvPr id="171" name="PlaceHolder 2"/>
           <p:cNvSpPr>
             <a:spLocks noGrp="1"/>
           </p:cNvSpPr>
@@ -24862,7 +25502,7 @@
         <p:spPr>
           <a:xfrm>
             <a:off x="838080" y="1825560"/>
-            <a:ext cx="10514520" cy="4350240"/>
+            <a:ext cx="10514160" cy="4349880"/>
           </a:xfrm>
           <a:prstGeom prst="rect">
             <a:avLst/>
@@ -25134,7 +25774,7 @@
             <a:spLocks noGrp="1"/>
           </p:cNvSpPr>
           <p:nvPr>
-            <p:ph type="ftr" idx="7"/>
+            <p:ph type="ftr" idx="9"/>
           </p:nvPr>
         </p:nvSpPr>
         <p:spPr/>
@@ -25154,14 +25794,14 @@
             <a:spLocks noGrp="1"/>
           </p:cNvSpPr>
           <p:nvPr>
-            <p:ph type="sldNum" idx="8"/>
+            <p:ph type="sldNum" idx="10"/>
           </p:nvPr>
         </p:nvSpPr>
         <p:spPr/>
         <p:txBody>
           <a:bodyPr/>
           <a:p>
-            <a:fld id="{14307E9A-51A0-449D-B4EE-1F1D53919B32}" type="slidenum">
+            <a:fld id="{43FB67F6-D68D-49F3-9569-7EE623019AF8}" type="slidenum">
               <a:t>59</a:t>
             </a:fld>
           </a:p>
@@ -25199,7 +25839,7 @@
       </p:grpSpPr>
       <p:sp>
         <p:nvSpPr>
-          <p:cNvPr id="56" name="PlaceHolder 1"/>
+          <p:cNvPr id="62" name="PlaceHolder 1"/>
           <p:cNvSpPr>
             <a:spLocks noGrp="1"/>
           </p:cNvSpPr>
@@ -25210,7 +25850,7 @@
         <p:spPr>
           <a:xfrm>
             <a:off x="838080" y="365040"/>
-            <a:ext cx="10514520" cy="1324440"/>
+            <a:ext cx="10514160" cy="1324080"/>
           </a:xfrm>
           <a:prstGeom prst="rect">
             <a:avLst/>
@@ -25258,7 +25898,7 @@
       </p:sp>
       <p:sp>
         <p:nvSpPr>
-          <p:cNvPr id="57" name="PlaceHolder 2"/>
+          <p:cNvPr id="63" name="PlaceHolder 2"/>
           <p:cNvSpPr>
             <a:spLocks noGrp="1"/>
           </p:cNvSpPr>
@@ -25269,7 +25909,7 @@
         <p:spPr>
           <a:xfrm>
             <a:off x="838080" y="1825560"/>
-            <a:ext cx="10514520" cy="4350240"/>
+            <a:ext cx="10514160" cy="4349880"/>
           </a:xfrm>
           <a:prstGeom prst="rect">
             <a:avLst/>
@@ -25382,7 +26022,7 @@
             <a:spLocks noGrp="1"/>
           </p:cNvSpPr>
           <p:nvPr>
-            <p:ph type="ftr" idx="7"/>
+            <p:ph type="ftr" idx="9"/>
           </p:nvPr>
         </p:nvSpPr>
         <p:spPr/>
@@ -25402,14 +26042,14 @@
             <a:spLocks noGrp="1"/>
           </p:cNvSpPr>
           <p:nvPr>
-            <p:ph type="sldNum" idx="8"/>
+            <p:ph type="sldNum" idx="10"/>
           </p:nvPr>
         </p:nvSpPr>
         <p:spPr/>
         <p:txBody>
           <a:bodyPr/>
           <a:p>
-            <a:fld id="{E848D7AC-2FE9-4605-911B-19E98659DF6D}" type="slidenum">
+            <a:fld id="{4666A650-E345-402B-95F8-517A37F86A10}" type="slidenum">
               <a:t>6</a:t>
             </a:fld>
           </a:p>
@@ -25447,7 +26087,7 @@
       </p:grpSpPr>
       <p:sp>
         <p:nvSpPr>
-          <p:cNvPr id="166" name="PlaceHolder 1"/>
+          <p:cNvPr id="172" name="PlaceHolder 1"/>
           <p:cNvSpPr>
             <a:spLocks noGrp="1"/>
           </p:cNvSpPr>
@@ -25458,7 +26098,7 @@
         <p:spPr>
           <a:xfrm>
             <a:off x="838080" y="365040"/>
-            <a:ext cx="10514520" cy="1324440"/>
+            <a:ext cx="10514160" cy="1324080"/>
           </a:xfrm>
           <a:prstGeom prst="rect">
             <a:avLst/>
@@ -25506,7 +26146,7 @@
       </p:sp>
       <p:sp>
         <p:nvSpPr>
-          <p:cNvPr id="167" name="PlaceHolder 2"/>
+          <p:cNvPr id="173" name="PlaceHolder 2"/>
           <p:cNvSpPr>
             <a:spLocks noGrp="1"/>
           </p:cNvSpPr>
@@ -25517,7 +26157,7 @@
         <p:spPr>
           <a:xfrm>
             <a:off x="838080" y="1825560"/>
-            <a:ext cx="10514520" cy="4350240"/>
+            <a:ext cx="10514160" cy="4349880"/>
           </a:xfrm>
           <a:prstGeom prst="rect">
             <a:avLst/>
@@ -25608,7 +26248,7 @@
             <a:spLocks noGrp="1"/>
           </p:cNvSpPr>
           <p:nvPr>
-            <p:ph type="ftr" idx="7"/>
+            <p:ph type="ftr" idx="9"/>
           </p:nvPr>
         </p:nvSpPr>
         <p:spPr/>
@@ -25628,14 +26268,14 @@
             <a:spLocks noGrp="1"/>
           </p:cNvSpPr>
           <p:nvPr>
-            <p:ph type="sldNum" idx="8"/>
+            <p:ph type="sldNum" idx="10"/>
           </p:nvPr>
         </p:nvSpPr>
         <p:spPr/>
         <p:txBody>
           <a:bodyPr/>
           <a:p>
-            <a:fld id="{BEF48738-50F1-47A6-AFE1-E01F2498D7AC}" type="slidenum">
+            <a:fld id="{FDB945DC-B5A4-485C-A559-78385E6B9E2C}" type="slidenum">
               <a:t>60</a:t>
             </a:fld>
           </a:p>
@@ -25673,7 +26313,7 @@
       </p:grpSpPr>
       <p:sp>
         <p:nvSpPr>
-          <p:cNvPr id="168" name="PlaceHolder 1"/>
+          <p:cNvPr id="174" name="PlaceHolder 1"/>
           <p:cNvSpPr>
             <a:spLocks noGrp="1"/>
           </p:cNvSpPr>
@@ -25684,7 +26324,7 @@
         <p:spPr>
           <a:xfrm>
             <a:off x="839880" y="457200"/>
-            <a:ext cx="9122040" cy="1599120"/>
+            <a:ext cx="9121680" cy="1598760"/>
           </a:xfrm>
           <a:prstGeom prst="rect">
             <a:avLst/>
@@ -25732,7 +26372,7 @@
       </p:sp>
       <p:sp>
         <p:nvSpPr>
-          <p:cNvPr id="169" name="PlaceHolder 2"/>
+          <p:cNvPr id="175" name="PlaceHolder 2"/>
           <p:cNvSpPr>
             <a:spLocks noGrp="1"/>
           </p:cNvSpPr>
@@ -25743,7 +26383,7 @@
         <p:spPr>
           <a:xfrm>
             <a:off x="839880" y="2057400"/>
-            <a:ext cx="10875960" cy="3810600"/>
+            <a:ext cx="10875600" cy="3810240"/>
           </a:xfrm>
           <a:prstGeom prst="rect">
             <a:avLst/>
@@ -26016,7 +26656,7 @@
             <a:spLocks noGrp="1"/>
           </p:cNvSpPr>
           <p:nvPr>
-            <p:ph type="ftr" idx="13"/>
+            <p:ph type="ftr" idx="15"/>
           </p:nvPr>
         </p:nvSpPr>
         <p:spPr/>
@@ -26036,14 +26676,14 @@
             <a:spLocks noGrp="1"/>
           </p:cNvSpPr>
           <p:nvPr>
-            <p:ph type="sldNum" idx="14"/>
+            <p:ph type="sldNum" idx="16"/>
           </p:nvPr>
         </p:nvSpPr>
         <p:spPr/>
         <p:txBody>
           <a:bodyPr/>
           <a:p>
-            <a:fld id="{15CE6AC8-709D-498C-A3F7-F0356A747C3F}" type="slidenum">
+            <a:fld id="{A69DD851-1AD2-4FB4-B625-582275E3E043}" type="slidenum">
               <a:t>61</a:t>
             </a:fld>
           </a:p>
@@ -26081,7 +26721,7 @@
       </p:grpSpPr>
       <p:sp>
         <p:nvSpPr>
-          <p:cNvPr id="170" name="PlaceHolder 1"/>
+          <p:cNvPr id="176" name="PlaceHolder 1"/>
           <p:cNvSpPr>
             <a:spLocks noGrp="1"/>
           </p:cNvSpPr>
@@ -26092,7 +26732,7 @@
         <p:spPr>
           <a:xfrm>
             <a:off x="831960" y="1709640"/>
-            <a:ext cx="10514520" cy="2851560"/>
+            <a:ext cx="10514160" cy="2851200"/>
           </a:xfrm>
           <a:prstGeom prst="rect">
             <a:avLst/>
@@ -26140,7 +26780,7 @@
       </p:sp>
       <p:sp>
         <p:nvSpPr>
-          <p:cNvPr id="171" name="PlaceHolder 2"/>
+          <p:cNvPr id="177" name="PlaceHolder 2"/>
           <p:cNvSpPr>
             <a:spLocks noGrp="1"/>
           </p:cNvSpPr>
@@ -26151,7 +26791,7 @@
         <p:spPr>
           <a:xfrm>
             <a:off x="831960" y="4589640"/>
-            <a:ext cx="10514520" cy="1499040"/>
+            <a:ext cx="10514160" cy="1498680"/>
           </a:xfrm>
           <a:prstGeom prst="rect">
             <a:avLst/>
@@ -26190,7 +26830,7 @@
             <a:spLocks noGrp="1"/>
           </p:cNvSpPr>
           <p:nvPr>
-            <p:ph type="ftr" idx="10"/>
+            <p:ph type="ftr" idx="12"/>
           </p:nvPr>
         </p:nvSpPr>
         <p:spPr/>
@@ -26210,14 +26850,14 @@
             <a:spLocks noGrp="1"/>
           </p:cNvSpPr>
           <p:nvPr>
-            <p:ph type="sldNum" idx="11"/>
+            <p:ph type="sldNum" idx="13"/>
           </p:nvPr>
         </p:nvSpPr>
         <p:spPr/>
         <p:txBody>
           <a:bodyPr/>
           <a:p>
-            <a:fld id="{01767BC1-B5DE-4298-9A1D-E3C504650D77}" type="slidenum">
+            <a:fld id="{1C4A113B-453A-4373-ABEC-D9F2E31D078C}" type="slidenum">
               <a:t>62</a:t>
             </a:fld>
           </a:p>
@@ -26255,7 +26895,7 @@
       </p:grpSpPr>
       <p:sp>
         <p:nvSpPr>
-          <p:cNvPr id="172" name="PlaceHolder 1"/>
+          <p:cNvPr id="178" name="PlaceHolder 1"/>
           <p:cNvSpPr>
             <a:spLocks noGrp="1"/>
           </p:cNvSpPr>
@@ -26266,7 +26906,7 @@
         <p:spPr>
           <a:xfrm>
             <a:off x="838080" y="365040"/>
-            <a:ext cx="10514520" cy="1324440"/>
+            <a:ext cx="10514160" cy="1324080"/>
           </a:xfrm>
           <a:prstGeom prst="rect">
             <a:avLst/>
@@ -26314,7 +26954,7 @@
       </p:sp>
       <p:sp>
         <p:nvSpPr>
-          <p:cNvPr id="173" name="PlaceHolder 2"/>
+          <p:cNvPr id="179" name="PlaceHolder 2"/>
           <p:cNvSpPr>
             <a:spLocks noGrp="1"/>
           </p:cNvSpPr>
@@ -26325,7 +26965,7 @@
         <p:spPr>
           <a:xfrm>
             <a:off x="838080" y="1825560"/>
-            <a:ext cx="10514520" cy="4350240"/>
+            <a:ext cx="10514160" cy="4349880"/>
           </a:xfrm>
           <a:prstGeom prst="rect">
             <a:avLst/>
@@ -26486,7 +27126,7 @@
             <a:spLocks noGrp="1"/>
           </p:cNvSpPr>
           <p:nvPr>
-            <p:ph type="ftr" idx="7"/>
+            <p:ph type="ftr" idx="9"/>
           </p:nvPr>
         </p:nvSpPr>
         <p:spPr/>
@@ -26506,14 +27146,14 @@
             <a:spLocks noGrp="1"/>
           </p:cNvSpPr>
           <p:nvPr>
-            <p:ph type="sldNum" idx="8"/>
+            <p:ph type="sldNum" idx="10"/>
           </p:nvPr>
         </p:nvSpPr>
         <p:spPr/>
         <p:txBody>
           <a:bodyPr/>
           <a:p>
-            <a:fld id="{6167718B-5183-45D3-A4F3-57FA87B35571}" type="slidenum">
+            <a:fld id="{50A6C99D-6D7C-4393-B56B-A22B6E098B9B}" type="slidenum">
               <a:t>63</a:t>
             </a:fld>
           </a:p>
@@ -26551,7 +27191,7 @@
       </p:grpSpPr>
       <p:sp>
         <p:nvSpPr>
-          <p:cNvPr id="174" name="PlaceHolder 1"/>
+          <p:cNvPr id="180" name="PlaceHolder 1"/>
           <p:cNvSpPr>
             <a:spLocks noGrp="1"/>
           </p:cNvSpPr>
@@ -26562,7 +27202,7 @@
         <p:spPr>
           <a:xfrm>
             <a:off x="838080" y="365040"/>
-            <a:ext cx="10514520" cy="1324440"/>
+            <a:ext cx="10514160" cy="1324080"/>
           </a:xfrm>
           <a:prstGeom prst="rect">
             <a:avLst/>
@@ -26610,7 +27250,7 @@
       </p:sp>
       <p:sp>
         <p:nvSpPr>
-          <p:cNvPr id="175" name="PlaceHolder 2"/>
+          <p:cNvPr id="181" name="PlaceHolder 2"/>
           <p:cNvSpPr>
             <a:spLocks noGrp="1"/>
           </p:cNvSpPr>
@@ -26621,7 +27261,7 @@
         <p:spPr>
           <a:xfrm>
             <a:off x="838080" y="1825560"/>
-            <a:ext cx="10514520" cy="4350240"/>
+            <a:ext cx="10514160" cy="4349880"/>
           </a:xfrm>
           <a:prstGeom prst="rect">
             <a:avLst/>
@@ -26848,7 +27488,7 @@
             <a:spLocks noGrp="1"/>
           </p:cNvSpPr>
           <p:nvPr>
-            <p:ph type="ftr" idx="7"/>
+            <p:ph type="ftr" idx="9"/>
           </p:nvPr>
         </p:nvSpPr>
         <p:spPr/>
@@ -26868,14 +27508,14 @@
             <a:spLocks noGrp="1"/>
           </p:cNvSpPr>
           <p:nvPr>
-            <p:ph type="sldNum" idx="8"/>
+            <p:ph type="sldNum" idx="10"/>
           </p:nvPr>
         </p:nvSpPr>
         <p:spPr/>
         <p:txBody>
           <a:bodyPr/>
           <a:p>
-            <a:fld id="{16505AEC-92EF-4EAC-AB76-F5C8E951DEE2}" type="slidenum">
+            <a:fld id="{EC9A6B6B-F8AE-4D29-9EF1-0A5722AA8B6F}" type="slidenum">
               <a:t>64</a:t>
             </a:fld>
           </a:p>
@@ -26913,7 +27553,7 @@
       </p:grpSpPr>
       <p:sp>
         <p:nvSpPr>
-          <p:cNvPr id="176" name="PlaceHolder 1"/>
+          <p:cNvPr id="182" name="PlaceHolder 1"/>
           <p:cNvSpPr>
             <a:spLocks noGrp="1"/>
           </p:cNvSpPr>
@@ -26924,7 +27564,7 @@
         <p:spPr>
           <a:xfrm>
             <a:off x="838080" y="365040"/>
-            <a:ext cx="10514520" cy="1324440"/>
+            <a:ext cx="10514160" cy="1324080"/>
           </a:xfrm>
           <a:prstGeom prst="rect">
             <a:avLst/>
@@ -26972,7 +27612,7 @@
       </p:sp>
       <p:sp>
         <p:nvSpPr>
-          <p:cNvPr id="177" name="PlaceHolder 2"/>
+          <p:cNvPr id="183" name="PlaceHolder 2"/>
           <p:cNvSpPr>
             <a:spLocks noGrp="1"/>
           </p:cNvSpPr>
@@ -26983,7 +27623,7 @@
         <p:spPr>
           <a:xfrm>
             <a:off x="838080" y="1825560"/>
-            <a:ext cx="10514520" cy="4350240"/>
+            <a:ext cx="10514160" cy="4349880"/>
           </a:xfrm>
           <a:prstGeom prst="rect">
             <a:avLst/>
@@ -27414,7 +28054,7 @@
             <a:spLocks noGrp="1"/>
           </p:cNvSpPr>
           <p:nvPr>
-            <p:ph type="ftr" idx="7"/>
+            <p:ph type="ftr" idx="9"/>
           </p:nvPr>
         </p:nvSpPr>
         <p:spPr/>
@@ -27434,14 +28074,14 @@
             <a:spLocks noGrp="1"/>
           </p:cNvSpPr>
           <p:nvPr>
-            <p:ph type="sldNum" idx="8"/>
+            <p:ph type="sldNum" idx="10"/>
           </p:nvPr>
         </p:nvSpPr>
         <p:spPr/>
         <p:txBody>
           <a:bodyPr/>
           <a:p>
-            <a:fld id="{2B939561-FF9B-476B-B717-639A40A0A1D4}" type="slidenum">
+            <a:fld id="{DE7CBF01-7511-428B-8432-09DFCEF8C1E7}" type="slidenum">
               <a:t>65</a:t>
             </a:fld>
           </a:p>
@@ -27479,7 +28119,7 @@
       </p:grpSpPr>
       <p:sp>
         <p:nvSpPr>
-          <p:cNvPr id="178" name="PlaceHolder 1"/>
+          <p:cNvPr id="184" name="PlaceHolder 1"/>
           <p:cNvSpPr>
             <a:spLocks noGrp="1"/>
           </p:cNvSpPr>
@@ -27490,7 +28130,7 @@
         <p:spPr>
           <a:xfrm>
             <a:off x="839880" y="457200"/>
-            <a:ext cx="9122040" cy="1599120"/>
+            <a:ext cx="9121680" cy="1598760"/>
           </a:xfrm>
           <a:prstGeom prst="rect">
             <a:avLst/>
@@ -27538,7 +28178,7 @@
       </p:sp>
       <p:sp>
         <p:nvSpPr>
-          <p:cNvPr id="179" name="PlaceHolder 2"/>
+          <p:cNvPr id="185" name="PlaceHolder 2"/>
           <p:cNvSpPr>
             <a:spLocks noGrp="1"/>
           </p:cNvSpPr>
@@ -27549,7 +28189,7 @@
         <p:spPr>
           <a:xfrm>
             <a:off x="839880" y="2057400"/>
-            <a:ext cx="10875960" cy="3810600"/>
+            <a:ext cx="10875600" cy="3810240"/>
           </a:xfrm>
           <a:prstGeom prst="rect">
             <a:avLst/>
@@ -27703,7 +28343,7 @@
             <a:spLocks noGrp="1"/>
           </p:cNvSpPr>
           <p:nvPr>
-            <p:ph type="ftr" idx="13"/>
+            <p:ph type="ftr" idx="15"/>
           </p:nvPr>
         </p:nvSpPr>
         <p:spPr/>
@@ -27723,14 +28363,14 @@
             <a:spLocks noGrp="1"/>
           </p:cNvSpPr>
           <p:nvPr>
-            <p:ph type="sldNum" idx="14"/>
+            <p:ph type="sldNum" idx="16"/>
           </p:nvPr>
         </p:nvSpPr>
         <p:spPr/>
         <p:txBody>
           <a:bodyPr/>
           <a:p>
-            <a:fld id="{930D3694-C49D-4F89-A597-1F69408FA165}" type="slidenum">
+            <a:fld id="{07EBD7B0-0BC1-4FD1-A56D-F5F45E963602}" type="slidenum">
               <a:t>66</a:t>
             </a:fld>
           </a:p>
@@ -27768,7 +28408,7 @@
       </p:grpSpPr>
       <p:sp>
         <p:nvSpPr>
-          <p:cNvPr id="180" name="PlaceHolder 1"/>
+          <p:cNvPr id="186" name="PlaceHolder 1"/>
           <p:cNvSpPr>
             <a:spLocks noGrp="1"/>
           </p:cNvSpPr>
@@ -27779,7 +28419,7 @@
         <p:spPr>
           <a:xfrm>
             <a:off x="831960" y="1709640"/>
-            <a:ext cx="10514520" cy="2851560"/>
+            <a:ext cx="10514160" cy="2851200"/>
           </a:xfrm>
           <a:prstGeom prst="rect">
             <a:avLst/>
@@ -27827,7 +28467,7 @@
       </p:sp>
       <p:sp>
         <p:nvSpPr>
-          <p:cNvPr id="181" name="PlaceHolder 2"/>
+          <p:cNvPr id="187" name="PlaceHolder 2"/>
           <p:cNvSpPr>
             <a:spLocks noGrp="1"/>
           </p:cNvSpPr>
@@ -27838,7 +28478,7 @@
         <p:spPr>
           <a:xfrm>
             <a:off x="831960" y="4589640"/>
-            <a:ext cx="10514520" cy="1499040"/>
+            <a:ext cx="10514160" cy="1498680"/>
           </a:xfrm>
           <a:prstGeom prst="rect">
             <a:avLst/>
@@ -27877,7 +28517,7 @@
             <a:spLocks noGrp="1"/>
           </p:cNvSpPr>
           <p:nvPr>
-            <p:ph type="ftr" idx="10"/>
+            <p:ph type="ftr" idx="12"/>
           </p:nvPr>
         </p:nvSpPr>
         <p:spPr/>
@@ -27897,14 +28537,14 @@
             <a:spLocks noGrp="1"/>
           </p:cNvSpPr>
           <p:nvPr>
-            <p:ph type="sldNum" idx="11"/>
+            <p:ph type="sldNum" idx="13"/>
           </p:nvPr>
         </p:nvSpPr>
         <p:spPr/>
         <p:txBody>
           <a:bodyPr/>
           <a:p>
-            <a:fld id="{22F64512-A37C-42E0-B561-9B38FAF600D5}" type="slidenum">
+            <a:fld id="{86D64A19-B389-4780-8578-1CFDE77223B9}" type="slidenum">
               <a:t>67</a:t>
             </a:fld>
           </a:p>
@@ -27942,7 +28582,7 @@
       </p:grpSpPr>
       <p:sp>
         <p:nvSpPr>
-          <p:cNvPr id="182" name="PlaceHolder 1"/>
+          <p:cNvPr id="188" name="PlaceHolder 1"/>
           <p:cNvSpPr>
             <a:spLocks noGrp="1"/>
           </p:cNvSpPr>
@@ -27953,7 +28593,7 @@
         <p:spPr>
           <a:xfrm>
             <a:off x="838080" y="365040"/>
-            <a:ext cx="10514520" cy="1324440"/>
+            <a:ext cx="10514160" cy="1324080"/>
           </a:xfrm>
           <a:prstGeom prst="rect">
             <a:avLst/>
@@ -28001,7 +28641,7 @@
       </p:sp>
       <p:sp>
         <p:nvSpPr>
-          <p:cNvPr id="183" name="PlaceHolder 2"/>
+          <p:cNvPr id="189" name="PlaceHolder 2"/>
           <p:cNvSpPr>
             <a:spLocks noGrp="1"/>
           </p:cNvSpPr>
@@ -28012,7 +28652,7 @@
         <p:spPr>
           <a:xfrm>
             <a:off x="838080" y="1825560"/>
-            <a:ext cx="10514520" cy="4350240"/>
+            <a:ext cx="10514160" cy="4349880"/>
           </a:xfrm>
           <a:prstGeom prst="rect">
             <a:avLst/>
@@ -28193,7 +28833,7 @@
             <a:spLocks noGrp="1"/>
           </p:cNvSpPr>
           <p:nvPr>
-            <p:ph type="ftr" idx="7"/>
+            <p:ph type="ftr" idx="9"/>
           </p:nvPr>
         </p:nvSpPr>
         <p:spPr/>
@@ -28213,14 +28853,14 @@
             <a:spLocks noGrp="1"/>
           </p:cNvSpPr>
           <p:nvPr>
-            <p:ph type="sldNum" idx="8"/>
+            <p:ph type="sldNum" idx="10"/>
           </p:nvPr>
         </p:nvSpPr>
         <p:spPr/>
         <p:txBody>
           <a:bodyPr/>
           <a:p>
-            <a:fld id="{54A751FE-4DF8-4F55-8378-D938F60FF4B5}" type="slidenum">
+            <a:fld id="{ED8B51D5-10C9-4DC8-A076-A85E035D88BD}" type="slidenum">
               <a:t>68</a:t>
             </a:fld>
           </a:p>
@@ -28258,7 +28898,7 @@
       </p:grpSpPr>
       <p:sp>
         <p:nvSpPr>
-          <p:cNvPr id="184" name="PlaceHolder 1"/>
+          <p:cNvPr id="190" name="PlaceHolder 1"/>
           <p:cNvSpPr>
             <a:spLocks noGrp="1"/>
           </p:cNvSpPr>
@@ -28269,7 +28909,7 @@
         <p:spPr>
           <a:xfrm>
             <a:off x="838080" y="365040"/>
-            <a:ext cx="10514520" cy="1324440"/>
+            <a:ext cx="10514160" cy="1324080"/>
           </a:xfrm>
           <a:prstGeom prst="rect">
             <a:avLst/>
@@ -28317,7 +28957,7 @@
       </p:sp>
       <p:sp>
         <p:nvSpPr>
-          <p:cNvPr id="185" name="PlaceHolder 2"/>
+          <p:cNvPr id="191" name="PlaceHolder 2"/>
           <p:cNvSpPr>
             <a:spLocks noGrp="1"/>
           </p:cNvSpPr>
@@ -28328,7 +28968,7 @@
         <p:spPr>
           <a:xfrm>
             <a:off x="838080" y="1825560"/>
-            <a:ext cx="10514520" cy="4350240"/>
+            <a:ext cx="10514160" cy="4349880"/>
           </a:xfrm>
           <a:prstGeom prst="rect">
             <a:avLst/>
@@ -28509,7 +29149,7 @@
             <a:spLocks noGrp="1"/>
           </p:cNvSpPr>
           <p:nvPr>
-            <p:ph type="ftr" idx="7"/>
+            <p:ph type="ftr" idx="9"/>
           </p:nvPr>
         </p:nvSpPr>
         <p:spPr/>
@@ -28529,14 +29169,14 @@
             <a:spLocks noGrp="1"/>
           </p:cNvSpPr>
           <p:nvPr>
-            <p:ph type="sldNum" idx="8"/>
+            <p:ph type="sldNum" idx="10"/>
           </p:nvPr>
         </p:nvSpPr>
         <p:spPr/>
         <p:txBody>
           <a:bodyPr/>
           <a:p>
-            <a:fld id="{DE2A22AF-C90A-47C4-8135-B30B1A9A2665}" type="slidenum">
+            <a:fld id="{2219732B-206D-4A16-A495-0A12DEAA39D3}" type="slidenum">
               <a:t>69</a:t>
             </a:fld>
           </a:p>
@@ -28574,7 +29214,7 @@
       </p:grpSpPr>
       <p:sp>
         <p:nvSpPr>
-          <p:cNvPr id="58" name="PlaceHolder 1"/>
+          <p:cNvPr id="64" name="PlaceHolder 1"/>
           <p:cNvSpPr>
             <a:spLocks noGrp="1"/>
           </p:cNvSpPr>
@@ -28585,7 +29225,7 @@
         <p:spPr>
           <a:xfrm>
             <a:off x="838080" y="365040"/>
-            <a:ext cx="10514520" cy="1324440"/>
+            <a:ext cx="10514160" cy="1324080"/>
           </a:xfrm>
           <a:prstGeom prst="rect">
             <a:avLst/>
@@ -28633,7 +29273,7 @@
       </p:sp>
       <p:sp>
         <p:nvSpPr>
-          <p:cNvPr id="59" name="PlaceHolder 2"/>
+          <p:cNvPr id="65" name="PlaceHolder 2"/>
           <p:cNvSpPr>
             <a:spLocks noGrp="1"/>
           </p:cNvSpPr>
@@ -28644,7 +29284,7 @@
         <p:spPr>
           <a:xfrm>
             <a:off x="838080" y="1825560"/>
-            <a:ext cx="10514520" cy="4350240"/>
+            <a:ext cx="10514160" cy="4349880"/>
           </a:xfrm>
           <a:prstGeom prst="rect">
             <a:avLst/>
@@ -29009,7 +29649,7 @@
             <a:spLocks noGrp="1"/>
           </p:cNvSpPr>
           <p:nvPr>
-            <p:ph type="ftr" idx="7"/>
+            <p:ph type="ftr" idx="9"/>
           </p:nvPr>
         </p:nvSpPr>
         <p:spPr/>
@@ -29029,14 +29669,14 @@
             <a:spLocks noGrp="1"/>
           </p:cNvSpPr>
           <p:nvPr>
-            <p:ph type="sldNum" idx="8"/>
+            <p:ph type="sldNum" idx="10"/>
           </p:nvPr>
         </p:nvSpPr>
         <p:spPr/>
         <p:txBody>
           <a:bodyPr/>
           <a:p>
-            <a:fld id="{629DDD60-5218-4943-BF78-0B60DAC3EC78}" type="slidenum">
+            <a:fld id="{AA939C2C-7F7D-4B62-81F1-8EAFE68D735D}" type="slidenum">
               <a:t>7</a:t>
             </a:fld>
           </a:p>
@@ -29074,7 +29714,7 @@
       </p:grpSpPr>
       <p:sp>
         <p:nvSpPr>
-          <p:cNvPr id="186" name="PlaceHolder 1"/>
+          <p:cNvPr id="192" name="PlaceHolder 1"/>
           <p:cNvSpPr>
             <a:spLocks noGrp="1"/>
           </p:cNvSpPr>
@@ -29085,7 +29725,7 @@
         <p:spPr>
           <a:xfrm>
             <a:off x="838080" y="365040"/>
-            <a:ext cx="10514520" cy="1324440"/>
+            <a:ext cx="10514160" cy="1324080"/>
           </a:xfrm>
           <a:prstGeom prst="rect">
             <a:avLst/>
@@ -29133,7 +29773,7 @@
       </p:sp>
       <p:sp>
         <p:nvSpPr>
-          <p:cNvPr id="187" name="PlaceHolder 2"/>
+          <p:cNvPr id="193" name="PlaceHolder 2"/>
           <p:cNvSpPr>
             <a:spLocks noGrp="1"/>
           </p:cNvSpPr>
@@ -29144,7 +29784,7 @@
         <p:spPr>
           <a:xfrm>
             <a:off x="838080" y="1825560"/>
-            <a:ext cx="10514520" cy="4350240"/>
+            <a:ext cx="10514160" cy="4349880"/>
           </a:xfrm>
           <a:prstGeom prst="rect">
             <a:avLst/>
@@ -29269,7 +29909,7 @@
             <a:spLocks noGrp="1"/>
           </p:cNvSpPr>
           <p:nvPr>
-            <p:ph type="ftr" idx="7"/>
+            <p:ph type="ftr" idx="9"/>
           </p:nvPr>
         </p:nvSpPr>
         <p:spPr/>
@@ -29289,14 +29929,14 @@
             <a:spLocks noGrp="1"/>
           </p:cNvSpPr>
           <p:nvPr>
-            <p:ph type="sldNum" idx="8"/>
+            <p:ph type="sldNum" idx="10"/>
           </p:nvPr>
         </p:nvSpPr>
         <p:spPr/>
         <p:txBody>
           <a:bodyPr/>
           <a:p>
-            <a:fld id="{F5D80661-F1AB-45CA-81AC-9220DF465579}" type="slidenum">
+            <a:fld id="{80FF3508-6D5C-4AA2-871E-FED90536575F}" type="slidenum">
               <a:t>70</a:t>
             </a:fld>
           </a:p>
@@ -29334,7 +29974,7 @@
       </p:grpSpPr>
       <p:sp>
         <p:nvSpPr>
-          <p:cNvPr id="188" name="PlaceHolder 1"/>
+          <p:cNvPr id="194" name="PlaceHolder 1"/>
           <p:cNvSpPr>
             <a:spLocks noGrp="1"/>
           </p:cNvSpPr>
@@ -29345,7 +29985,7 @@
         <p:spPr>
           <a:xfrm>
             <a:off x="838080" y="365040"/>
-            <a:ext cx="10514520" cy="1324440"/>
+            <a:ext cx="10514160" cy="1324080"/>
           </a:xfrm>
           <a:prstGeom prst="rect">
             <a:avLst/>
@@ -29393,7 +30033,7 @@
       </p:sp>
       <p:sp>
         <p:nvSpPr>
-          <p:cNvPr id="189" name="PlaceHolder 2"/>
+          <p:cNvPr id="195" name="PlaceHolder 2"/>
           <p:cNvSpPr>
             <a:spLocks noGrp="1"/>
           </p:cNvSpPr>
@@ -29404,7 +30044,7 @@
         <p:spPr>
           <a:xfrm>
             <a:off x="838080" y="1825560"/>
-            <a:ext cx="10514520" cy="4350240"/>
+            <a:ext cx="10514160" cy="4349880"/>
           </a:xfrm>
           <a:prstGeom prst="rect">
             <a:avLst/>
@@ -29529,7 +30169,7 @@
             <a:spLocks noGrp="1"/>
           </p:cNvSpPr>
           <p:nvPr>
-            <p:ph type="ftr" idx="7"/>
+            <p:ph type="ftr" idx="9"/>
           </p:nvPr>
         </p:nvSpPr>
         <p:spPr/>
@@ -29549,14 +30189,14 @@
             <a:spLocks noGrp="1"/>
           </p:cNvSpPr>
           <p:nvPr>
-            <p:ph type="sldNum" idx="8"/>
+            <p:ph type="sldNum" idx="10"/>
           </p:nvPr>
         </p:nvSpPr>
         <p:spPr/>
         <p:txBody>
           <a:bodyPr/>
           <a:p>
-            <a:fld id="{E76119D7-B861-4021-A03B-8B27B3B865D9}" type="slidenum">
+            <a:fld id="{9F8A6361-3BF7-4C77-8D00-2BF0AE1C1262}" type="slidenum">
               <a:t>71</a:t>
             </a:fld>
           </a:p>
@@ -29594,7 +30234,7 @@
       </p:grpSpPr>
       <p:sp>
         <p:nvSpPr>
-          <p:cNvPr id="190" name="PlaceHolder 1"/>
+          <p:cNvPr id="196" name="PlaceHolder 1"/>
           <p:cNvSpPr>
             <a:spLocks noGrp="1"/>
           </p:cNvSpPr>
@@ -29605,7 +30245,7 @@
         <p:spPr>
           <a:xfrm>
             <a:off x="838080" y="365040"/>
-            <a:ext cx="10514520" cy="1324440"/>
+            <a:ext cx="10514160" cy="1324080"/>
           </a:xfrm>
           <a:prstGeom prst="rect">
             <a:avLst/>
@@ -29653,7 +30293,7 @@
       </p:sp>
       <p:sp>
         <p:nvSpPr>
-          <p:cNvPr id="191" name="PlaceHolder 2"/>
+          <p:cNvPr id="197" name="PlaceHolder 2"/>
           <p:cNvSpPr>
             <a:spLocks noGrp="1"/>
           </p:cNvSpPr>
@@ -29664,7 +30304,7 @@
         <p:spPr>
           <a:xfrm>
             <a:off x="838080" y="1825560"/>
-            <a:ext cx="10514520" cy="4350240"/>
+            <a:ext cx="10514160" cy="4349880"/>
           </a:xfrm>
           <a:prstGeom prst="rect">
             <a:avLst/>
@@ -29857,7 +30497,7 @@
             <a:spLocks noGrp="1"/>
           </p:cNvSpPr>
           <p:nvPr>
-            <p:ph type="ftr" idx="7"/>
+            <p:ph type="ftr" idx="9"/>
           </p:nvPr>
         </p:nvSpPr>
         <p:spPr/>
@@ -29877,14 +30517,14 @@
             <a:spLocks noGrp="1"/>
           </p:cNvSpPr>
           <p:nvPr>
-            <p:ph type="sldNum" idx="8"/>
+            <p:ph type="sldNum" idx="10"/>
           </p:nvPr>
         </p:nvSpPr>
         <p:spPr/>
         <p:txBody>
           <a:bodyPr/>
           <a:p>
-            <a:fld id="{24E0092D-9CAE-4B3E-A7C0-C24EE63B606B}" type="slidenum">
+            <a:fld id="{74CDEFC4-A754-4638-8B1B-2D1ED1566F99}" type="slidenum">
               <a:t>72</a:t>
             </a:fld>
           </a:p>
@@ -29922,7 +30562,7 @@
       </p:grpSpPr>
       <p:sp>
         <p:nvSpPr>
-          <p:cNvPr id="192" name="PlaceHolder 1"/>
+          <p:cNvPr id="198" name="PlaceHolder 1"/>
           <p:cNvSpPr>
             <a:spLocks noGrp="1"/>
           </p:cNvSpPr>
@@ -29933,7 +30573,7 @@
         <p:spPr>
           <a:xfrm>
             <a:off x="838080" y="365040"/>
-            <a:ext cx="10514520" cy="1324440"/>
+            <a:ext cx="10514160" cy="1324080"/>
           </a:xfrm>
           <a:prstGeom prst="rect">
             <a:avLst/>
@@ -29981,7 +30621,7 @@
       </p:sp>
       <p:sp>
         <p:nvSpPr>
-          <p:cNvPr id="193" name="PlaceHolder 2"/>
+          <p:cNvPr id="199" name="PlaceHolder 2"/>
           <p:cNvSpPr>
             <a:spLocks noGrp="1"/>
           </p:cNvSpPr>
@@ -29992,7 +30632,7 @@
         <p:spPr>
           <a:xfrm>
             <a:off x="838080" y="1825560"/>
-            <a:ext cx="10514520" cy="4350240"/>
+            <a:ext cx="10514160" cy="4349880"/>
           </a:xfrm>
           <a:prstGeom prst="rect">
             <a:avLst/>
@@ -30117,7 +30757,7 @@
             <a:spLocks noGrp="1"/>
           </p:cNvSpPr>
           <p:nvPr>
-            <p:ph type="ftr" idx="7"/>
+            <p:ph type="ftr" idx="9"/>
           </p:nvPr>
         </p:nvSpPr>
         <p:spPr/>
@@ -30137,14 +30777,14 @@
             <a:spLocks noGrp="1"/>
           </p:cNvSpPr>
           <p:nvPr>
-            <p:ph type="sldNum" idx="8"/>
+            <p:ph type="sldNum" idx="10"/>
           </p:nvPr>
         </p:nvSpPr>
         <p:spPr/>
         <p:txBody>
           <a:bodyPr/>
           <a:p>
-            <a:fld id="{454F8BEC-B122-4CCD-9AC3-44797665CBEF}" type="slidenum">
+            <a:fld id="{28E43B3A-5194-453F-B617-31BAA4CFF94F}" type="slidenum">
               <a:t>73</a:t>
             </a:fld>
           </a:p>
@@ -30182,7 +30822,7 @@
       </p:grpSpPr>
       <p:sp>
         <p:nvSpPr>
-          <p:cNvPr id="194" name="PlaceHolder 1"/>
+          <p:cNvPr id="200" name="PlaceHolder 1"/>
           <p:cNvSpPr>
             <a:spLocks noGrp="1"/>
           </p:cNvSpPr>
@@ -30193,7 +30833,7 @@
         <p:spPr>
           <a:xfrm>
             <a:off x="839880" y="457200"/>
-            <a:ext cx="9122040" cy="1599120"/>
+            <a:ext cx="9121680" cy="1598760"/>
           </a:xfrm>
           <a:prstGeom prst="rect">
             <a:avLst/>
@@ -30241,7 +30881,7 @@
       </p:sp>
       <p:sp>
         <p:nvSpPr>
-          <p:cNvPr id="195" name="PlaceHolder 2"/>
+          <p:cNvPr id="201" name="PlaceHolder 2"/>
           <p:cNvSpPr>
             <a:spLocks noGrp="1"/>
           </p:cNvSpPr>
@@ -30252,7 +30892,7 @@
         <p:spPr>
           <a:xfrm>
             <a:off x="839880" y="2057400"/>
-            <a:ext cx="10875960" cy="3810600"/>
+            <a:ext cx="10875600" cy="3810240"/>
           </a:xfrm>
           <a:prstGeom prst="rect">
             <a:avLst/>
@@ -30406,7 +31046,7 @@
             <a:spLocks noGrp="1"/>
           </p:cNvSpPr>
           <p:nvPr>
-            <p:ph type="ftr" idx="13"/>
+            <p:ph type="ftr" idx="15"/>
           </p:nvPr>
         </p:nvSpPr>
         <p:spPr/>
@@ -30426,14 +31066,14 @@
             <a:spLocks noGrp="1"/>
           </p:cNvSpPr>
           <p:nvPr>
-            <p:ph type="sldNum" idx="14"/>
+            <p:ph type="sldNum" idx="16"/>
           </p:nvPr>
         </p:nvSpPr>
         <p:spPr/>
         <p:txBody>
           <a:bodyPr/>
           <a:p>
-            <a:fld id="{9E064B10-3C09-4FED-B6E8-479A2AC296D2}" type="slidenum">
+            <a:fld id="{FA89A07A-6630-4955-802E-D1E907BB7934}" type="slidenum">
               <a:t>74</a:t>
             </a:fld>
           </a:p>
@@ -30471,7 +31111,7 @@
       </p:grpSpPr>
       <p:sp>
         <p:nvSpPr>
-          <p:cNvPr id="196" name="PlaceHolder 1"/>
+          <p:cNvPr id="202" name="PlaceHolder 1"/>
           <p:cNvSpPr>
             <a:spLocks noGrp="1"/>
           </p:cNvSpPr>
@@ -30482,7 +31122,7 @@
         <p:spPr>
           <a:xfrm>
             <a:off x="831960" y="1709640"/>
-            <a:ext cx="10514520" cy="2851560"/>
+            <a:ext cx="10514160" cy="2851200"/>
           </a:xfrm>
           <a:prstGeom prst="rect">
             <a:avLst/>
@@ -30530,7 +31170,7 @@
       </p:sp>
       <p:sp>
         <p:nvSpPr>
-          <p:cNvPr id="197" name="PlaceHolder 2"/>
+          <p:cNvPr id="203" name="PlaceHolder 2"/>
           <p:cNvSpPr>
             <a:spLocks noGrp="1"/>
           </p:cNvSpPr>
@@ -30541,7 +31181,7 @@
         <p:spPr>
           <a:xfrm>
             <a:off x="831960" y="4589640"/>
-            <a:ext cx="10514520" cy="1499040"/>
+            <a:ext cx="10514160" cy="1498680"/>
           </a:xfrm>
           <a:prstGeom prst="rect">
             <a:avLst/>
@@ -30580,7 +31220,7 @@
             <a:spLocks noGrp="1"/>
           </p:cNvSpPr>
           <p:nvPr>
-            <p:ph type="ftr" idx="10"/>
+            <p:ph type="ftr" idx="12"/>
           </p:nvPr>
         </p:nvSpPr>
         <p:spPr/>
@@ -30600,14 +31240,14 @@
             <a:spLocks noGrp="1"/>
           </p:cNvSpPr>
           <p:nvPr>
-            <p:ph type="sldNum" idx="11"/>
+            <p:ph type="sldNum" idx="13"/>
           </p:nvPr>
         </p:nvSpPr>
         <p:spPr/>
         <p:txBody>
           <a:bodyPr/>
           <a:p>
-            <a:fld id="{3F0A3F60-E29A-4EC5-8221-FBA21AEAE37A}" type="slidenum">
+            <a:fld id="{BA4A729C-B5B1-4B91-86C5-3ED9487B5261}" type="slidenum">
               <a:t>75</a:t>
             </a:fld>
           </a:p>
@@ -30645,7 +31285,7 @@
       </p:grpSpPr>
       <p:sp>
         <p:nvSpPr>
-          <p:cNvPr id="198" name="PlaceHolder 1"/>
+          <p:cNvPr id="204" name="PlaceHolder 1"/>
           <p:cNvSpPr>
             <a:spLocks noGrp="1"/>
           </p:cNvSpPr>
@@ -30656,7 +31296,7 @@
         <p:spPr>
           <a:xfrm>
             <a:off x="838080" y="365040"/>
-            <a:ext cx="10514520" cy="1324440"/>
+            <a:ext cx="10514160" cy="1324080"/>
           </a:xfrm>
           <a:prstGeom prst="rect">
             <a:avLst/>
@@ -30704,7 +31344,7 @@
       </p:sp>
       <p:sp>
         <p:nvSpPr>
-          <p:cNvPr id="199" name="PlaceHolder 2"/>
+          <p:cNvPr id="205" name="PlaceHolder 2"/>
           <p:cNvSpPr>
             <a:spLocks noGrp="1"/>
           </p:cNvSpPr>
@@ -30715,7 +31355,7 @@
         <p:spPr>
           <a:xfrm>
             <a:off x="838080" y="1825560"/>
-            <a:ext cx="10514520" cy="4350240"/>
+            <a:ext cx="10514160" cy="4349880"/>
           </a:xfrm>
           <a:prstGeom prst="rect">
             <a:avLst/>
@@ -30840,7 +31480,7 @@
             <a:spLocks noGrp="1"/>
           </p:cNvSpPr>
           <p:nvPr>
-            <p:ph type="ftr" idx="7"/>
+            <p:ph type="ftr" idx="9"/>
           </p:nvPr>
         </p:nvSpPr>
         <p:spPr/>
@@ -30860,14 +31500,14 @@
             <a:spLocks noGrp="1"/>
           </p:cNvSpPr>
           <p:nvPr>
-            <p:ph type="sldNum" idx="8"/>
+            <p:ph type="sldNum" idx="10"/>
           </p:nvPr>
         </p:nvSpPr>
         <p:spPr/>
         <p:txBody>
           <a:bodyPr/>
           <a:p>
-            <a:fld id="{690BDE97-13FE-4A89-A075-6874F2627B19}" type="slidenum">
+            <a:fld id="{41BCEAFA-6070-474C-8CA8-0A34CEB7E785}" type="slidenum">
               <a:t>76</a:t>
             </a:fld>
           </a:p>
@@ -30905,7 +31545,7 @@
       </p:grpSpPr>
       <p:sp>
         <p:nvSpPr>
-          <p:cNvPr id="200" name="PlaceHolder 1"/>
+          <p:cNvPr id="206" name="PlaceHolder 1"/>
           <p:cNvSpPr>
             <a:spLocks noGrp="1"/>
           </p:cNvSpPr>
@@ -30916,7 +31556,7 @@
         <p:spPr>
           <a:xfrm>
             <a:off x="838080" y="365040"/>
-            <a:ext cx="10514520" cy="1324440"/>
+            <a:ext cx="10514160" cy="1324080"/>
           </a:xfrm>
           <a:prstGeom prst="rect">
             <a:avLst/>
@@ -30964,7 +31604,7 @@
       </p:sp>
       <p:sp>
         <p:nvSpPr>
-          <p:cNvPr id="201" name="PlaceHolder 2"/>
+          <p:cNvPr id="207" name="PlaceHolder 2"/>
           <p:cNvSpPr>
             <a:spLocks noGrp="1"/>
           </p:cNvSpPr>
@@ -30975,7 +31615,7 @@
         <p:spPr>
           <a:xfrm>
             <a:off x="838080" y="1825560"/>
-            <a:ext cx="10514520" cy="4350240"/>
+            <a:ext cx="10514160" cy="4349880"/>
           </a:xfrm>
           <a:prstGeom prst="rect">
             <a:avLst/>
@@ -31202,7 +31842,7 @@
             <a:spLocks noGrp="1"/>
           </p:cNvSpPr>
           <p:nvPr>
-            <p:ph type="ftr" idx="7"/>
+            <p:ph type="ftr" idx="9"/>
           </p:nvPr>
         </p:nvSpPr>
         <p:spPr/>
@@ -31222,14 +31862,14 @@
             <a:spLocks noGrp="1"/>
           </p:cNvSpPr>
           <p:nvPr>
-            <p:ph type="sldNum" idx="8"/>
+            <p:ph type="sldNum" idx="10"/>
           </p:nvPr>
         </p:nvSpPr>
         <p:spPr/>
         <p:txBody>
           <a:bodyPr/>
           <a:p>
-            <a:fld id="{A8C30104-EF73-4620-9DFB-327D1C4502D7}" type="slidenum">
+            <a:fld id="{D23D2B65-3B7C-4C58-9609-E34CE144C63F}" type="slidenum">
               <a:t>77</a:t>
             </a:fld>
           </a:p>
@@ -31267,7 +31907,7 @@
       </p:grpSpPr>
       <p:sp>
         <p:nvSpPr>
-          <p:cNvPr id="202" name="PlaceHolder 1"/>
+          <p:cNvPr id="208" name="PlaceHolder 1"/>
           <p:cNvSpPr>
             <a:spLocks noGrp="1"/>
           </p:cNvSpPr>
@@ -31278,7 +31918,7 @@
         <p:spPr>
           <a:xfrm>
             <a:off x="838080" y="365040"/>
-            <a:ext cx="10514520" cy="1324440"/>
+            <a:ext cx="10514160" cy="1324080"/>
           </a:xfrm>
           <a:prstGeom prst="rect">
             <a:avLst/>
@@ -31326,7 +31966,7 @@
       </p:sp>
       <p:sp>
         <p:nvSpPr>
-          <p:cNvPr id="203" name="PlaceHolder 2"/>
+          <p:cNvPr id="209" name="PlaceHolder 2"/>
           <p:cNvSpPr>
             <a:spLocks noGrp="1"/>
           </p:cNvSpPr>
@@ -31337,7 +31977,7 @@
         <p:spPr>
           <a:xfrm>
             <a:off x="838080" y="1825560"/>
-            <a:ext cx="10514520" cy="4350240"/>
+            <a:ext cx="10514160" cy="4349880"/>
           </a:xfrm>
           <a:prstGeom prst="rect">
             <a:avLst/>
@@ -31428,7 +32068,7 @@
             <a:spLocks noGrp="1"/>
           </p:cNvSpPr>
           <p:nvPr>
-            <p:ph type="ftr" idx="7"/>
+            <p:ph type="ftr" idx="9"/>
           </p:nvPr>
         </p:nvSpPr>
         <p:spPr/>
@@ -31448,14 +32088,14 @@
             <a:spLocks noGrp="1"/>
           </p:cNvSpPr>
           <p:nvPr>
-            <p:ph type="sldNum" idx="8"/>
+            <p:ph type="sldNum" idx="10"/>
           </p:nvPr>
         </p:nvSpPr>
         <p:spPr/>
         <p:txBody>
           <a:bodyPr/>
           <a:p>
-            <a:fld id="{F02EFB36-BB63-4E82-BD64-15DAFE872978}" type="slidenum">
+            <a:fld id="{E21894F1-8A5E-4458-B8EB-22E958DA576F}" type="slidenum">
               <a:t>78</a:t>
             </a:fld>
           </a:p>
@@ -31493,7 +32133,7 @@
       </p:grpSpPr>
       <p:sp>
         <p:nvSpPr>
-          <p:cNvPr id="204" name="PlaceHolder 1"/>
+          <p:cNvPr id="210" name="PlaceHolder 1"/>
           <p:cNvSpPr>
             <a:spLocks noGrp="1"/>
           </p:cNvSpPr>
@@ -31504,7 +32144,7 @@
         <p:spPr>
           <a:xfrm>
             <a:off x="839880" y="457200"/>
-            <a:ext cx="9122040" cy="1599120"/>
+            <a:ext cx="9121680" cy="1598760"/>
           </a:xfrm>
           <a:prstGeom prst="rect">
             <a:avLst/>
@@ -31552,7 +32192,7 @@
       </p:sp>
       <p:sp>
         <p:nvSpPr>
-          <p:cNvPr id="205" name="PlaceHolder 2"/>
+          <p:cNvPr id="211" name="PlaceHolder 2"/>
           <p:cNvSpPr>
             <a:spLocks noGrp="1"/>
           </p:cNvSpPr>
@@ -31563,7 +32203,7 @@
         <p:spPr>
           <a:xfrm>
             <a:off x="839880" y="2057400"/>
-            <a:ext cx="10875960" cy="3810600"/>
+            <a:ext cx="10875600" cy="3810240"/>
           </a:xfrm>
           <a:prstGeom prst="rect">
             <a:avLst/>
@@ -31717,7 +32357,7 @@
             <a:spLocks noGrp="1"/>
           </p:cNvSpPr>
           <p:nvPr>
-            <p:ph type="ftr" idx="13"/>
+            <p:ph type="ftr" idx="15"/>
           </p:nvPr>
         </p:nvSpPr>
         <p:spPr/>
@@ -31737,14 +32377,14 @@
             <a:spLocks noGrp="1"/>
           </p:cNvSpPr>
           <p:nvPr>
-            <p:ph type="sldNum" idx="14"/>
+            <p:ph type="sldNum" idx="16"/>
           </p:nvPr>
         </p:nvSpPr>
         <p:spPr/>
         <p:txBody>
           <a:bodyPr/>
           <a:p>
-            <a:fld id="{8211C053-2708-4673-A6FA-CF5044BFF44B}" type="slidenum">
+            <a:fld id="{100FB43D-D18E-4124-93B9-07F0CB6211FB}" type="slidenum">
               <a:t>79</a:t>
             </a:fld>
           </a:p>
@@ -31782,7 +32422,7 @@
       </p:grpSpPr>
       <p:sp>
         <p:nvSpPr>
-          <p:cNvPr id="60" name="PlaceHolder 1"/>
+          <p:cNvPr id="66" name="PlaceHolder 1"/>
           <p:cNvSpPr>
             <a:spLocks noGrp="1"/>
           </p:cNvSpPr>
@@ -31793,7 +32433,7 @@
         <p:spPr>
           <a:xfrm>
             <a:off x="839880" y="457200"/>
-            <a:ext cx="3931200" cy="1599120"/>
+            <a:ext cx="3930840" cy="1598760"/>
           </a:xfrm>
           <a:prstGeom prst="rect">
             <a:avLst/>
@@ -31841,7 +32481,7 @@
       </p:sp>
       <p:sp>
         <p:nvSpPr>
-          <p:cNvPr id="61" name="PlaceHolder 2"/>
+          <p:cNvPr id="67" name="PlaceHolder 2"/>
           <p:cNvSpPr>
             <a:spLocks noGrp="1"/>
           </p:cNvSpPr>
@@ -31852,7 +32492,7 @@
         <p:spPr>
           <a:xfrm>
             <a:off x="839880" y="2057400"/>
-            <a:ext cx="10875960" cy="3810600"/>
+            <a:ext cx="10875600" cy="3810240"/>
           </a:xfrm>
           <a:prstGeom prst="rect">
             <a:avLst/>
@@ -32006,7 +32646,7 @@
             <a:spLocks noGrp="1"/>
           </p:cNvSpPr>
           <p:nvPr>
-            <p:ph type="ftr" idx="13"/>
+            <p:ph type="ftr" idx="15"/>
           </p:nvPr>
         </p:nvSpPr>
         <p:spPr/>
@@ -32026,14 +32666,14 @@
             <a:spLocks noGrp="1"/>
           </p:cNvSpPr>
           <p:nvPr>
-            <p:ph type="sldNum" idx="14"/>
+            <p:ph type="sldNum" idx="16"/>
           </p:nvPr>
         </p:nvSpPr>
         <p:spPr/>
         <p:txBody>
           <a:bodyPr/>
           <a:p>
-            <a:fld id="{7DFB9F76-D58F-4DFD-82AF-82D83628BB84}" type="slidenum">
+            <a:fld id="{F6A21FD7-C974-49B9-8F8C-BD21BB1A80DC}" type="slidenum">
               <a:t>8</a:t>
             </a:fld>
           </a:p>
@@ -32071,7 +32711,7 @@
       </p:grpSpPr>
       <p:sp>
         <p:nvSpPr>
-          <p:cNvPr id="206" name="PlaceHolder 1"/>
+          <p:cNvPr id="212" name="PlaceHolder 1"/>
           <p:cNvSpPr>
             <a:spLocks noGrp="1"/>
           </p:cNvSpPr>
@@ -32081,8 +32721,8 @@
         </p:nvSpPr>
         <p:spPr>
           <a:xfrm>
-            <a:off x="1523880" y="1122480"/>
-            <a:ext cx="9142920" cy="2386440"/>
+            <a:off x="838080" y="365040"/>
+            <a:ext cx="10514160" cy="1324080"/>
           </a:xfrm>
           <a:prstGeom prst="rect">
             <a:avLst/>
@@ -32093,11 +32733,11 @@
           </a:ln>
         </p:spPr>
         <p:txBody>
-          <a:bodyPr lIns="91440" rIns="91440" tIns="45720" bIns="45720" anchor="b">
+          <a:bodyPr lIns="91440" rIns="91440" tIns="45720" bIns="45720" anchor="ctr">
             <a:noAutofit/>
           </a:bodyPr>
           <a:p>
-            <a:pPr indent="0" algn="ctr" defTabSz="914400">
+            <a:pPr indent="0" defTabSz="914400">
               <a:lnSpc>
                 <a:spcPct val="90000"/>
               </a:lnSpc>
@@ -32107,6 +32747,288 @@
               </a:tabLst>
             </a:pPr>
             <a:r>
+              <a:rPr b="1" lang="en-GB" sz="4400" strike="noStrike" u="none">
+                <a:solidFill>
+                  <a:schemeClr val="lt1"/>
+                </a:solidFill>
+                <a:effectLst/>
+                <a:uFillTx/>
+                <a:latin typeface="Arial"/>
+              </a:rPr>
+              <a:t>And then what??</a:t>
+            </a:r>
+            <a:endParaRPr b="0" lang="sv-SE" sz="4400" strike="noStrike" u="none">
+              <a:solidFill>
+                <a:srgbClr val="ffffff"/>
+              </a:solidFill>
+              <a:effectLst/>
+              <a:uFillTx/>
+              <a:latin typeface="Arial"/>
+            </a:endParaRPr>
+          </a:p>
+        </p:txBody>
+      </p:sp>
+      <p:sp>
+        <p:nvSpPr>
+          <p:cNvPr id="213" name="PlaceHolder 2"/>
+          <p:cNvSpPr>
+            <a:spLocks noGrp="1"/>
+          </p:cNvSpPr>
+          <p:nvPr>
+            <p:ph/>
+          </p:nvPr>
+        </p:nvSpPr>
+        <p:spPr>
+          <a:xfrm>
+            <a:off x="838080" y="1825560"/>
+            <a:ext cx="10514160" cy="4349880"/>
+          </a:xfrm>
+          <a:prstGeom prst="rect">
+            <a:avLst/>
+          </a:prstGeom>
+          <a:noFill/>
+          <a:ln w="0">
+            <a:noFill/>
+          </a:ln>
+        </p:spPr>
+        <p:txBody>
+          <a:bodyPr lIns="91440" rIns="91440" tIns="45720" bIns="45720" anchor="t">
+            <a:normAutofit/>
+          </a:bodyPr>
+          <a:p>
+            <a:pPr marL="228600" indent="-228600" defTabSz="914400">
+              <a:lnSpc>
+                <a:spcPct val="90000"/>
+              </a:lnSpc>
+              <a:spcBef>
+                <a:spcPts val="1001"/>
+              </a:spcBef>
+              <a:buClr>
+                <a:srgbClr val="ffffff"/>
+              </a:buClr>
+              <a:buFont typeface="Arial"/>
+              <a:buChar char="•"/>
+            </a:pPr>
+            <a:r>
+              <a:rPr b="0" lang="en-GB" sz="2100" strike="noStrike" u="none">
+                <a:solidFill>
+                  <a:schemeClr val="lt1"/>
+                </a:solidFill>
+                <a:effectLst/>
+                <a:uFillTx/>
+                <a:latin typeface="Arial"/>
+                <a:hlinkClick r:id="rId1"/>
+              </a:rPr>
+              <a:t>https://github.com/search?q=language:PowerShell&amp;type=Repositories</a:t>
+            </a:r>
+            <a:endParaRPr b="0" lang="sv-SE" sz="2100" strike="noStrike" u="none">
+              <a:solidFill>
+                <a:srgbClr val="ffffff"/>
+              </a:solidFill>
+              <a:effectLst/>
+              <a:uFillTx/>
+              <a:latin typeface="Arial"/>
+            </a:endParaRPr>
+          </a:p>
+          <a:p>
+            <a:pPr marL="228600" indent="-228600" defTabSz="914400">
+              <a:lnSpc>
+                <a:spcPct val="90000"/>
+              </a:lnSpc>
+              <a:spcBef>
+                <a:spcPts val="1001"/>
+              </a:spcBef>
+              <a:buClr>
+                <a:srgbClr val="ffffff"/>
+              </a:buClr>
+              <a:buFont typeface="Arial"/>
+              <a:buChar char="•"/>
+            </a:pPr>
+            <a:r>
+              <a:rPr b="0" lang="en-GB" sz="2100" strike="noStrike" u="none">
+                <a:solidFill>
+                  <a:schemeClr val="lt1"/>
+                </a:solidFill>
+                <a:effectLst/>
+                <a:uFillTx/>
+                <a:latin typeface="Arial"/>
+                <a:hlinkClick r:id="rId2"/>
+              </a:rPr>
+              <a:t>https://powershelluniversal.com/</a:t>
+            </a:r>
+            <a:endParaRPr b="0" lang="sv-SE" sz="2100" strike="noStrike" u="none">
+              <a:solidFill>
+                <a:srgbClr val="ffffff"/>
+              </a:solidFill>
+              <a:effectLst/>
+              <a:uFillTx/>
+              <a:latin typeface="Arial"/>
+            </a:endParaRPr>
+          </a:p>
+          <a:p>
+            <a:pPr marL="228600" indent="-228600" defTabSz="914400">
+              <a:lnSpc>
+                <a:spcPct val="90000"/>
+              </a:lnSpc>
+              <a:spcBef>
+                <a:spcPts val="1001"/>
+              </a:spcBef>
+              <a:buClr>
+                <a:srgbClr val="ffffff"/>
+              </a:buClr>
+              <a:buFont typeface="Arial"/>
+              <a:buChar char="•"/>
+            </a:pPr>
+            <a:r>
+              <a:rPr b="0" lang="en-GB" sz="2100" strike="noStrike" u="none">
+                <a:solidFill>
+                  <a:schemeClr val="lt1"/>
+                </a:solidFill>
+                <a:effectLst/>
+                <a:uFillTx/>
+                <a:latin typeface="Arial"/>
+                <a:hlinkClick r:id="rId3"/>
+              </a:rPr>
+              <a:t>https://www.manning.com/books/learn-powershell-toolmaking-in-a-month-of-lunches</a:t>
+            </a:r>
+            <a:endParaRPr b="0" lang="sv-SE" sz="2100" strike="noStrike" u="none">
+              <a:solidFill>
+                <a:srgbClr val="ffffff"/>
+              </a:solidFill>
+              <a:effectLst/>
+              <a:uFillTx/>
+              <a:latin typeface="Arial"/>
+            </a:endParaRPr>
+          </a:p>
+          <a:p>
+            <a:pPr marL="228600" indent="0" defTabSz="914400">
+              <a:lnSpc>
+                <a:spcPct val="90000"/>
+              </a:lnSpc>
+              <a:spcBef>
+                <a:spcPts val="1001"/>
+              </a:spcBef>
+              <a:buNone/>
+            </a:pPr>
+            <a:endParaRPr b="0" lang="sv-SE" sz="2100" strike="noStrike" u="none">
+              <a:solidFill>
+                <a:srgbClr val="ffffff"/>
+              </a:solidFill>
+              <a:effectLst/>
+              <a:uFillTx/>
+              <a:latin typeface="Arial"/>
+            </a:endParaRPr>
+          </a:p>
+        </p:txBody>
+      </p:sp>
+      <p:sp>
+        <p:nvSpPr>
+          <p:cNvPr id="4" name="PlaceHolder 3"/>
+          <p:cNvSpPr>
+            <a:spLocks noGrp="1"/>
+          </p:cNvSpPr>
+          <p:nvPr>
+            <p:ph type="ftr" idx="9"/>
+          </p:nvPr>
+        </p:nvSpPr>
+        <p:spPr/>
+        <p:txBody>
+          <a:bodyPr/>
+          <a:p>
+            <a:r>
+              <a:t>Björn Sundling  bjorn.sundling@advania.com</a:t>
+            </a:r>
+          </a:p>
+        </p:txBody>
+      </p:sp>
+      <p:sp>
+        <p:nvSpPr>
+          <p:cNvPr id="5" name="PlaceHolder 4"/>
+          <p:cNvSpPr>
+            <a:spLocks noGrp="1"/>
+          </p:cNvSpPr>
+          <p:nvPr>
+            <p:ph type="sldNum" idx="10"/>
+          </p:nvPr>
+        </p:nvSpPr>
+        <p:spPr/>
+        <p:txBody>
+          <a:bodyPr/>
+          <a:p>
+            <a:fld id="{2868FFC1-F9B7-4E40-A6B6-3DCF8A1E5063}" type="slidenum">
+              <a:t>80</a:t>
+            </a:fld>
+          </a:p>
+        </p:txBody>
+      </p:sp>
+    </p:spTree>
+  </p:cSld>
+  <mc:AlternateContent>
+    <mc:Choice Requires="p14">
+      <p:transition spd="slow" p14:dur="2000"/>
+    </mc:Choice>
+    <mc:Fallback>
+      <p:transition spd="slow"/>
+    </mc:Fallback>
+  </mc:AlternateContent>
+</p:sld>
+</file>
+
+<file path=ppt/slides/slide81.xml><?xml version="1.0" encoding="utf-8"?>
+<p:sld xmlns:a="http://schemas.openxmlformats.org/drawingml/2006/main" xmlns:p="http://schemas.openxmlformats.org/presentationml/2006/main" xmlns:r="http://schemas.openxmlformats.org/officeDocument/2006/relationships" xmlns:p14="http://schemas.microsoft.com/office/powerpoint/2010/main" xmlns:p15="http://schemas.microsoft.com/office/powerpoint/2012/main" xmlns:mc="http://schemas.openxmlformats.org/markup-compatibility/2006">
+  <p:cSld>
+    <p:spTree>
+      <p:nvGrpSpPr>
+        <p:cNvPr id="1" name=""/>
+        <p:cNvGrpSpPr/>
+        <p:nvPr/>
+      </p:nvGrpSpPr>
+      <p:grpSpPr>
+        <a:xfrm>
+          <a:off x="0" y="0"/>
+          <a:ext cx="0" cy="0"/>
+          <a:chOff x="0" y="0"/>
+          <a:chExt cx="0" cy="0"/>
+        </a:xfrm>
+      </p:grpSpPr>
+      <p:sp>
+        <p:nvSpPr>
+          <p:cNvPr id="214" name="PlaceHolder 1"/>
+          <p:cNvSpPr>
+            <a:spLocks noGrp="1"/>
+          </p:cNvSpPr>
+          <p:nvPr>
+            <p:ph type="title"/>
+          </p:nvPr>
+        </p:nvSpPr>
+        <p:spPr>
+          <a:xfrm>
+            <a:off x="1523880" y="1122480"/>
+            <a:ext cx="9142560" cy="2386080"/>
+          </a:xfrm>
+          <a:prstGeom prst="rect">
+            <a:avLst/>
+          </a:prstGeom>
+          <a:noFill/>
+          <a:ln w="0">
+            <a:noFill/>
+          </a:ln>
+        </p:spPr>
+        <p:txBody>
+          <a:bodyPr lIns="91440" rIns="91440" tIns="45720" bIns="45720" anchor="b">
+            <a:noAutofit/>
+          </a:bodyPr>
+          <a:p>
+            <a:pPr indent="0" algn="ctr" defTabSz="914400">
+              <a:lnSpc>
+                <a:spcPct val="90000"/>
+              </a:lnSpc>
+              <a:buNone/>
+              <a:tabLst>
+                <a:tab algn="l" pos="0"/>
+              </a:tabLst>
+            </a:pPr>
+            <a:r>
               <a:rPr b="0" lang="en-GB" sz="6000" strike="noStrike" u="none">
                 <a:solidFill>
                   <a:schemeClr val="lt1"/>
@@ -32130,7 +33052,7 @@
       </p:sp>
       <p:sp>
         <p:nvSpPr>
-          <p:cNvPr id="207" name="PlaceHolder 2"/>
+          <p:cNvPr id="215" name="PlaceHolder 2"/>
           <p:cNvSpPr>
             <a:spLocks noGrp="1"/>
           </p:cNvSpPr>
@@ -32141,7 +33063,7 @@
         <p:spPr>
           <a:xfrm>
             <a:off x="1523880" y="3602160"/>
-            <a:ext cx="9142920" cy="1654560"/>
+            <a:ext cx="9142560" cy="1654200"/>
           </a:xfrm>
           <a:prstGeom prst="rect">
             <a:avLst/>
@@ -32222,7 +33144,7 @@
       </p:grpSpPr>
       <p:sp>
         <p:nvSpPr>
-          <p:cNvPr id="62" name="PlaceHolder 1"/>
+          <p:cNvPr id="68" name="PlaceHolder 1"/>
           <p:cNvSpPr>
             <a:spLocks noGrp="1"/>
           </p:cNvSpPr>
@@ -32233,7 +33155,7 @@
         <p:spPr>
           <a:xfrm>
             <a:off x="838080" y="365040"/>
-            <a:ext cx="10514520" cy="1324440"/>
+            <a:ext cx="10514160" cy="1324080"/>
           </a:xfrm>
           <a:prstGeom prst="rect">
             <a:avLst/>
@@ -32281,7 +33203,7 @@
       </p:sp>
       <p:sp>
         <p:nvSpPr>
-          <p:cNvPr id="63" name="PlaceHolder 2"/>
+          <p:cNvPr id="69" name="PlaceHolder 2"/>
           <p:cNvSpPr>
             <a:spLocks noGrp="1"/>
           </p:cNvSpPr>
@@ -32292,7 +33214,7 @@
         <p:spPr>
           <a:xfrm>
             <a:off x="838080" y="1825560"/>
-            <a:ext cx="10514520" cy="4350240"/>
+            <a:ext cx="10514160" cy="4349880"/>
           </a:xfrm>
           <a:prstGeom prst="rect">
             <a:avLst/>
@@ -32451,7 +33373,7 @@
             <a:spLocks noGrp="1"/>
           </p:cNvSpPr>
           <p:nvPr>
-            <p:ph type="ftr" idx="7"/>
+            <p:ph type="ftr" idx="9"/>
           </p:nvPr>
         </p:nvSpPr>
         <p:spPr/>
@@ -32471,14 +33393,14 @@
             <a:spLocks noGrp="1"/>
           </p:cNvSpPr>
           <p:nvPr>
-            <p:ph type="sldNum" idx="8"/>
+            <p:ph type="sldNum" idx="10"/>
           </p:nvPr>
         </p:nvSpPr>
         <p:spPr/>
         <p:txBody>
           <a:bodyPr/>
           <a:p>
-            <a:fld id="{0153A44B-0804-477E-905A-543F1EDF466D}" type="slidenum">
+            <a:fld id="{7698AFAA-EFA0-4E20-94F3-7099783CBF6F}" type="slidenum">
               <a:t>9</a:t>
             </a:fld>
           </a:p>
@@ -32921,7 +33843,7 @@
 </a:theme>
 </file>
 
-<file path=ppt/theme/theme6.xml><?xml version="1.0" encoding="utf-8"?>
+<file path=ppt/theme/theme7.xml><?xml version="1.0" encoding="utf-8"?>
 <a:theme xmlns:a="http://schemas.openxmlformats.org/drawingml/2006/main" xmlns:r="http://schemas.openxmlformats.org/officeDocument/2006/relationships" name="Office Theme">
   <a:themeElements>
     <a:clrScheme name="LibreOffice">
